--- a/files/creating-a-meaningful-life.pptx
+++ b/files/creating-a-meaningful-life.pptx
@@ -512,7 +512,7 @@
           <a:lstStyle/>
           <a:p>
             <a:r>
-              <a:t>开场约30秒：你有没有觉得自己"不够好"过？如果有，今天我想讲的，可能和你有关。</a:t>
+              <a:t/>
             </a:r>
           </a:p>
         </p:txBody>
@@ -582,7 +582,7 @@
           <a:lstStyle/>
           <a:p>
             <a:r>
-              <a:t>意义是动态过程；标准是"成长+对他人有用"，落回社会价值。</a:t>
+              <a:t/>
             </a:r>
           </a:p>
         </p:txBody>
@@ -652,7 +652,7 @@
           <a:lstStyle/>
           <a:p>
             <a:r>
-              <a:t>谢谢大家，我的分享到这里。</a:t>
+              <a:t/>
             </a:r>
           </a:p>
         </p:txBody>
@@ -722,7 +722,7 @@
           <a:lstStyle/>
           <a:p>
             <a:r>
-              <a:t>现场抛问题，互动10秒。</a:t>
+              <a:t/>
             </a:r>
           </a:p>
         </p:txBody>
@@ -792,7 +792,7 @@
           <a:lstStyle/>
           <a:p>
             <a:r>
-              <a:t>点题：第一章节第三节，用自身经历对应三个知识点。</a:t>
+              <a:t/>
             </a:r>
           </a:p>
         </p:txBody>
@@ -862,7 +862,7 @@
           <a:lstStyle/>
           <a:p>
             <a:r>
-              <a:t>主体一约90秒：两次被否定，重点写当下的自我怀疑。</a:t>
+              <a:t/>
             </a:r>
           </a:p>
         </p:txBody>
@@ -932,7 +932,7 @@
           <a:lstStyle/>
           <a:p>
             <a:r>
-              <a:t>主体二约40秒：把"我"放大成"我们"。</a:t>
+              <a:t/>
             </a:r>
           </a:p>
         </p:txBody>
@@ -1002,7 +1002,7 @@
           <a:lstStyle/>
           <a:p>
             <a:r>
-              <a:t>主体三约70秒：五观+三个关键词，强调"一定条件"。</a:t>
+              <a:t/>
             </a:r>
           </a:p>
         </p:txBody>
@@ -1072,7 +1072,7 @@
           <a:lstStyle/>
           <a:p>
             <a:r>
-              <a:t>用正确价值观把尺子拿回自己手里。</a:t>
+              <a:t/>
             </a:r>
           </a:p>
         </p:txBody>
@@ -1142,7 +1142,7 @@
           <a:lstStyle/>
           <a:p>
             <a:r>
-              <a:t>存在主义借力提问题，马克思给答案；落点社会价值。</a:t>
+              <a:t/>
             </a:r>
           </a:p>
         </p:txBody>
@@ -1212,7 +1212,7 @@
           <a:lstStyle/>
           <a:p>
             <a:r>
-              <a:t>收尾约60秒：动画、哲学、编程三条线，都由"想找到自己的价值"推动。</a:t>
+              <a:t/>
             </a:r>
           </a:p>
         </p:txBody>

--- a/files/creating-a-meaningful-life.pptx
+++ b/files/creating-a-meaningful-life.pptx
@@ -6,16 +6,16 @@
   </p:sldMasterIdLst>
   <p:sldIdLst>
     <p:sldId id="256" r:id="rId7"/>
-    <p:sldId id="257" r:id="rId9"/>
-    <p:sldId id="258" r:id="rId10"/>
-    <p:sldId id="259" r:id="rId11"/>
-    <p:sldId id="260" r:id="rId12"/>
-    <p:sldId id="261" r:id="rId13"/>
-    <p:sldId id="262" r:id="rId14"/>
-    <p:sldId id="263" r:id="rId15"/>
-    <p:sldId id="264" r:id="rId16"/>
-    <p:sldId id="265" r:id="rId17"/>
-    <p:sldId id="266" r:id="rId18"/>
+    <p:sldId id="257" r:id="rId8"/>
+    <p:sldId id="258" r:id="rId9"/>
+    <p:sldId id="259" r:id="rId10"/>
+    <p:sldId id="260" r:id="rId11"/>
+    <p:sldId id="261" r:id="rId12"/>
+    <p:sldId id="262" r:id="rId13"/>
+    <p:sldId id="263" r:id="rId14"/>
+    <p:sldId id="264" r:id="rId15"/>
+    <p:sldId id="265" r:id="rId16"/>
+    <p:sldId id="266" r:id="rId17"/>
   </p:sldIdLst>
   <p:sldSz cx="12191695" cy="6858000" type="screen4x3"/>
   <p:notesSz cx="6858000" cy="9144000"/>
@@ -115,1126 +115,6 @@
     </a:lvl9pPr>
   </p:defaultTextStyle>
 </p:presentation>
-</file>
-
-<file path=ppt/notesMasters/notesMaster1.xml><?xml version="1.0" encoding="utf-8"?>
-<p:notesMaster xmlns:a="http://schemas.openxmlformats.org/drawingml/2006/main" xmlns:p="http://schemas.openxmlformats.org/presentationml/2006/main" xmlns:r="http://schemas.openxmlformats.org/officeDocument/2006/relationships">
-  <p:cSld>
-    <p:bg>
-      <p:bgRef idx="1001">
-        <a:schemeClr val="bg1"/>
-      </p:bgRef>
-    </p:bg>
-    <p:spTree>
-      <p:nvGrpSpPr>
-        <p:cNvPr id="1" name=""/>
-        <p:cNvGrpSpPr/>
-        <p:nvPr/>
-      </p:nvGrpSpPr>
-      <p:grpSpPr>
-        <a:xfrm>
-          <a:off x="0" y="0"/>
-          <a:ext cx="0" cy="0"/>
-          <a:chOff x="0" y="0"/>
-          <a:chExt cx="0" cy="0"/>
-        </a:xfrm>
-      </p:grpSpPr>
-      <p:sp>
-        <p:nvSpPr>
-          <p:cNvPr id="2" name="Header Placeholder 1"/>
-          <p:cNvSpPr>
-            <a:spLocks noGrp="1"/>
-          </p:cNvSpPr>
-          <p:nvPr>
-            <p:ph type="hdr" sz="quarter"/>
-          </p:nvPr>
-        </p:nvSpPr>
-        <p:spPr>
-          <a:xfrm>
-            <a:off x="0" y="0"/>
-            <a:ext cx="2971800" cy="457200"/>
-          </a:xfrm>
-          <a:prstGeom prst="rect">
-            <a:avLst/>
-          </a:prstGeom>
-        </p:spPr>
-        <p:txBody>
-          <a:bodyPr vert="horz" lIns="91440" tIns="45720" rIns="91440" bIns="45720" rtlCol="0"/>
-          <a:lstStyle>
-            <a:lvl1pPr algn="l">
-              <a:defRPr sz="1200"/>
-            </a:lvl1pPr>
-          </a:lstStyle>
-          <a:p>
-            <a:endParaRPr lang="en-US"/>
-          </a:p>
-        </p:txBody>
-      </p:sp>
-      <p:sp>
-        <p:nvSpPr>
-          <p:cNvPr id="3" name="Date Placeholder 2"/>
-          <p:cNvSpPr>
-            <a:spLocks noGrp="1"/>
-          </p:cNvSpPr>
-          <p:nvPr>
-            <p:ph type="dt" idx="1"/>
-          </p:nvPr>
-        </p:nvSpPr>
-        <p:spPr>
-          <a:xfrm>
-            <a:off x="3884613" y="0"/>
-            <a:ext cx="2971800" cy="457200"/>
-          </a:xfrm>
-          <a:prstGeom prst="rect">
-            <a:avLst/>
-          </a:prstGeom>
-        </p:spPr>
-        <p:txBody>
-          <a:bodyPr vert="horz" lIns="91440" tIns="45720" rIns="91440" bIns="45720" rtlCol="0"/>
-          <a:lstStyle>
-            <a:lvl1pPr algn="r">
-              <a:defRPr sz="1200"/>
-            </a:lvl1pPr>
-          </a:lstStyle>
-          <a:p>
-            <a:fld id="{0F89C1C7-3DCD-1040-A9CF-14679D8B5DDD}" type="datetimeFigureOut">
-              <a:rPr lang="en-US" smtClean="0"/>
-              <a:t>10/17/16</a:t>
-            </a:fld>
-            <a:endParaRPr lang="en-US"/>
-          </a:p>
-        </p:txBody>
-      </p:sp>
-      <p:sp>
-        <p:nvSpPr>
-          <p:cNvPr id="4" name="Slide Image Placeholder 3"/>
-          <p:cNvSpPr>
-            <a:spLocks noGrp="1" noRot="1" noChangeAspect="1"/>
-          </p:cNvSpPr>
-          <p:nvPr>
-            <p:ph type="sldImg" idx="2"/>
-          </p:nvPr>
-        </p:nvSpPr>
-        <p:spPr>
-          <a:xfrm>
-            <a:off x="1143000" y="685800"/>
-            <a:ext cx="4572000" cy="3429000"/>
-          </a:xfrm>
-          <a:prstGeom prst="rect">
-            <a:avLst/>
-          </a:prstGeom>
-          <a:noFill/>
-          <a:ln w="12700">
-            <a:solidFill>
-              <a:prstClr val="black"/>
-            </a:solidFill>
-          </a:ln>
-        </p:spPr>
-        <p:txBody>
-          <a:bodyPr vert="horz" lIns="91440" tIns="45720" rIns="91440" bIns="45720" rtlCol="0" anchor="ctr"/>
-          <a:lstStyle/>
-          <a:p>
-            <a:endParaRPr lang="en-US"/>
-          </a:p>
-        </p:txBody>
-      </p:sp>
-      <p:sp>
-        <p:nvSpPr>
-          <p:cNvPr id="5" name="Notes Placeholder 4"/>
-          <p:cNvSpPr>
-            <a:spLocks noGrp="1"/>
-          </p:cNvSpPr>
-          <p:nvPr>
-            <p:ph type="body" sz="quarter" idx="3"/>
-          </p:nvPr>
-        </p:nvSpPr>
-        <p:spPr>
-          <a:xfrm>
-            <a:off x="685800" y="4343400"/>
-            <a:ext cx="5486400" cy="4114800"/>
-          </a:xfrm>
-          <a:prstGeom prst="rect">
-            <a:avLst/>
-          </a:prstGeom>
-        </p:spPr>
-        <p:txBody>
-          <a:bodyPr vert="horz" lIns="91440" tIns="45720" rIns="91440" bIns="45720" rtlCol="0"/>
-          <a:lstStyle/>
-          <a:p>
-            <a:pPr lvl="0"/>
-            <a:r>
-              <a:rPr lang="en-US" smtClean="0"/>
-              <a:t>Click to edit Master text styles</a:t>
-            </a:r>
-          </a:p>
-          <a:p>
-            <a:pPr lvl="1"/>
-            <a:r>
-              <a:rPr lang="en-US" smtClean="0"/>
-              <a:t>Second level</a:t>
-            </a:r>
-          </a:p>
-          <a:p>
-            <a:pPr lvl="2"/>
-            <a:r>
-              <a:rPr lang="en-US" smtClean="0"/>
-              <a:t>Third level</a:t>
-            </a:r>
-          </a:p>
-          <a:p>
-            <a:pPr lvl="3"/>
-            <a:r>
-              <a:rPr lang="en-US" smtClean="0"/>
-              <a:t>Fourth level</a:t>
-            </a:r>
-          </a:p>
-          <a:p>
-            <a:pPr lvl="4"/>
-            <a:r>
-              <a:rPr lang="en-US" smtClean="0"/>
-              <a:t>Fifth level</a:t>
-            </a:r>
-            <a:endParaRPr lang="en-US"/>
-          </a:p>
-        </p:txBody>
-      </p:sp>
-      <p:sp>
-        <p:nvSpPr>
-          <p:cNvPr id="6" name="Footer Placeholder 5"/>
-          <p:cNvSpPr>
-            <a:spLocks noGrp="1"/>
-          </p:cNvSpPr>
-          <p:nvPr>
-            <p:ph type="ftr" sz="quarter" idx="4"/>
-          </p:nvPr>
-        </p:nvSpPr>
-        <p:spPr>
-          <a:xfrm>
-            <a:off x="0" y="8685213"/>
-            <a:ext cx="2971800" cy="457200"/>
-          </a:xfrm>
-          <a:prstGeom prst="rect">
-            <a:avLst/>
-          </a:prstGeom>
-        </p:spPr>
-        <p:txBody>
-          <a:bodyPr vert="horz" lIns="91440" tIns="45720" rIns="91440" bIns="45720" rtlCol="0" anchor="b"/>
-          <a:lstStyle>
-            <a:lvl1pPr algn="l">
-              <a:defRPr sz="1200"/>
-            </a:lvl1pPr>
-          </a:lstStyle>
-          <a:p>
-            <a:endParaRPr lang="en-US"/>
-          </a:p>
-        </p:txBody>
-      </p:sp>
-      <p:sp>
-        <p:nvSpPr>
-          <p:cNvPr id="7" name="Slide Number Placeholder 6"/>
-          <p:cNvSpPr>
-            <a:spLocks noGrp="1"/>
-          </p:cNvSpPr>
-          <p:nvPr>
-            <p:ph type="sldNum" sz="quarter" idx="5"/>
-          </p:nvPr>
-        </p:nvSpPr>
-        <p:spPr>
-          <a:xfrm>
-            <a:off x="3884613" y="8685213"/>
-            <a:ext cx="2971800" cy="457200"/>
-          </a:xfrm>
-          <a:prstGeom prst="rect">
-            <a:avLst/>
-          </a:prstGeom>
-        </p:spPr>
-        <p:txBody>
-          <a:bodyPr vert="horz" lIns="91440" tIns="45720" rIns="91440" bIns="45720" rtlCol="0" anchor="b"/>
-          <a:lstStyle>
-            <a:lvl1pPr algn="r">
-              <a:defRPr sz="1200"/>
-            </a:lvl1pPr>
-          </a:lstStyle>
-          <a:p>
-            <a:fld id="{BB5E49A5-4136-284D-997B-48E1D791AD67}" type="slidenum">
-              <a:rPr lang="en-US" smtClean="0"/>
-              <a:t>‹#›</a:t>
-            </a:fld>
-            <a:endParaRPr lang="en-US"/>
-          </a:p>
-        </p:txBody>
-      </p:sp>
-    </p:spTree>
-    <p:extLst>
-      <p:ext uri="{BB962C8B-B14F-4D97-AF65-F5344CB8AC3E}">
-        <p14:creationId xmlns:p14="http://schemas.microsoft.com/office/powerpoint/2010/main" val="2623252185"/>
-      </p:ext>
-    </p:extLst>
-  </p:cSld>
-  <p:clrMap bg1="lt1" tx1="dk1" bg2="lt2" tx2="dk2" accent1="accent1" accent2="accent2" accent3="accent3" accent4="accent4" accent5="accent5" accent6="accent6" hlink="hlink" folHlink="folHlink"/>
-  <p:notesStyle>
-    <a:lvl1pPr marL="0" algn="l" defTabSz="457200" rtl="0" eaLnBrk="1" latinLnBrk="0" hangingPunct="1">
-      <a:defRPr sz="1200" kern="1200">
-        <a:solidFill>
-          <a:schemeClr val="tx1"/>
-        </a:solidFill>
-        <a:latin typeface="+mn-lt"/>
-        <a:ea typeface="+mn-ea"/>
-        <a:cs typeface="+mn-cs"/>
-      </a:defRPr>
-    </a:lvl1pPr>
-    <a:lvl2pPr marL="457200" algn="l" defTabSz="457200" rtl="0" eaLnBrk="1" latinLnBrk="0" hangingPunct="1">
-      <a:defRPr sz="1200" kern="1200">
-        <a:solidFill>
-          <a:schemeClr val="tx1"/>
-        </a:solidFill>
-        <a:latin typeface="+mn-lt"/>
-        <a:ea typeface="+mn-ea"/>
-        <a:cs typeface="+mn-cs"/>
-      </a:defRPr>
-    </a:lvl2pPr>
-    <a:lvl3pPr marL="914400" algn="l" defTabSz="457200" rtl="0" eaLnBrk="1" latinLnBrk="0" hangingPunct="1">
-      <a:defRPr sz="1200" kern="1200">
-        <a:solidFill>
-          <a:schemeClr val="tx1"/>
-        </a:solidFill>
-        <a:latin typeface="+mn-lt"/>
-        <a:ea typeface="+mn-ea"/>
-        <a:cs typeface="+mn-cs"/>
-      </a:defRPr>
-    </a:lvl3pPr>
-    <a:lvl4pPr marL="1371600" algn="l" defTabSz="457200" rtl="0" eaLnBrk="1" latinLnBrk="0" hangingPunct="1">
-      <a:defRPr sz="1200" kern="1200">
-        <a:solidFill>
-          <a:schemeClr val="tx1"/>
-        </a:solidFill>
-        <a:latin typeface="+mn-lt"/>
-        <a:ea typeface="+mn-ea"/>
-        <a:cs typeface="+mn-cs"/>
-      </a:defRPr>
-    </a:lvl4pPr>
-    <a:lvl5pPr marL="1828800" algn="l" defTabSz="457200" rtl="0" eaLnBrk="1" latinLnBrk="0" hangingPunct="1">
-      <a:defRPr sz="1200" kern="1200">
-        <a:solidFill>
-          <a:schemeClr val="tx1"/>
-        </a:solidFill>
-        <a:latin typeface="+mn-lt"/>
-        <a:ea typeface="+mn-ea"/>
-        <a:cs typeface="+mn-cs"/>
-      </a:defRPr>
-    </a:lvl5pPr>
-    <a:lvl6pPr marL="2286000" algn="l" defTabSz="457200" rtl="0" eaLnBrk="1" latinLnBrk="0" hangingPunct="1">
-      <a:defRPr sz="1200" kern="1200">
-        <a:solidFill>
-          <a:schemeClr val="tx1"/>
-        </a:solidFill>
-        <a:latin typeface="+mn-lt"/>
-        <a:ea typeface="+mn-ea"/>
-        <a:cs typeface="+mn-cs"/>
-      </a:defRPr>
-    </a:lvl6pPr>
-    <a:lvl7pPr marL="2743200" algn="l" defTabSz="457200" rtl="0" eaLnBrk="1" latinLnBrk="0" hangingPunct="1">
-      <a:defRPr sz="1200" kern="1200">
-        <a:solidFill>
-          <a:schemeClr val="tx1"/>
-        </a:solidFill>
-        <a:latin typeface="+mn-lt"/>
-        <a:ea typeface="+mn-ea"/>
-        <a:cs typeface="+mn-cs"/>
-      </a:defRPr>
-    </a:lvl7pPr>
-    <a:lvl8pPr marL="3200400" algn="l" defTabSz="457200" rtl="0" eaLnBrk="1" latinLnBrk="0" hangingPunct="1">
-      <a:defRPr sz="1200" kern="1200">
-        <a:solidFill>
-          <a:schemeClr val="tx1"/>
-        </a:solidFill>
-        <a:latin typeface="+mn-lt"/>
-        <a:ea typeface="+mn-ea"/>
-        <a:cs typeface="+mn-cs"/>
-      </a:defRPr>
-    </a:lvl8pPr>
-    <a:lvl9pPr marL="3657600" algn="l" defTabSz="457200" rtl="0" eaLnBrk="1" latinLnBrk="0" hangingPunct="1">
-      <a:defRPr sz="1200" kern="1200">
-        <a:solidFill>
-          <a:schemeClr val="tx1"/>
-        </a:solidFill>
-        <a:latin typeface="+mn-lt"/>
-        <a:ea typeface="+mn-ea"/>
-        <a:cs typeface="+mn-cs"/>
-      </a:defRPr>
-    </a:lvl9pPr>
-  </p:notesStyle>
-</p:notesMaster>
-</file>
-
-<file path=ppt/notesSlides/notesSlide1.xml><?xml version="1.0" encoding="utf-8"?>
-<p:notes xmlns:a="http://schemas.openxmlformats.org/drawingml/2006/main" xmlns:p="http://schemas.openxmlformats.org/presentationml/2006/main" xmlns:r="http://schemas.openxmlformats.org/officeDocument/2006/relationships">
-  <p:cSld>
-    <p:spTree>
-      <p:nvGrpSpPr>
-        <p:cNvPr id="1" name=""/>
-        <p:cNvGrpSpPr/>
-        <p:nvPr/>
-      </p:nvGrpSpPr>
-      <p:grpSpPr>
-        <a:xfrm>
-          <a:off x="0" y="0"/>
-          <a:ext cx="0" cy="0"/>
-          <a:chOff x="0" y="0"/>
-          <a:chExt cx="0" cy="0"/>
-        </a:xfrm>
-      </p:grpSpPr>
-      <p:sp>
-        <p:nvSpPr>
-          <p:cNvPr id="2" name="Slide Image Placeholder 1"/>
-          <p:cNvSpPr>
-            <a:spLocks noGrp="1"/>
-          </p:cNvSpPr>
-          <p:nvPr>
-            <p:ph type="sldImg" idx="2"/>
-          </p:nvPr>
-        </p:nvSpPr>
-        <p:spPr/>
-      </p:sp>
-      <p:sp>
-        <p:nvSpPr>
-          <p:cNvPr id="3" name="Notes Placeholder 2"/>
-          <p:cNvSpPr>
-            <a:spLocks noGrp="1"/>
-          </p:cNvSpPr>
-          <p:nvPr>
-            <p:ph type="body" idx="3" sz="quarter"/>
-          </p:nvPr>
-        </p:nvSpPr>
-        <p:spPr/>
-        <p:txBody>
-          <a:bodyPr/>
-          <a:lstStyle/>
-          <a:p>
-            <a:r>
-              <a:t/>
-            </a:r>
-          </a:p>
-        </p:txBody>
-      </p:sp>
-      <p:sp>
-        <p:nvSpPr>
-          <p:cNvPr id="4" name="Slide Number Placeholder 3"/>
-          <p:cNvSpPr>
-            <a:spLocks noGrp="1"/>
-          </p:cNvSpPr>
-          <p:nvPr>
-            <p:ph type="sldNum" idx="5" sz="quarter"/>
-          </p:nvPr>
-        </p:nvSpPr>
-        <p:spPr/>
-      </p:sp>
-    </p:spTree>
-  </p:cSld>
-  <p:clrMapOvr>
-    <a:masterClrMapping/>
-  </p:clrMapOvr>
-</p:notes>
-</file>
-
-<file path=ppt/notesSlides/notesSlide10.xml><?xml version="1.0" encoding="utf-8"?>
-<p:notes xmlns:a="http://schemas.openxmlformats.org/drawingml/2006/main" xmlns:p="http://schemas.openxmlformats.org/presentationml/2006/main" xmlns:r="http://schemas.openxmlformats.org/officeDocument/2006/relationships">
-  <p:cSld>
-    <p:spTree>
-      <p:nvGrpSpPr>
-        <p:cNvPr id="1" name=""/>
-        <p:cNvGrpSpPr/>
-        <p:nvPr/>
-      </p:nvGrpSpPr>
-      <p:grpSpPr>
-        <a:xfrm>
-          <a:off x="0" y="0"/>
-          <a:ext cx="0" cy="0"/>
-          <a:chOff x="0" y="0"/>
-          <a:chExt cx="0" cy="0"/>
-        </a:xfrm>
-      </p:grpSpPr>
-      <p:sp>
-        <p:nvSpPr>
-          <p:cNvPr id="2" name="Slide Image Placeholder 1"/>
-          <p:cNvSpPr>
-            <a:spLocks noGrp="1"/>
-          </p:cNvSpPr>
-          <p:nvPr>
-            <p:ph type="sldImg" idx="2"/>
-          </p:nvPr>
-        </p:nvSpPr>
-        <p:spPr/>
-      </p:sp>
-      <p:sp>
-        <p:nvSpPr>
-          <p:cNvPr id="3" name="Notes Placeholder 2"/>
-          <p:cNvSpPr>
-            <a:spLocks noGrp="1"/>
-          </p:cNvSpPr>
-          <p:nvPr>
-            <p:ph type="body" idx="3" sz="quarter"/>
-          </p:nvPr>
-        </p:nvSpPr>
-        <p:spPr/>
-        <p:txBody>
-          <a:bodyPr/>
-          <a:lstStyle/>
-          <a:p>
-            <a:r>
-              <a:t/>
-            </a:r>
-          </a:p>
-        </p:txBody>
-      </p:sp>
-      <p:sp>
-        <p:nvSpPr>
-          <p:cNvPr id="4" name="Slide Number Placeholder 3"/>
-          <p:cNvSpPr>
-            <a:spLocks noGrp="1"/>
-          </p:cNvSpPr>
-          <p:nvPr>
-            <p:ph type="sldNum" idx="5" sz="quarter"/>
-          </p:nvPr>
-        </p:nvSpPr>
-        <p:spPr/>
-      </p:sp>
-    </p:spTree>
-  </p:cSld>
-  <p:clrMapOvr>
-    <a:masterClrMapping/>
-  </p:clrMapOvr>
-</p:notes>
-</file>
-
-<file path=ppt/notesSlides/notesSlide11.xml><?xml version="1.0" encoding="utf-8"?>
-<p:notes xmlns:a="http://schemas.openxmlformats.org/drawingml/2006/main" xmlns:p="http://schemas.openxmlformats.org/presentationml/2006/main" xmlns:r="http://schemas.openxmlformats.org/officeDocument/2006/relationships">
-  <p:cSld>
-    <p:spTree>
-      <p:nvGrpSpPr>
-        <p:cNvPr id="1" name=""/>
-        <p:cNvGrpSpPr/>
-        <p:nvPr/>
-      </p:nvGrpSpPr>
-      <p:grpSpPr>
-        <a:xfrm>
-          <a:off x="0" y="0"/>
-          <a:ext cx="0" cy="0"/>
-          <a:chOff x="0" y="0"/>
-          <a:chExt cx="0" cy="0"/>
-        </a:xfrm>
-      </p:grpSpPr>
-      <p:sp>
-        <p:nvSpPr>
-          <p:cNvPr id="2" name="Slide Image Placeholder 1"/>
-          <p:cNvSpPr>
-            <a:spLocks noGrp="1"/>
-          </p:cNvSpPr>
-          <p:nvPr>
-            <p:ph type="sldImg" idx="2"/>
-          </p:nvPr>
-        </p:nvSpPr>
-        <p:spPr/>
-      </p:sp>
-      <p:sp>
-        <p:nvSpPr>
-          <p:cNvPr id="3" name="Notes Placeholder 2"/>
-          <p:cNvSpPr>
-            <a:spLocks noGrp="1"/>
-          </p:cNvSpPr>
-          <p:nvPr>
-            <p:ph type="body" idx="3" sz="quarter"/>
-          </p:nvPr>
-        </p:nvSpPr>
-        <p:spPr/>
-        <p:txBody>
-          <a:bodyPr/>
-          <a:lstStyle/>
-          <a:p>
-            <a:r>
-              <a:t/>
-            </a:r>
-          </a:p>
-        </p:txBody>
-      </p:sp>
-      <p:sp>
-        <p:nvSpPr>
-          <p:cNvPr id="4" name="Slide Number Placeholder 3"/>
-          <p:cNvSpPr>
-            <a:spLocks noGrp="1"/>
-          </p:cNvSpPr>
-          <p:nvPr>
-            <p:ph type="sldNum" idx="5" sz="quarter"/>
-          </p:nvPr>
-        </p:nvSpPr>
-        <p:spPr/>
-      </p:sp>
-    </p:spTree>
-  </p:cSld>
-  <p:clrMapOvr>
-    <a:masterClrMapping/>
-  </p:clrMapOvr>
-</p:notes>
-</file>
-
-<file path=ppt/notesSlides/notesSlide2.xml><?xml version="1.0" encoding="utf-8"?>
-<p:notes xmlns:a="http://schemas.openxmlformats.org/drawingml/2006/main" xmlns:p="http://schemas.openxmlformats.org/presentationml/2006/main" xmlns:r="http://schemas.openxmlformats.org/officeDocument/2006/relationships">
-  <p:cSld>
-    <p:spTree>
-      <p:nvGrpSpPr>
-        <p:cNvPr id="1" name=""/>
-        <p:cNvGrpSpPr/>
-        <p:nvPr/>
-      </p:nvGrpSpPr>
-      <p:grpSpPr>
-        <a:xfrm>
-          <a:off x="0" y="0"/>
-          <a:ext cx="0" cy="0"/>
-          <a:chOff x="0" y="0"/>
-          <a:chExt cx="0" cy="0"/>
-        </a:xfrm>
-      </p:grpSpPr>
-      <p:sp>
-        <p:nvSpPr>
-          <p:cNvPr id="2" name="Slide Image Placeholder 1"/>
-          <p:cNvSpPr>
-            <a:spLocks noGrp="1"/>
-          </p:cNvSpPr>
-          <p:nvPr>
-            <p:ph type="sldImg" idx="2"/>
-          </p:nvPr>
-        </p:nvSpPr>
-        <p:spPr/>
-      </p:sp>
-      <p:sp>
-        <p:nvSpPr>
-          <p:cNvPr id="3" name="Notes Placeholder 2"/>
-          <p:cNvSpPr>
-            <a:spLocks noGrp="1"/>
-          </p:cNvSpPr>
-          <p:nvPr>
-            <p:ph type="body" idx="3" sz="quarter"/>
-          </p:nvPr>
-        </p:nvSpPr>
-        <p:spPr/>
-        <p:txBody>
-          <a:bodyPr/>
-          <a:lstStyle/>
-          <a:p>
-            <a:r>
-              <a:t/>
-            </a:r>
-          </a:p>
-        </p:txBody>
-      </p:sp>
-      <p:sp>
-        <p:nvSpPr>
-          <p:cNvPr id="4" name="Slide Number Placeholder 3"/>
-          <p:cNvSpPr>
-            <a:spLocks noGrp="1"/>
-          </p:cNvSpPr>
-          <p:nvPr>
-            <p:ph type="sldNum" idx="5" sz="quarter"/>
-          </p:nvPr>
-        </p:nvSpPr>
-        <p:spPr/>
-      </p:sp>
-    </p:spTree>
-  </p:cSld>
-  <p:clrMapOvr>
-    <a:masterClrMapping/>
-  </p:clrMapOvr>
-</p:notes>
-</file>
-
-<file path=ppt/notesSlides/notesSlide3.xml><?xml version="1.0" encoding="utf-8"?>
-<p:notes xmlns:a="http://schemas.openxmlformats.org/drawingml/2006/main" xmlns:p="http://schemas.openxmlformats.org/presentationml/2006/main" xmlns:r="http://schemas.openxmlformats.org/officeDocument/2006/relationships">
-  <p:cSld>
-    <p:spTree>
-      <p:nvGrpSpPr>
-        <p:cNvPr id="1" name=""/>
-        <p:cNvGrpSpPr/>
-        <p:nvPr/>
-      </p:nvGrpSpPr>
-      <p:grpSpPr>
-        <a:xfrm>
-          <a:off x="0" y="0"/>
-          <a:ext cx="0" cy="0"/>
-          <a:chOff x="0" y="0"/>
-          <a:chExt cx="0" cy="0"/>
-        </a:xfrm>
-      </p:grpSpPr>
-      <p:sp>
-        <p:nvSpPr>
-          <p:cNvPr id="2" name="Slide Image Placeholder 1"/>
-          <p:cNvSpPr>
-            <a:spLocks noGrp="1"/>
-          </p:cNvSpPr>
-          <p:nvPr>
-            <p:ph type="sldImg" idx="2"/>
-          </p:nvPr>
-        </p:nvSpPr>
-        <p:spPr/>
-      </p:sp>
-      <p:sp>
-        <p:nvSpPr>
-          <p:cNvPr id="3" name="Notes Placeholder 2"/>
-          <p:cNvSpPr>
-            <a:spLocks noGrp="1"/>
-          </p:cNvSpPr>
-          <p:nvPr>
-            <p:ph type="body" idx="3" sz="quarter"/>
-          </p:nvPr>
-        </p:nvSpPr>
-        <p:spPr/>
-        <p:txBody>
-          <a:bodyPr/>
-          <a:lstStyle/>
-          <a:p>
-            <a:r>
-              <a:t/>
-            </a:r>
-          </a:p>
-        </p:txBody>
-      </p:sp>
-      <p:sp>
-        <p:nvSpPr>
-          <p:cNvPr id="4" name="Slide Number Placeholder 3"/>
-          <p:cNvSpPr>
-            <a:spLocks noGrp="1"/>
-          </p:cNvSpPr>
-          <p:nvPr>
-            <p:ph type="sldNum" idx="5" sz="quarter"/>
-          </p:nvPr>
-        </p:nvSpPr>
-        <p:spPr/>
-      </p:sp>
-    </p:spTree>
-  </p:cSld>
-  <p:clrMapOvr>
-    <a:masterClrMapping/>
-  </p:clrMapOvr>
-</p:notes>
-</file>
-
-<file path=ppt/notesSlides/notesSlide4.xml><?xml version="1.0" encoding="utf-8"?>
-<p:notes xmlns:a="http://schemas.openxmlformats.org/drawingml/2006/main" xmlns:p="http://schemas.openxmlformats.org/presentationml/2006/main" xmlns:r="http://schemas.openxmlformats.org/officeDocument/2006/relationships">
-  <p:cSld>
-    <p:spTree>
-      <p:nvGrpSpPr>
-        <p:cNvPr id="1" name=""/>
-        <p:cNvGrpSpPr/>
-        <p:nvPr/>
-      </p:nvGrpSpPr>
-      <p:grpSpPr>
-        <a:xfrm>
-          <a:off x="0" y="0"/>
-          <a:ext cx="0" cy="0"/>
-          <a:chOff x="0" y="0"/>
-          <a:chExt cx="0" cy="0"/>
-        </a:xfrm>
-      </p:grpSpPr>
-      <p:sp>
-        <p:nvSpPr>
-          <p:cNvPr id="2" name="Slide Image Placeholder 1"/>
-          <p:cNvSpPr>
-            <a:spLocks noGrp="1"/>
-          </p:cNvSpPr>
-          <p:nvPr>
-            <p:ph type="sldImg" idx="2"/>
-          </p:nvPr>
-        </p:nvSpPr>
-        <p:spPr/>
-      </p:sp>
-      <p:sp>
-        <p:nvSpPr>
-          <p:cNvPr id="3" name="Notes Placeholder 2"/>
-          <p:cNvSpPr>
-            <a:spLocks noGrp="1"/>
-          </p:cNvSpPr>
-          <p:nvPr>
-            <p:ph type="body" idx="3" sz="quarter"/>
-          </p:nvPr>
-        </p:nvSpPr>
-        <p:spPr/>
-        <p:txBody>
-          <a:bodyPr/>
-          <a:lstStyle/>
-          <a:p>
-            <a:r>
-              <a:t/>
-            </a:r>
-          </a:p>
-        </p:txBody>
-      </p:sp>
-      <p:sp>
-        <p:nvSpPr>
-          <p:cNvPr id="4" name="Slide Number Placeholder 3"/>
-          <p:cNvSpPr>
-            <a:spLocks noGrp="1"/>
-          </p:cNvSpPr>
-          <p:nvPr>
-            <p:ph type="sldNum" idx="5" sz="quarter"/>
-          </p:nvPr>
-        </p:nvSpPr>
-        <p:spPr/>
-      </p:sp>
-    </p:spTree>
-  </p:cSld>
-  <p:clrMapOvr>
-    <a:masterClrMapping/>
-  </p:clrMapOvr>
-</p:notes>
-</file>
-
-<file path=ppt/notesSlides/notesSlide5.xml><?xml version="1.0" encoding="utf-8"?>
-<p:notes xmlns:a="http://schemas.openxmlformats.org/drawingml/2006/main" xmlns:p="http://schemas.openxmlformats.org/presentationml/2006/main" xmlns:r="http://schemas.openxmlformats.org/officeDocument/2006/relationships">
-  <p:cSld>
-    <p:spTree>
-      <p:nvGrpSpPr>
-        <p:cNvPr id="1" name=""/>
-        <p:cNvGrpSpPr/>
-        <p:nvPr/>
-      </p:nvGrpSpPr>
-      <p:grpSpPr>
-        <a:xfrm>
-          <a:off x="0" y="0"/>
-          <a:ext cx="0" cy="0"/>
-          <a:chOff x="0" y="0"/>
-          <a:chExt cx="0" cy="0"/>
-        </a:xfrm>
-      </p:grpSpPr>
-      <p:sp>
-        <p:nvSpPr>
-          <p:cNvPr id="2" name="Slide Image Placeholder 1"/>
-          <p:cNvSpPr>
-            <a:spLocks noGrp="1"/>
-          </p:cNvSpPr>
-          <p:nvPr>
-            <p:ph type="sldImg" idx="2"/>
-          </p:nvPr>
-        </p:nvSpPr>
-        <p:spPr/>
-      </p:sp>
-      <p:sp>
-        <p:nvSpPr>
-          <p:cNvPr id="3" name="Notes Placeholder 2"/>
-          <p:cNvSpPr>
-            <a:spLocks noGrp="1"/>
-          </p:cNvSpPr>
-          <p:nvPr>
-            <p:ph type="body" idx="3" sz="quarter"/>
-          </p:nvPr>
-        </p:nvSpPr>
-        <p:spPr/>
-        <p:txBody>
-          <a:bodyPr/>
-          <a:lstStyle/>
-          <a:p>
-            <a:r>
-              <a:t/>
-            </a:r>
-          </a:p>
-        </p:txBody>
-      </p:sp>
-      <p:sp>
-        <p:nvSpPr>
-          <p:cNvPr id="4" name="Slide Number Placeholder 3"/>
-          <p:cNvSpPr>
-            <a:spLocks noGrp="1"/>
-          </p:cNvSpPr>
-          <p:nvPr>
-            <p:ph type="sldNum" idx="5" sz="quarter"/>
-          </p:nvPr>
-        </p:nvSpPr>
-        <p:spPr/>
-      </p:sp>
-    </p:spTree>
-  </p:cSld>
-  <p:clrMapOvr>
-    <a:masterClrMapping/>
-  </p:clrMapOvr>
-</p:notes>
-</file>
-
-<file path=ppt/notesSlides/notesSlide6.xml><?xml version="1.0" encoding="utf-8"?>
-<p:notes xmlns:a="http://schemas.openxmlformats.org/drawingml/2006/main" xmlns:p="http://schemas.openxmlformats.org/presentationml/2006/main" xmlns:r="http://schemas.openxmlformats.org/officeDocument/2006/relationships">
-  <p:cSld>
-    <p:spTree>
-      <p:nvGrpSpPr>
-        <p:cNvPr id="1" name=""/>
-        <p:cNvGrpSpPr/>
-        <p:nvPr/>
-      </p:nvGrpSpPr>
-      <p:grpSpPr>
-        <a:xfrm>
-          <a:off x="0" y="0"/>
-          <a:ext cx="0" cy="0"/>
-          <a:chOff x="0" y="0"/>
-          <a:chExt cx="0" cy="0"/>
-        </a:xfrm>
-      </p:grpSpPr>
-      <p:sp>
-        <p:nvSpPr>
-          <p:cNvPr id="2" name="Slide Image Placeholder 1"/>
-          <p:cNvSpPr>
-            <a:spLocks noGrp="1"/>
-          </p:cNvSpPr>
-          <p:nvPr>
-            <p:ph type="sldImg" idx="2"/>
-          </p:nvPr>
-        </p:nvSpPr>
-        <p:spPr/>
-      </p:sp>
-      <p:sp>
-        <p:nvSpPr>
-          <p:cNvPr id="3" name="Notes Placeholder 2"/>
-          <p:cNvSpPr>
-            <a:spLocks noGrp="1"/>
-          </p:cNvSpPr>
-          <p:nvPr>
-            <p:ph type="body" idx="3" sz="quarter"/>
-          </p:nvPr>
-        </p:nvSpPr>
-        <p:spPr/>
-        <p:txBody>
-          <a:bodyPr/>
-          <a:lstStyle/>
-          <a:p>
-            <a:r>
-              <a:t/>
-            </a:r>
-          </a:p>
-        </p:txBody>
-      </p:sp>
-      <p:sp>
-        <p:nvSpPr>
-          <p:cNvPr id="4" name="Slide Number Placeholder 3"/>
-          <p:cNvSpPr>
-            <a:spLocks noGrp="1"/>
-          </p:cNvSpPr>
-          <p:nvPr>
-            <p:ph type="sldNum" idx="5" sz="quarter"/>
-          </p:nvPr>
-        </p:nvSpPr>
-        <p:spPr/>
-      </p:sp>
-    </p:spTree>
-  </p:cSld>
-  <p:clrMapOvr>
-    <a:masterClrMapping/>
-  </p:clrMapOvr>
-</p:notes>
-</file>
-
-<file path=ppt/notesSlides/notesSlide7.xml><?xml version="1.0" encoding="utf-8"?>
-<p:notes xmlns:a="http://schemas.openxmlformats.org/drawingml/2006/main" xmlns:p="http://schemas.openxmlformats.org/presentationml/2006/main" xmlns:r="http://schemas.openxmlformats.org/officeDocument/2006/relationships">
-  <p:cSld>
-    <p:spTree>
-      <p:nvGrpSpPr>
-        <p:cNvPr id="1" name=""/>
-        <p:cNvGrpSpPr/>
-        <p:nvPr/>
-      </p:nvGrpSpPr>
-      <p:grpSpPr>
-        <a:xfrm>
-          <a:off x="0" y="0"/>
-          <a:ext cx="0" cy="0"/>
-          <a:chOff x="0" y="0"/>
-          <a:chExt cx="0" cy="0"/>
-        </a:xfrm>
-      </p:grpSpPr>
-      <p:sp>
-        <p:nvSpPr>
-          <p:cNvPr id="2" name="Slide Image Placeholder 1"/>
-          <p:cNvSpPr>
-            <a:spLocks noGrp="1"/>
-          </p:cNvSpPr>
-          <p:nvPr>
-            <p:ph type="sldImg" idx="2"/>
-          </p:nvPr>
-        </p:nvSpPr>
-        <p:spPr/>
-      </p:sp>
-      <p:sp>
-        <p:nvSpPr>
-          <p:cNvPr id="3" name="Notes Placeholder 2"/>
-          <p:cNvSpPr>
-            <a:spLocks noGrp="1"/>
-          </p:cNvSpPr>
-          <p:nvPr>
-            <p:ph type="body" idx="3" sz="quarter"/>
-          </p:nvPr>
-        </p:nvSpPr>
-        <p:spPr/>
-        <p:txBody>
-          <a:bodyPr/>
-          <a:lstStyle/>
-          <a:p>
-            <a:r>
-              <a:t/>
-            </a:r>
-          </a:p>
-        </p:txBody>
-      </p:sp>
-      <p:sp>
-        <p:nvSpPr>
-          <p:cNvPr id="4" name="Slide Number Placeholder 3"/>
-          <p:cNvSpPr>
-            <a:spLocks noGrp="1"/>
-          </p:cNvSpPr>
-          <p:nvPr>
-            <p:ph type="sldNum" idx="5" sz="quarter"/>
-          </p:nvPr>
-        </p:nvSpPr>
-        <p:spPr/>
-      </p:sp>
-    </p:spTree>
-  </p:cSld>
-  <p:clrMapOvr>
-    <a:masterClrMapping/>
-  </p:clrMapOvr>
-</p:notes>
-</file>
-
-<file path=ppt/notesSlides/notesSlide8.xml><?xml version="1.0" encoding="utf-8"?>
-<p:notes xmlns:a="http://schemas.openxmlformats.org/drawingml/2006/main" xmlns:p="http://schemas.openxmlformats.org/presentationml/2006/main" xmlns:r="http://schemas.openxmlformats.org/officeDocument/2006/relationships">
-  <p:cSld>
-    <p:spTree>
-      <p:nvGrpSpPr>
-        <p:cNvPr id="1" name=""/>
-        <p:cNvGrpSpPr/>
-        <p:nvPr/>
-      </p:nvGrpSpPr>
-      <p:grpSpPr>
-        <a:xfrm>
-          <a:off x="0" y="0"/>
-          <a:ext cx="0" cy="0"/>
-          <a:chOff x="0" y="0"/>
-          <a:chExt cx="0" cy="0"/>
-        </a:xfrm>
-      </p:grpSpPr>
-      <p:sp>
-        <p:nvSpPr>
-          <p:cNvPr id="2" name="Slide Image Placeholder 1"/>
-          <p:cNvSpPr>
-            <a:spLocks noGrp="1"/>
-          </p:cNvSpPr>
-          <p:nvPr>
-            <p:ph type="sldImg" idx="2"/>
-          </p:nvPr>
-        </p:nvSpPr>
-        <p:spPr/>
-      </p:sp>
-      <p:sp>
-        <p:nvSpPr>
-          <p:cNvPr id="3" name="Notes Placeholder 2"/>
-          <p:cNvSpPr>
-            <a:spLocks noGrp="1"/>
-          </p:cNvSpPr>
-          <p:nvPr>
-            <p:ph type="body" idx="3" sz="quarter"/>
-          </p:nvPr>
-        </p:nvSpPr>
-        <p:spPr/>
-        <p:txBody>
-          <a:bodyPr/>
-          <a:lstStyle/>
-          <a:p>
-            <a:r>
-              <a:t/>
-            </a:r>
-          </a:p>
-        </p:txBody>
-      </p:sp>
-      <p:sp>
-        <p:nvSpPr>
-          <p:cNvPr id="4" name="Slide Number Placeholder 3"/>
-          <p:cNvSpPr>
-            <a:spLocks noGrp="1"/>
-          </p:cNvSpPr>
-          <p:nvPr>
-            <p:ph type="sldNum" idx="5" sz="quarter"/>
-          </p:nvPr>
-        </p:nvSpPr>
-        <p:spPr/>
-      </p:sp>
-    </p:spTree>
-  </p:cSld>
-  <p:clrMapOvr>
-    <a:masterClrMapping/>
-  </p:clrMapOvr>
-</p:notes>
-</file>
-
-<file path=ppt/notesSlides/notesSlide9.xml><?xml version="1.0" encoding="utf-8"?>
-<p:notes xmlns:a="http://schemas.openxmlformats.org/drawingml/2006/main" xmlns:p="http://schemas.openxmlformats.org/presentationml/2006/main" xmlns:r="http://schemas.openxmlformats.org/officeDocument/2006/relationships">
-  <p:cSld>
-    <p:spTree>
-      <p:nvGrpSpPr>
-        <p:cNvPr id="1" name=""/>
-        <p:cNvGrpSpPr/>
-        <p:nvPr/>
-      </p:nvGrpSpPr>
-      <p:grpSpPr>
-        <a:xfrm>
-          <a:off x="0" y="0"/>
-          <a:ext cx="0" cy="0"/>
-          <a:chOff x="0" y="0"/>
-          <a:chExt cx="0" cy="0"/>
-        </a:xfrm>
-      </p:grpSpPr>
-      <p:sp>
-        <p:nvSpPr>
-          <p:cNvPr id="2" name="Slide Image Placeholder 1"/>
-          <p:cNvSpPr>
-            <a:spLocks noGrp="1"/>
-          </p:cNvSpPr>
-          <p:nvPr>
-            <p:ph type="sldImg" idx="2"/>
-          </p:nvPr>
-        </p:nvSpPr>
-        <p:spPr/>
-      </p:sp>
-      <p:sp>
-        <p:nvSpPr>
-          <p:cNvPr id="3" name="Notes Placeholder 2"/>
-          <p:cNvSpPr>
-            <a:spLocks noGrp="1"/>
-          </p:cNvSpPr>
-          <p:nvPr>
-            <p:ph type="body" idx="3" sz="quarter"/>
-          </p:nvPr>
-        </p:nvSpPr>
-        <p:spPr/>
-        <p:txBody>
-          <a:bodyPr/>
-          <a:lstStyle/>
-          <a:p>
-            <a:r>
-              <a:t/>
-            </a:r>
-          </a:p>
-        </p:txBody>
-      </p:sp>
-      <p:sp>
-        <p:nvSpPr>
-          <p:cNvPr id="4" name="Slide Number Placeholder 3"/>
-          <p:cNvSpPr>
-            <a:spLocks noGrp="1"/>
-          </p:cNvSpPr>
-          <p:nvPr>
-            <p:ph type="sldNum" idx="5" sz="quarter"/>
-          </p:nvPr>
-        </p:nvSpPr>
-        <p:spPr/>
-      </p:sp>
-    </p:spTree>
-  </p:cSld>
-  <p:clrMapOvr>
-    <a:masterClrMapping/>
-  </p:clrMapOvr>
-</p:notes>
 </file>
 
 <file path=ppt/slideLayouts/slideLayout1.xml><?xml version="1.0" encoding="utf-8"?>
@@ -4227,13 +3107,13 @@
         <p:spPr>
           <a:xfrm>
             <a:off x="0" y="0"/>
-            <a:ext cx="12191695" cy="6858000"/>
+            <a:ext cx="128016" cy="6858000"/>
           </a:xfrm>
           <a:prstGeom prst="rect">
             <a:avLst/>
           </a:prstGeom>
           <a:solidFill>
-            <a:srgbClr val="FFFFFF"/>
+            <a:srgbClr val="2F4858"/>
           </a:solidFill>
           <a:ln>
             <a:noFill/>
@@ -4264,128 +3144,22 @@
       </p:sp>
       <p:sp>
         <p:nvSpPr>
-          <p:cNvPr id="3" name="TextBox 2"/>
-          <p:cNvSpPr txBox="1"/>
-          <p:nvPr/>
-        </p:nvSpPr>
-        <p:spPr>
-          <a:xfrm>
-            <a:off x="914400" y="868680"/>
-            <a:ext cx="10332720" cy="320040"/>
-          </a:xfrm>
-          <a:prstGeom prst="rect">
-            <a:avLst/>
-          </a:prstGeom>
-          <a:noFill/>
-        </p:spPr>
-        <p:txBody>
-          <a:bodyPr wrap="square" anchor="t">
-            <a:spAutoFit/>
-          </a:bodyPr>
-          <a:lstStyle/>
-          <a:p>
-            <a:pPr algn="l"/>
-            <a:r>
-              <a:rPr sz="1200" b="0">
-                <a:solidFill>
-                  <a:srgbClr val="6B6B6B"/>
-                </a:solidFill>
-                <a:latin typeface="微软雅黑"/>
-                <a:ea typeface="微软雅黑"/>
-              </a:rPr>
-              <a:t>思想道德与法治 · 课前分享</a:t>
-            </a:r>
-          </a:p>
-        </p:txBody>
-      </p:sp>
-      <p:sp>
-        <p:nvSpPr>
-          <p:cNvPr id="4" name="TextBox 3"/>
-          <p:cNvSpPr txBox="1"/>
-          <p:nvPr/>
-        </p:nvSpPr>
-        <p:spPr>
-          <a:xfrm>
-            <a:off x="914400" y="2395728"/>
-            <a:ext cx="10332720" cy="1005840"/>
-          </a:xfrm>
-          <a:prstGeom prst="rect">
-            <a:avLst/>
-          </a:prstGeom>
-          <a:noFill/>
-        </p:spPr>
-        <p:txBody>
-          <a:bodyPr wrap="square" anchor="t">
-            <a:spAutoFit/>
-          </a:bodyPr>
-          <a:lstStyle/>
-          <a:p>
-            <a:pPr algn="l"/>
-            <a:r>
-              <a:rPr sz="4000" b="0">
-                <a:solidFill>
-                  <a:srgbClr val="1B1B1B"/>
-                </a:solidFill>
-                <a:latin typeface="微软雅黑 Light"/>
-                <a:ea typeface="微软雅黑 Light"/>
-              </a:rPr>
-              <a:t>创造有意义的人生</a:t>
-            </a:r>
-          </a:p>
-        </p:txBody>
-      </p:sp>
-      <p:sp>
-        <p:nvSpPr>
-          <p:cNvPr id="5" name="TextBox 4"/>
-          <p:cNvSpPr txBox="1"/>
-          <p:nvPr/>
-        </p:nvSpPr>
-        <p:spPr>
-          <a:xfrm>
-            <a:off x="914400" y="3310128"/>
-            <a:ext cx="10332720" cy="548640"/>
-          </a:xfrm>
-          <a:prstGeom prst="rect">
-            <a:avLst/>
-          </a:prstGeom>
-          <a:noFill/>
-        </p:spPr>
-        <p:txBody>
-          <a:bodyPr wrap="square" anchor="t">
-            <a:spAutoFit/>
-          </a:bodyPr>
-          <a:lstStyle/>
-          <a:p>
-            <a:pPr algn="l"/>
-            <a:r>
-              <a:rPr sz="2100" b="0">
-                <a:solidFill>
-                  <a:srgbClr val="3A5A70"/>
-                </a:solidFill>
-                <a:latin typeface="微软雅黑 Light"/>
-                <a:ea typeface="微软雅黑 Light"/>
-              </a:rPr>
-              <a:t>从一次被否定说起</a:t>
-            </a:r>
-          </a:p>
-        </p:txBody>
-      </p:sp>
-      <p:sp>
-        <p:nvSpPr>
-          <p:cNvPr id="6" name="Rectangle 5"/>
+          <p:cNvPr id="3" name="Rounded Rectangle 2"/>
           <p:cNvSpPr/>
           <p:nvPr/>
         </p:nvSpPr>
         <p:spPr>
           <a:xfrm>
-            <a:off x="914400" y="3977639"/>
-            <a:ext cx="3291840" cy="14630"/>
-          </a:xfrm>
-          <a:prstGeom prst="rect">
-            <a:avLst/>
+            <a:off x="7452360" y="1188720"/>
+            <a:ext cx="3867912" cy="4526280"/>
+          </a:xfrm>
+          <a:prstGeom prst="roundRect">
+            <a:avLst>
+              <a:gd name="adj" fmla="val 5000"/>
+            </a:avLst>
           </a:prstGeom>
           <a:solidFill>
-            <a:srgbClr val="3A5A70"/>
+            <a:srgbClr val="2F4858"/>
           </a:solidFill>
           <a:ln>
             <a:noFill/>
@@ -4416,14 +3190,354 @@
       </p:sp>
       <p:sp>
         <p:nvSpPr>
+          <p:cNvPr id="4" name="TextBox 3"/>
+          <p:cNvSpPr txBox="1"/>
+          <p:nvPr/>
+        </p:nvSpPr>
+        <p:spPr>
+          <a:xfrm>
+            <a:off x="7818120" y="1783080"/>
+            <a:ext cx="3200400" cy="3291840"/>
+          </a:xfrm>
+          <a:prstGeom prst="rect">
+            <a:avLst/>
+          </a:prstGeom>
+          <a:noFill/>
+        </p:spPr>
+        <p:txBody>
+          <a:bodyPr wrap="square" anchor="t">
+            <a:spAutoFit/>
+          </a:bodyPr>
+          <a:lstStyle/>
+          <a:p>
+            <a:pPr algn="l">
+              <a:lnSpc>
+                <a:spcPct val="150000"/>
+              </a:lnSpc>
+            </a:pPr>
+            <a:r>
+              <a:rPr sz="1550" b="0">
+                <a:solidFill>
+                  <a:srgbClr val="FFFFFF"/>
+                </a:solidFill>
+                <a:latin typeface="Noto Serif SC"/>
+                <a:ea typeface="Noto Serif SC"/>
+              </a:rPr>
+              <a:t>人生的意义，</a:t>
+            </a:r>
+          </a:p>
+          <a:p>
+            <a:pPr algn="l">
+              <a:lnSpc>
+                <a:spcPct val="150000"/>
+              </a:lnSpc>
+            </a:pPr>
+            <a:r>
+              <a:rPr sz="1550" b="0">
+                <a:solidFill>
+                  <a:srgbClr val="FFFFFF"/>
+                </a:solidFill>
+                <a:latin typeface="Noto Serif SC"/>
+                <a:ea typeface="Noto Serif SC"/>
+              </a:rPr>
+              <a:t>不是一次算清的答案，</a:t>
+            </a:r>
+          </a:p>
+          <a:p>
+            <a:pPr algn="l">
+              <a:lnSpc>
+                <a:spcPct val="150000"/>
+              </a:lnSpc>
+            </a:pPr>
+            <a:r>
+              <a:rPr sz="1550" b="0">
+                <a:solidFill>
+                  <a:srgbClr val="FFFFFF"/>
+                </a:solidFill>
+                <a:latin typeface="Noto Serif SC"/>
+                <a:ea typeface="Noto Serif SC"/>
+              </a:rPr>
+              <a:t>而是在矛盾中，</a:t>
+            </a:r>
+          </a:p>
+          <a:p>
+            <a:pPr algn="l">
+              <a:lnSpc>
+                <a:spcPct val="150000"/>
+              </a:lnSpc>
+            </a:pPr>
+            <a:r>
+              <a:rPr sz="1550" b="0">
+                <a:solidFill>
+                  <a:srgbClr val="FFFFFF"/>
+                </a:solidFill>
+                <a:latin typeface="Noto Serif SC"/>
+                <a:ea typeface="Noto Serif SC"/>
+              </a:rPr>
+              <a:t>不断被重新书写的</a:t>
+            </a:r>
+          </a:p>
+          <a:p>
+            <a:pPr algn="l">
+              <a:lnSpc>
+                <a:spcPct val="150000"/>
+              </a:lnSpc>
+            </a:pPr>
+            <a:r>
+              <a:rPr sz="1550" b="0">
+                <a:solidFill>
+                  <a:srgbClr val="FFFFFF"/>
+                </a:solidFill>
+                <a:latin typeface="Noto Serif SC"/>
+                <a:ea typeface="Noto Serif SC"/>
+              </a:rPr>
+              <a:t>动态过程。</a:t>
+            </a:r>
+          </a:p>
+        </p:txBody>
+      </p:sp>
+      <p:sp>
+        <p:nvSpPr>
+          <p:cNvPr id="5" name="Rectangle 4"/>
+          <p:cNvSpPr/>
+          <p:nvPr/>
+        </p:nvSpPr>
+        <p:spPr>
+          <a:xfrm>
+            <a:off x="7818120" y="4846320"/>
+            <a:ext cx="1371600" cy="18288"/>
+          </a:xfrm>
+          <a:prstGeom prst="rect">
+            <a:avLst/>
+          </a:prstGeom>
+          <a:solidFill>
+            <a:srgbClr val="8FA6B4"/>
+          </a:solidFill>
+          <a:ln>
+            <a:noFill/>
+          </a:ln>
+          <a:effectLst/>
+        </p:spPr>
+        <p:style>
+          <a:lnRef idx="1">
+            <a:schemeClr val="accent1"/>
+          </a:lnRef>
+          <a:fillRef idx="3">
+            <a:schemeClr val="accent1"/>
+          </a:fillRef>
+          <a:effectRef idx="2">
+            <a:schemeClr val="accent1"/>
+          </a:effectRef>
+          <a:fontRef idx="minor">
+            <a:schemeClr val="lt1"/>
+          </a:fontRef>
+        </p:style>
+        <p:txBody>
+          <a:bodyPr rtlCol="0" anchor="ctr"/>
+          <a:lstStyle/>
+          <a:p>
+            <a:pPr algn="ctr"/>
+          </a:p>
+        </p:txBody>
+      </p:sp>
+      <p:sp>
+        <p:nvSpPr>
+          <p:cNvPr id="6" name="TextBox 5"/>
+          <p:cNvSpPr txBox="1"/>
+          <p:nvPr/>
+        </p:nvSpPr>
+        <p:spPr>
+          <a:xfrm>
+            <a:off x="7818120" y="4983480"/>
+            <a:ext cx="3108960" cy="365760"/>
+          </a:xfrm>
+          <a:prstGeom prst="rect">
+            <a:avLst/>
+          </a:prstGeom>
+          <a:noFill/>
+        </p:spPr>
+        <p:txBody>
+          <a:bodyPr wrap="square" anchor="t">
+            <a:spAutoFit/>
+          </a:bodyPr>
+          <a:lstStyle/>
+          <a:p>
+            <a:pPr algn="l"/>
+            <a:r>
+              <a:rPr sz="1100" b="0">
+                <a:solidFill>
+                  <a:srgbClr val="8FA6B4"/>
+                </a:solidFill>
+                <a:latin typeface="微软雅黑"/>
+                <a:ea typeface="微软雅黑"/>
+              </a:rPr>
+              <a:t>第一章 · 第三节</a:t>
+            </a:r>
+          </a:p>
+        </p:txBody>
+      </p:sp>
+      <p:sp>
+        <p:nvSpPr>
           <p:cNvPr id="7" name="TextBox 6"/>
           <p:cNvSpPr txBox="1"/>
           <p:nvPr/>
         </p:nvSpPr>
         <p:spPr>
           <a:xfrm>
-            <a:off x="914400" y="4709160"/>
-            <a:ext cx="10332720" cy="914400"/>
+            <a:off x="960120" y="960120"/>
+            <a:ext cx="6035040" cy="320040"/>
+          </a:xfrm>
+          <a:prstGeom prst="rect">
+            <a:avLst/>
+          </a:prstGeom>
+          <a:noFill/>
+        </p:spPr>
+        <p:txBody>
+          <a:bodyPr wrap="square" anchor="t">
+            <a:spAutoFit/>
+          </a:bodyPr>
+          <a:lstStyle/>
+          <a:p>
+            <a:pPr algn="l"/>
+            <a:r>
+              <a:rPr sz="1250" b="0">
+                <a:solidFill>
+                  <a:srgbClr val="5F6B76"/>
+                </a:solidFill>
+                <a:latin typeface="微软雅黑"/>
+                <a:ea typeface="微软雅黑"/>
+              </a:rPr>
+              <a:t>思想道德与法治 · 课前分享</a:t>
+            </a:r>
+          </a:p>
+        </p:txBody>
+      </p:sp>
+      <p:sp>
+        <p:nvSpPr>
+          <p:cNvPr id="8" name="TextBox 7"/>
+          <p:cNvSpPr txBox="1"/>
+          <p:nvPr/>
+        </p:nvSpPr>
+        <p:spPr>
+          <a:xfrm>
+            <a:off x="960120" y="2240280"/>
+            <a:ext cx="6217920" cy="914400"/>
+          </a:xfrm>
+          <a:prstGeom prst="rect">
+            <a:avLst/>
+          </a:prstGeom>
+          <a:noFill/>
+        </p:spPr>
+        <p:txBody>
+          <a:bodyPr wrap="square" anchor="t">
+            <a:spAutoFit/>
+          </a:bodyPr>
+          <a:lstStyle/>
+          <a:p>
+            <a:pPr algn="l"/>
+            <a:r>
+              <a:rPr sz="4000" b="0">
+                <a:solidFill>
+                  <a:srgbClr val="1B1B1B"/>
+                </a:solidFill>
+                <a:latin typeface="微软雅黑 Light"/>
+                <a:ea typeface="微软雅黑 Light"/>
+              </a:rPr>
+              <a:t>创造有意义的人生</a:t>
+            </a:r>
+          </a:p>
+        </p:txBody>
+      </p:sp>
+      <p:sp>
+        <p:nvSpPr>
+          <p:cNvPr id="9" name="Rectangle 8"/>
+          <p:cNvSpPr/>
+          <p:nvPr/>
+        </p:nvSpPr>
+        <p:spPr>
+          <a:xfrm>
+            <a:off x="960120" y="3310128"/>
+            <a:ext cx="1737360" cy="45720"/>
+          </a:xfrm>
+          <a:prstGeom prst="rect">
+            <a:avLst/>
+          </a:prstGeom>
+          <a:solidFill>
+            <a:srgbClr val="52798A"/>
+          </a:solidFill>
+          <a:ln>
+            <a:noFill/>
+          </a:ln>
+          <a:effectLst/>
+        </p:spPr>
+        <p:style>
+          <a:lnRef idx="1">
+            <a:schemeClr val="accent1"/>
+          </a:lnRef>
+          <a:fillRef idx="3">
+            <a:schemeClr val="accent1"/>
+          </a:fillRef>
+          <a:effectRef idx="2">
+            <a:schemeClr val="accent1"/>
+          </a:effectRef>
+          <a:fontRef idx="minor">
+            <a:schemeClr val="lt1"/>
+          </a:fontRef>
+        </p:style>
+        <p:txBody>
+          <a:bodyPr rtlCol="0" anchor="ctr"/>
+          <a:lstStyle/>
+          <a:p>
+            <a:pPr algn="ctr"/>
+          </a:p>
+        </p:txBody>
+      </p:sp>
+      <p:sp>
+        <p:nvSpPr>
+          <p:cNvPr id="10" name="TextBox 9"/>
+          <p:cNvSpPr txBox="1"/>
+          <p:nvPr/>
+        </p:nvSpPr>
+        <p:spPr>
+          <a:xfrm>
+            <a:off x="960120" y="3520440"/>
+            <a:ext cx="6035040" cy="457200"/>
+          </a:xfrm>
+          <a:prstGeom prst="rect">
+            <a:avLst/>
+          </a:prstGeom>
+          <a:noFill/>
+        </p:spPr>
+        <p:txBody>
+          <a:bodyPr wrap="square" anchor="t">
+            <a:spAutoFit/>
+          </a:bodyPr>
+          <a:lstStyle/>
+          <a:p>
+            <a:pPr algn="l"/>
+            <a:r>
+              <a:rPr sz="2000" b="0">
+                <a:solidFill>
+                  <a:srgbClr val="2F4858"/>
+                </a:solidFill>
+                <a:latin typeface="微软雅黑 Light"/>
+                <a:ea typeface="微软雅黑 Light"/>
+              </a:rPr>
+              <a:t>从一次被否定说起</a:t>
+            </a:r>
+          </a:p>
+        </p:txBody>
+      </p:sp>
+      <p:sp>
+        <p:nvSpPr>
+          <p:cNvPr id="11" name="TextBox 10"/>
+          <p:cNvSpPr txBox="1"/>
+          <p:nvPr/>
+        </p:nvSpPr>
+        <p:spPr>
+          <a:xfrm>
+            <a:off x="960120" y="4892040"/>
+            <a:ext cx="6035040" cy="914400"/>
           </a:xfrm>
           <a:prstGeom prst="rect">
             <a:avLst/>
@@ -4457,7 +3571,7 @@
             <a:r>
               <a:rPr sz="1250" b="0">
                 <a:solidFill>
-                  <a:srgbClr val="6B6B6B"/>
+                  <a:srgbClr val="5F6B76"/>
                 </a:solidFill>
                 <a:latin typeface="微软雅黑"/>
                 <a:ea typeface="微软雅黑"/>
@@ -4469,13 +3583,13 @@
       </p:sp>
       <p:sp>
         <p:nvSpPr>
-          <p:cNvPr id="8" name="TextBox 7"/>
+          <p:cNvPr id="12" name="TextBox 11"/>
           <p:cNvSpPr txBox="1"/>
           <p:nvPr/>
         </p:nvSpPr>
         <p:spPr>
           <a:xfrm>
-            <a:off x="914400" y="6327648"/>
+            <a:off x="960120" y="6400800"/>
             <a:ext cx="4572000" cy="320040"/>
           </a:xfrm>
           <a:prstGeom prst="rect">
@@ -4491,9 +3605,9 @@
           <a:p>
             <a:pPr algn="l"/>
             <a:r>
-              <a:rPr sz="1100" b="0">
-                <a:solidFill>
-                  <a:srgbClr val="9A9A9A"/>
+              <a:rPr sz="1050" b="0">
+                <a:solidFill>
+                  <a:srgbClr val="98A2AB"/>
                 </a:solidFill>
                 <a:latin typeface="微软雅黑"/>
                 <a:ea typeface="微软雅黑"/>
@@ -4505,14 +3619,14 @@
       </p:sp>
       <p:sp>
         <p:nvSpPr>
-          <p:cNvPr id="9" name="TextBox 8"/>
+          <p:cNvPr id="13" name="TextBox 12"/>
           <p:cNvSpPr txBox="1"/>
           <p:nvPr/>
         </p:nvSpPr>
         <p:spPr>
           <a:xfrm>
-            <a:off x="10424160" y="6327648"/>
-            <a:ext cx="850392" cy="320040"/>
+            <a:off x="10360152" y="6400800"/>
+            <a:ext cx="914400" cy="320040"/>
           </a:xfrm>
           <a:prstGeom prst="rect">
             <a:avLst/>
@@ -4527,9 +3641,9 @@
           <a:p>
             <a:pPr algn="r"/>
             <a:r>
-              <a:rPr sz="1050" b="0">
-                <a:solidFill>
-                  <a:srgbClr val="9A9A9A"/>
+              <a:rPr sz="1000" b="0">
+                <a:solidFill>
+                  <a:srgbClr val="98A2AB"/>
                 </a:solidFill>
                 <a:latin typeface="微软雅黑"/>
                 <a:ea typeface="微软雅黑"/>
@@ -4566,13 +3680,13 @@
         <p:spPr>
           <a:xfrm>
             <a:off x="0" y="0"/>
-            <a:ext cx="12191695" cy="6858000"/>
+            <a:ext cx="128016" cy="6858000"/>
           </a:xfrm>
           <a:prstGeom prst="rect">
             <a:avLst/>
           </a:prstGeom>
           <a:solidFill>
-            <a:srgbClr val="FFFFFF"/>
+            <a:srgbClr val="2F4858"/>
           </a:solidFill>
           <a:ln>
             <a:noFill/>
@@ -4610,7 +3724,7 @@
         <p:spPr>
           <a:xfrm>
             <a:off x="914400" y="1874519"/>
-            <a:ext cx="10332720" cy="2011680"/>
+            <a:ext cx="10360152" cy="1828800"/>
           </a:xfrm>
           <a:prstGeom prst="rect">
             <a:avLst/>
@@ -4629,7 +3743,7 @@
               </a:lnSpc>
             </a:pPr>
             <a:r>
-              <a:rPr sz="2700" b="0">
+              <a:rPr sz="2500" b="0">
                 <a:solidFill>
                   <a:srgbClr val="1B1B1B"/>
                 </a:solidFill>
@@ -4646,9 +3760,9 @@
               </a:lnSpc>
             </a:pPr>
             <a:r>
-              <a:rPr sz="2700" b="0">
-                <a:solidFill>
-                  <a:srgbClr val="3A5A70"/>
+              <a:rPr sz="2500" b="0">
+                <a:solidFill>
+                  <a:srgbClr val="2F4858"/>
                 </a:solidFill>
                 <a:latin typeface="Noto Serif SC"/>
                 <a:ea typeface="Noto Serif SC"/>
@@ -4666,14 +3780,14 @@
         </p:nvSpPr>
         <p:spPr>
           <a:xfrm>
-            <a:off x="914400" y="4160520"/>
+            <a:off x="914400" y="3977639"/>
             <a:ext cx="10360152" cy="10972"/>
           </a:xfrm>
           <a:prstGeom prst="rect">
             <a:avLst/>
           </a:prstGeom>
           <a:solidFill>
-            <a:srgbClr val="D8D8D8"/>
+            <a:srgbClr val="DDE3E8"/>
           </a:solidFill>
           <a:ln>
             <a:noFill/>
@@ -4704,14 +3818,104 @@
       </p:sp>
       <p:sp>
         <p:nvSpPr>
-          <p:cNvPr id="5" name="TextBox 4"/>
+          <p:cNvPr id="5" name="Rounded Rectangle 4"/>
+          <p:cNvSpPr/>
+          <p:nvPr/>
+        </p:nvSpPr>
+        <p:spPr>
+          <a:xfrm>
+            <a:off x="822960" y="4160520"/>
+            <a:ext cx="10543032" cy="1417320"/>
+          </a:xfrm>
+          <a:prstGeom prst="roundRect">
+            <a:avLst>
+              <a:gd name="adj" fmla="val 7000"/>
+            </a:avLst>
+          </a:prstGeom>
+          <a:solidFill>
+            <a:srgbClr val="EEF2F5"/>
+          </a:solidFill>
+          <a:ln>
+            <a:noFill/>
+          </a:ln>
+          <a:effectLst/>
+        </p:spPr>
+        <p:style>
+          <a:lnRef idx="1">
+            <a:schemeClr val="accent1"/>
+          </a:lnRef>
+          <a:fillRef idx="3">
+            <a:schemeClr val="accent1"/>
+          </a:fillRef>
+          <a:effectRef idx="2">
+            <a:schemeClr val="accent1"/>
+          </a:effectRef>
+          <a:fontRef idx="minor">
+            <a:schemeClr val="lt1"/>
+          </a:fontRef>
+        </p:style>
+        <p:txBody>
+          <a:bodyPr rtlCol="0" anchor="ctr"/>
+          <a:lstStyle/>
+          <a:p>
+            <a:pPr algn="ctr"/>
+          </a:p>
+        </p:txBody>
+      </p:sp>
+      <p:sp>
+        <p:nvSpPr>
+          <p:cNvPr id="6" name="Rectangle 5"/>
+          <p:cNvSpPr/>
+          <p:nvPr/>
+        </p:nvSpPr>
+        <p:spPr>
+          <a:xfrm>
+            <a:off x="822960" y="4160520"/>
+            <a:ext cx="64008" cy="1417320"/>
+          </a:xfrm>
+          <a:prstGeom prst="rect">
+            <a:avLst/>
+          </a:prstGeom>
+          <a:solidFill>
+            <a:srgbClr val="52798A"/>
+          </a:solidFill>
+          <a:ln>
+            <a:noFill/>
+          </a:ln>
+          <a:effectLst/>
+        </p:spPr>
+        <p:style>
+          <a:lnRef idx="1">
+            <a:schemeClr val="accent1"/>
+          </a:lnRef>
+          <a:fillRef idx="3">
+            <a:schemeClr val="accent1"/>
+          </a:fillRef>
+          <a:effectRef idx="2">
+            <a:schemeClr val="accent1"/>
+          </a:effectRef>
+          <a:fontRef idx="minor">
+            <a:schemeClr val="lt1"/>
+          </a:fontRef>
+        </p:style>
+        <p:txBody>
+          <a:bodyPr rtlCol="0" anchor="ctr"/>
+          <a:lstStyle/>
+          <a:p>
+            <a:pPr algn="ctr"/>
+          </a:p>
+        </p:txBody>
+      </p:sp>
+      <p:sp>
+        <p:nvSpPr>
+          <p:cNvPr id="7" name="TextBox 6"/>
           <p:cNvSpPr txBox="1"/>
           <p:nvPr/>
         </p:nvSpPr>
         <p:spPr>
           <a:xfrm>
-            <a:off x="914400" y="4389120"/>
-            <a:ext cx="10332720" cy="1554480"/>
+            <a:off x="1143000" y="4343400"/>
+            <a:ext cx="9966960" cy="1143000"/>
           </a:xfrm>
           <a:prstGeom prst="rect">
             <a:avLst/>
@@ -4730,9 +3934,9 @@
               </a:lnSpc>
             </a:pPr>
             <a:r>
-              <a:rPr sz="1500" b="0">
-                <a:solidFill>
-                  <a:srgbClr val="6B6B6B"/>
+              <a:rPr sz="1400" b="0">
+                <a:solidFill>
+                  <a:srgbClr val="5F6B76"/>
                 </a:solidFill>
                 <a:latin typeface="微软雅黑"/>
                 <a:ea typeface="微软雅黑"/>
@@ -4747,7 +3951,7 @@
               </a:lnSpc>
             </a:pPr>
             <a:r>
-              <a:rPr sz="2000" b="0">
+              <a:rPr sz="1900" b="0">
                 <a:solidFill>
                   <a:srgbClr val="1B1B1B"/>
                 </a:solidFill>
@@ -4764,9 +3968,9 @@
               </a:lnSpc>
             </a:pPr>
             <a:r>
-              <a:rPr sz="1300" b="0">
-                <a:solidFill>
-                  <a:srgbClr val="9A9A9A"/>
+              <a:rPr sz="1250" b="0">
+                <a:solidFill>
+                  <a:srgbClr val="98A2AB"/>
                 </a:solidFill>
                 <a:latin typeface="微软雅黑"/>
                 <a:ea typeface="微软雅黑"/>
@@ -4778,14 +3982,58 @@
       </p:sp>
       <p:sp>
         <p:nvSpPr>
-          <p:cNvPr id="6" name="TextBox 5"/>
+          <p:cNvPr id="8" name="Rectangle 7"/>
+          <p:cNvSpPr/>
+          <p:nvPr/>
+        </p:nvSpPr>
+        <p:spPr>
+          <a:xfrm>
+            <a:off x="914400" y="6327648"/>
+            <a:ext cx="10360152" cy="7315"/>
+          </a:xfrm>
+          <a:prstGeom prst="rect">
+            <a:avLst/>
+          </a:prstGeom>
+          <a:solidFill>
+            <a:srgbClr val="DDE3E8"/>
+          </a:solidFill>
+          <a:ln>
+            <a:noFill/>
+          </a:ln>
+          <a:effectLst/>
+        </p:spPr>
+        <p:style>
+          <a:lnRef idx="1">
+            <a:schemeClr val="accent1"/>
+          </a:lnRef>
+          <a:fillRef idx="3">
+            <a:schemeClr val="accent1"/>
+          </a:fillRef>
+          <a:effectRef idx="2">
+            <a:schemeClr val="accent1"/>
+          </a:effectRef>
+          <a:fontRef idx="minor">
+            <a:schemeClr val="lt1"/>
+          </a:fontRef>
+        </p:style>
+        <p:txBody>
+          <a:bodyPr rtlCol="0" anchor="ctr"/>
+          <a:lstStyle/>
+          <a:p>
+            <a:pPr algn="ctr"/>
+          </a:p>
+        </p:txBody>
+      </p:sp>
+      <p:sp>
+        <p:nvSpPr>
+          <p:cNvPr id="9" name="TextBox 8"/>
           <p:cNvSpPr txBox="1"/>
           <p:nvPr/>
         </p:nvSpPr>
         <p:spPr>
           <a:xfrm>
-            <a:off x="10424160" y="6327648"/>
-            <a:ext cx="850392" cy="320040"/>
+            <a:off x="914400" y="6400800"/>
+            <a:ext cx="4572000" cy="320040"/>
           </a:xfrm>
           <a:prstGeom prst="rect">
             <a:avLst/>
@@ -4798,11 +4046,47 @@
           </a:bodyPr>
           <a:lstStyle/>
           <a:p>
+            <a:pPr algn="l"/>
+            <a:r>
+              <a:rPr sz="950" b="0">
+                <a:solidFill>
+                  <a:srgbClr val="98A2AB"/>
+                </a:solidFill>
+                <a:latin typeface="微软雅黑"/>
+                <a:ea typeface="微软雅黑"/>
+              </a:rPr>
+              <a:t>创造有意义的人生</a:t>
+            </a:r>
+          </a:p>
+        </p:txBody>
+      </p:sp>
+      <p:sp>
+        <p:nvSpPr>
+          <p:cNvPr id="10" name="TextBox 9"/>
+          <p:cNvSpPr txBox="1"/>
+          <p:nvPr/>
+        </p:nvSpPr>
+        <p:spPr>
+          <a:xfrm>
+            <a:off x="10360152" y="6400800"/>
+            <a:ext cx="914400" cy="320040"/>
+          </a:xfrm>
+          <a:prstGeom prst="rect">
+            <a:avLst/>
+          </a:prstGeom>
+          <a:noFill/>
+        </p:spPr>
+        <p:txBody>
+          <a:bodyPr wrap="square" anchor="t">
+            <a:spAutoFit/>
+          </a:bodyPr>
+          <a:lstStyle/>
+          <a:p>
             <a:pPr algn="r"/>
             <a:r>
-              <a:rPr sz="1050" b="0">
-                <a:solidFill>
-                  <a:srgbClr val="9A9A9A"/>
+              <a:rPr sz="1000" b="0">
+                <a:solidFill>
+                  <a:srgbClr val="98A2AB"/>
                 </a:solidFill>
                 <a:latin typeface="微软雅黑"/>
                 <a:ea typeface="微软雅黑"/>
@@ -4839,13 +4123,13 @@
         <p:spPr>
           <a:xfrm>
             <a:off x="0" y="0"/>
-            <a:ext cx="12191695" cy="6858000"/>
+            <a:ext cx="128016" cy="6858000"/>
           </a:xfrm>
           <a:prstGeom prst="rect">
             <a:avLst/>
           </a:prstGeom>
           <a:solidFill>
-            <a:srgbClr val="FFFFFF"/>
+            <a:srgbClr val="2F4858"/>
           </a:solidFill>
           <a:ln>
             <a:noFill/>
@@ -4882,8 +4166,8 @@
         </p:nvSpPr>
         <p:spPr>
           <a:xfrm>
-            <a:off x="914400" y="2514600"/>
-            <a:ext cx="10332720" cy="1097280"/>
+            <a:off x="914400" y="2468880"/>
+            <a:ext cx="10360152" cy="1097280"/>
           </a:xfrm>
           <a:prstGeom prst="rect">
             <a:avLst/>
@@ -4918,14 +4202,14 @@
         </p:nvSpPr>
         <p:spPr>
           <a:xfrm>
-            <a:off x="914400" y="3794760"/>
-            <a:ext cx="3291840" cy="14630"/>
+            <a:off x="914400" y="3703320"/>
+            <a:ext cx="1737360" cy="45720"/>
           </a:xfrm>
           <a:prstGeom prst="rect">
             <a:avLst/>
           </a:prstGeom>
           <a:solidFill>
-            <a:srgbClr val="3A5A70"/>
+            <a:srgbClr val="52798A"/>
           </a:solidFill>
           <a:ln>
             <a:noFill/>
@@ -4962,8 +4246,8 @@
         </p:nvSpPr>
         <p:spPr>
           <a:xfrm>
-            <a:off x="914400" y="4023360"/>
-            <a:ext cx="10332720" cy="548640"/>
+            <a:off x="914400" y="3931920"/>
+            <a:ext cx="10360152" cy="548640"/>
           </a:xfrm>
           <a:prstGeom prst="rect">
             <a:avLst/>
@@ -4980,7 +4264,7 @@
             <a:r>
               <a:rPr sz="1800" b="0">
                 <a:solidFill>
-                  <a:srgbClr val="6B6B6B"/>
+                  <a:srgbClr val="5F6B76"/>
                 </a:solidFill>
                 <a:latin typeface="微软雅黑"/>
                 <a:ea typeface="微软雅黑"/>
@@ -4992,14 +4276,58 @@
       </p:sp>
       <p:sp>
         <p:nvSpPr>
-          <p:cNvPr id="6" name="TextBox 5"/>
+          <p:cNvPr id="6" name="Rectangle 5"/>
+          <p:cNvSpPr/>
+          <p:nvPr/>
+        </p:nvSpPr>
+        <p:spPr>
+          <a:xfrm>
+            <a:off x="914400" y="6327648"/>
+            <a:ext cx="10360152" cy="7315"/>
+          </a:xfrm>
+          <a:prstGeom prst="rect">
+            <a:avLst/>
+          </a:prstGeom>
+          <a:solidFill>
+            <a:srgbClr val="DDE3E8"/>
+          </a:solidFill>
+          <a:ln>
+            <a:noFill/>
+          </a:ln>
+          <a:effectLst/>
+        </p:spPr>
+        <p:style>
+          <a:lnRef idx="1">
+            <a:schemeClr val="accent1"/>
+          </a:lnRef>
+          <a:fillRef idx="3">
+            <a:schemeClr val="accent1"/>
+          </a:fillRef>
+          <a:effectRef idx="2">
+            <a:schemeClr val="accent1"/>
+          </a:effectRef>
+          <a:fontRef idx="minor">
+            <a:schemeClr val="lt1"/>
+          </a:fontRef>
+        </p:style>
+        <p:txBody>
+          <a:bodyPr rtlCol="0" anchor="ctr"/>
+          <a:lstStyle/>
+          <a:p>
+            <a:pPr algn="ctr"/>
+          </a:p>
+        </p:txBody>
+      </p:sp>
+      <p:sp>
+        <p:nvSpPr>
+          <p:cNvPr id="7" name="TextBox 6"/>
           <p:cNvSpPr txBox="1"/>
           <p:nvPr/>
         </p:nvSpPr>
         <p:spPr>
           <a:xfrm>
-            <a:off x="10424160" y="6327648"/>
-            <a:ext cx="850392" cy="320040"/>
+            <a:off x="914400" y="6400800"/>
+            <a:ext cx="4572000" cy="320040"/>
           </a:xfrm>
           <a:prstGeom prst="rect">
             <a:avLst/>
@@ -5012,11 +4340,47 @@
           </a:bodyPr>
           <a:lstStyle/>
           <a:p>
+            <a:pPr algn="l"/>
+            <a:r>
+              <a:rPr sz="950" b="0">
+                <a:solidFill>
+                  <a:srgbClr val="98A2AB"/>
+                </a:solidFill>
+                <a:latin typeface="微软雅黑"/>
+                <a:ea typeface="微软雅黑"/>
+              </a:rPr>
+              <a:t>创造有意义的人生</a:t>
+            </a:r>
+          </a:p>
+        </p:txBody>
+      </p:sp>
+      <p:sp>
+        <p:nvSpPr>
+          <p:cNvPr id="8" name="TextBox 7"/>
+          <p:cNvSpPr txBox="1"/>
+          <p:nvPr/>
+        </p:nvSpPr>
+        <p:spPr>
+          <a:xfrm>
+            <a:off x="10360152" y="6400800"/>
+            <a:ext cx="914400" cy="320040"/>
+          </a:xfrm>
+          <a:prstGeom prst="rect">
+            <a:avLst/>
+          </a:prstGeom>
+          <a:noFill/>
+        </p:spPr>
+        <p:txBody>
+          <a:bodyPr wrap="square" anchor="t">
+            <a:spAutoFit/>
+          </a:bodyPr>
+          <a:lstStyle/>
+          <a:p>
             <a:pPr algn="r"/>
             <a:r>
-              <a:rPr sz="1050" b="0">
-                <a:solidFill>
-                  <a:srgbClr val="9A9A9A"/>
+              <a:rPr sz="1000" b="0">
+                <a:solidFill>
+                  <a:srgbClr val="98A2AB"/>
                 </a:solidFill>
                 <a:latin typeface="微软雅黑"/>
                 <a:ea typeface="微软雅黑"/>
@@ -5053,13 +4417,13 @@
         <p:spPr>
           <a:xfrm>
             <a:off x="0" y="0"/>
-            <a:ext cx="12191695" cy="6858000"/>
+            <a:ext cx="128016" cy="6858000"/>
           </a:xfrm>
           <a:prstGeom prst="rect">
             <a:avLst/>
           </a:prstGeom>
           <a:solidFill>
-            <a:srgbClr val="FFFFFF"/>
+            <a:srgbClr val="2F4858"/>
           </a:solidFill>
           <a:ln>
             <a:noFill/>
@@ -5090,56 +4454,20 @@
       </p:sp>
       <p:sp>
         <p:nvSpPr>
-          <p:cNvPr id="3" name="TextBox 2"/>
-          <p:cNvSpPr txBox="1"/>
-          <p:nvPr/>
-        </p:nvSpPr>
-        <p:spPr>
-          <a:xfrm>
-            <a:off x="914400" y="1417320"/>
-            <a:ext cx="10332720" cy="365760"/>
-          </a:xfrm>
-          <a:prstGeom prst="rect">
-            <a:avLst/>
-          </a:prstGeom>
-          <a:noFill/>
-        </p:spPr>
-        <p:txBody>
-          <a:bodyPr wrap="square" anchor="t">
-            <a:spAutoFit/>
-          </a:bodyPr>
-          <a:lstStyle/>
-          <a:p>
-            <a:pPr algn="l"/>
-            <a:r>
-              <a:rPr sz="1150" b="0">
-                <a:solidFill>
-                  <a:srgbClr val="3A5A70"/>
-                </a:solidFill>
-                <a:latin typeface="微软雅黑"/>
-                <a:ea typeface="微软雅黑"/>
-              </a:rPr>
-              <a:t>开场</a:t>
-            </a:r>
-          </a:p>
-        </p:txBody>
-      </p:sp>
-      <p:sp>
-        <p:nvSpPr>
-          <p:cNvPr id="4" name="Rectangle 3"/>
+          <p:cNvPr id="3" name="Rectangle 2"/>
           <p:cNvSpPr/>
           <p:nvPr/>
         </p:nvSpPr>
         <p:spPr>
           <a:xfrm>
-            <a:off x="914400" y="1965960"/>
-            <a:ext cx="10360152" cy="10972"/>
+            <a:off x="914400" y="676656"/>
+            <a:ext cx="118872" cy="118872"/>
           </a:xfrm>
           <a:prstGeom prst="rect">
             <a:avLst/>
           </a:prstGeom>
           <a:solidFill>
-            <a:srgbClr val="D8D8D8"/>
+            <a:srgbClr val="52798A"/>
           </a:solidFill>
           <a:ln>
             <a:noFill/>
@@ -5170,14 +4498,184 @@
       </p:sp>
       <p:sp>
         <p:nvSpPr>
-          <p:cNvPr id="5" name="TextBox 4"/>
+          <p:cNvPr id="4" name="TextBox 3"/>
           <p:cNvSpPr txBox="1"/>
           <p:nvPr/>
         </p:nvSpPr>
         <p:spPr>
           <a:xfrm>
-            <a:off x="914400" y="2514600"/>
-            <a:ext cx="10332720" cy="1463040"/>
+            <a:off x="1133856" y="621792"/>
+            <a:ext cx="8229600" cy="320040"/>
+          </a:xfrm>
+          <a:prstGeom prst="rect">
+            <a:avLst/>
+          </a:prstGeom>
+          <a:noFill/>
+        </p:spPr>
+        <p:txBody>
+          <a:bodyPr wrap="square" anchor="t">
+            <a:spAutoFit/>
+          </a:bodyPr>
+          <a:lstStyle/>
+          <a:p>
+            <a:pPr algn="l"/>
+            <a:r>
+              <a:rPr sz="1150" b="0">
+                <a:solidFill>
+                  <a:srgbClr val="2F4858"/>
+                </a:solidFill>
+                <a:latin typeface="微软雅黑"/>
+                <a:ea typeface="微软雅黑"/>
+              </a:rPr>
+              <a:t>开场</a:t>
+            </a:r>
+          </a:p>
+        </p:txBody>
+      </p:sp>
+      <p:sp>
+        <p:nvSpPr>
+          <p:cNvPr id="5" name="Rectangle 4"/>
+          <p:cNvSpPr/>
+          <p:nvPr/>
+        </p:nvSpPr>
+        <p:spPr>
+          <a:xfrm>
+            <a:off x="914400" y="1645920"/>
+            <a:ext cx="10360152" cy="10972"/>
+          </a:xfrm>
+          <a:prstGeom prst="rect">
+            <a:avLst/>
+          </a:prstGeom>
+          <a:solidFill>
+            <a:srgbClr val="DDE3E8"/>
+          </a:solidFill>
+          <a:ln>
+            <a:noFill/>
+          </a:ln>
+          <a:effectLst/>
+        </p:spPr>
+        <p:style>
+          <a:lnRef idx="1">
+            <a:schemeClr val="accent1"/>
+          </a:lnRef>
+          <a:fillRef idx="3">
+            <a:schemeClr val="accent1"/>
+          </a:fillRef>
+          <a:effectRef idx="2">
+            <a:schemeClr val="accent1"/>
+          </a:effectRef>
+          <a:fontRef idx="minor">
+            <a:schemeClr val="lt1"/>
+          </a:fontRef>
+        </p:style>
+        <p:txBody>
+          <a:bodyPr rtlCol="0" anchor="ctr"/>
+          <a:lstStyle/>
+          <a:p>
+            <a:pPr algn="ctr"/>
+          </a:p>
+        </p:txBody>
+      </p:sp>
+      <p:sp>
+        <p:nvSpPr>
+          <p:cNvPr id="6" name="Rounded Rectangle 5"/>
+          <p:cNvSpPr/>
+          <p:nvPr/>
+        </p:nvSpPr>
+        <p:spPr>
+          <a:xfrm>
+            <a:off x="822960" y="2240280"/>
+            <a:ext cx="10543032" cy="2057400"/>
+          </a:xfrm>
+          <a:prstGeom prst="roundRect">
+            <a:avLst>
+              <a:gd name="adj" fmla="val 6000"/>
+            </a:avLst>
+          </a:prstGeom>
+          <a:solidFill>
+            <a:srgbClr val="EEF2F5"/>
+          </a:solidFill>
+          <a:ln>
+            <a:noFill/>
+          </a:ln>
+          <a:effectLst/>
+        </p:spPr>
+        <p:style>
+          <a:lnRef idx="1">
+            <a:schemeClr val="accent1"/>
+          </a:lnRef>
+          <a:fillRef idx="3">
+            <a:schemeClr val="accent1"/>
+          </a:fillRef>
+          <a:effectRef idx="2">
+            <a:schemeClr val="accent1"/>
+          </a:effectRef>
+          <a:fontRef idx="minor">
+            <a:schemeClr val="lt1"/>
+          </a:fontRef>
+        </p:style>
+        <p:txBody>
+          <a:bodyPr rtlCol="0" anchor="ctr"/>
+          <a:lstStyle/>
+          <a:p>
+            <a:pPr algn="ctr"/>
+          </a:p>
+        </p:txBody>
+      </p:sp>
+      <p:sp>
+        <p:nvSpPr>
+          <p:cNvPr id="7" name="Rectangle 6"/>
+          <p:cNvSpPr/>
+          <p:nvPr/>
+        </p:nvSpPr>
+        <p:spPr>
+          <a:xfrm>
+            <a:off x="822960" y="2240280"/>
+            <a:ext cx="64008" cy="2057400"/>
+          </a:xfrm>
+          <a:prstGeom prst="rect">
+            <a:avLst/>
+          </a:prstGeom>
+          <a:solidFill>
+            <a:srgbClr val="52798A"/>
+          </a:solidFill>
+          <a:ln>
+            <a:noFill/>
+          </a:ln>
+          <a:effectLst/>
+        </p:spPr>
+        <p:style>
+          <a:lnRef idx="1">
+            <a:schemeClr val="accent1"/>
+          </a:lnRef>
+          <a:fillRef idx="3">
+            <a:schemeClr val="accent1"/>
+          </a:fillRef>
+          <a:effectRef idx="2">
+            <a:schemeClr val="accent1"/>
+          </a:effectRef>
+          <a:fontRef idx="minor">
+            <a:schemeClr val="lt1"/>
+          </a:fontRef>
+        </p:style>
+        <p:txBody>
+          <a:bodyPr rtlCol="0" anchor="ctr"/>
+          <a:lstStyle/>
+          <a:p>
+            <a:pPr algn="ctr"/>
+          </a:p>
+        </p:txBody>
+      </p:sp>
+      <p:sp>
+        <p:nvSpPr>
+          <p:cNvPr id="8" name="TextBox 7"/>
+          <p:cNvSpPr txBox="1"/>
+          <p:nvPr/>
+        </p:nvSpPr>
+        <p:spPr>
+          <a:xfrm>
+            <a:off x="1234440" y="2606040"/>
+            <a:ext cx="9875520" cy="1554480"/>
           </a:xfrm>
           <a:prstGeom prst="rect">
             <a:avLst/>
@@ -5196,7 +4694,7 @@
               </a:lnSpc>
             </a:pPr>
             <a:r>
-              <a:rPr sz="3400" b="0">
+              <a:rPr sz="3200" b="0">
                 <a:solidFill>
                   <a:srgbClr val="1B1B1B"/>
                 </a:solidFill>
@@ -5213,7 +4711,7 @@
               </a:lnSpc>
             </a:pPr>
             <a:r>
-              <a:rPr sz="3400" b="0">
+              <a:rPr sz="3200" b="0">
                 <a:solidFill>
                   <a:srgbClr val="1B1B1B"/>
                 </a:solidFill>
@@ -5227,14 +4725,304 @@
       </p:sp>
       <p:sp>
         <p:nvSpPr>
-          <p:cNvPr id="6" name="TextBox 5"/>
+          <p:cNvPr id="9" name="Rounded Rectangle 8"/>
+          <p:cNvSpPr/>
+          <p:nvPr/>
+        </p:nvSpPr>
+        <p:spPr>
+          <a:xfrm>
+            <a:off x="914400" y="4617720"/>
+            <a:ext cx="3200400" cy="777240"/>
+          </a:xfrm>
+          <a:prstGeom prst="roundRect">
+            <a:avLst>
+              <a:gd name="adj" fmla="val 16000"/>
+            </a:avLst>
+          </a:prstGeom>
+          <a:solidFill>
+            <a:srgbClr val="52798A"/>
+          </a:solidFill>
+          <a:ln>
+            <a:noFill/>
+          </a:ln>
+          <a:effectLst/>
+        </p:spPr>
+        <p:style>
+          <a:lnRef idx="1">
+            <a:schemeClr val="accent1"/>
+          </a:lnRef>
+          <a:fillRef idx="3">
+            <a:schemeClr val="accent1"/>
+          </a:fillRef>
+          <a:effectRef idx="2">
+            <a:schemeClr val="accent1"/>
+          </a:effectRef>
+          <a:fontRef idx="minor">
+            <a:schemeClr val="lt1"/>
+          </a:fontRef>
+        </p:style>
+        <p:txBody>
+          <a:bodyPr rtlCol="0" anchor="ctr"/>
+          <a:lstStyle/>
+          <a:p>
+            <a:pPr algn="ctr"/>
+          </a:p>
+        </p:txBody>
+      </p:sp>
+      <p:sp>
+        <p:nvSpPr>
+          <p:cNvPr id="10" name="TextBox 9"/>
           <p:cNvSpPr txBox="1"/>
           <p:nvPr/>
         </p:nvSpPr>
         <p:spPr>
           <a:xfrm>
-            <a:off x="914400" y="4343400"/>
-            <a:ext cx="10332720" cy="457200"/>
+            <a:off x="914400" y="4617720"/>
+            <a:ext cx="3200400" cy="777240"/>
+          </a:xfrm>
+          <a:prstGeom prst="rect">
+            <a:avLst/>
+          </a:prstGeom>
+          <a:noFill/>
+        </p:spPr>
+        <p:txBody>
+          <a:bodyPr wrap="square" anchor="ctr">
+            <a:spAutoFit/>
+          </a:bodyPr>
+          <a:lstStyle/>
+          <a:p>
+            <a:pPr algn="ctr"/>
+            <a:r>
+              <a:rPr sz="1700" b="0">
+                <a:solidFill>
+                  <a:srgbClr val="FFFFFF"/>
+                </a:solidFill>
+                <a:latin typeface="微软雅黑"/>
+                <a:ea typeface="微软雅黑"/>
+              </a:rPr>
+              <a:t>不够漂亮</a:t>
+            </a:r>
+          </a:p>
+        </p:txBody>
+      </p:sp>
+      <p:sp>
+        <p:nvSpPr>
+          <p:cNvPr id="11" name="Rounded Rectangle 10"/>
+          <p:cNvSpPr/>
+          <p:nvPr/>
+        </p:nvSpPr>
+        <p:spPr>
+          <a:xfrm>
+            <a:off x="4434840" y="4617720"/>
+            <a:ext cx="3200400" cy="777240"/>
+          </a:xfrm>
+          <a:prstGeom prst="roundRect">
+            <a:avLst>
+              <a:gd name="adj" fmla="val 16000"/>
+            </a:avLst>
+          </a:prstGeom>
+          <a:solidFill>
+            <a:srgbClr val="52798A"/>
+          </a:solidFill>
+          <a:ln>
+            <a:noFill/>
+          </a:ln>
+          <a:effectLst/>
+        </p:spPr>
+        <p:style>
+          <a:lnRef idx="1">
+            <a:schemeClr val="accent1"/>
+          </a:lnRef>
+          <a:fillRef idx="3">
+            <a:schemeClr val="accent1"/>
+          </a:fillRef>
+          <a:effectRef idx="2">
+            <a:schemeClr val="accent1"/>
+          </a:effectRef>
+          <a:fontRef idx="minor">
+            <a:schemeClr val="lt1"/>
+          </a:fontRef>
+        </p:style>
+        <p:txBody>
+          <a:bodyPr rtlCol="0" anchor="ctr"/>
+          <a:lstStyle/>
+          <a:p>
+            <a:pPr algn="ctr"/>
+          </a:p>
+        </p:txBody>
+      </p:sp>
+      <p:sp>
+        <p:nvSpPr>
+          <p:cNvPr id="12" name="TextBox 11"/>
+          <p:cNvSpPr txBox="1"/>
+          <p:nvPr/>
+        </p:nvSpPr>
+        <p:spPr>
+          <a:xfrm>
+            <a:off x="4434840" y="4617720"/>
+            <a:ext cx="3200400" cy="777240"/>
+          </a:xfrm>
+          <a:prstGeom prst="rect">
+            <a:avLst/>
+          </a:prstGeom>
+          <a:noFill/>
+        </p:spPr>
+        <p:txBody>
+          <a:bodyPr wrap="square" anchor="ctr">
+            <a:spAutoFit/>
+          </a:bodyPr>
+          <a:lstStyle/>
+          <a:p>
+            <a:pPr algn="ctr"/>
+            <a:r>
+              <a:rPr sz="1700" b="0">
+                <a:solidFill>
+                  <a:srgbClr val="FFFFFF"/>
+                </a:solidFill>
+                <a:latin typeface="微软雅黑"/>
+                <a:ea typeface="微软雅黑"/>
+              </a:rPr>
+              <a:t>不够聪明</a:t>
+            </a:r>
+          </a:p>
+        </p:txBody>
+      </p:sp>
+      <p:sp>
+        <p:nvSpPr>
+          <p:cNvPr id="13" name="Rounded Rectangle 12"/>
+          <p:cNvSpPr/>
+          <p:nvPr/>
+        </p:nvSpPr>
+        <p:spPr>
+          <a:xfrm>
+            <a:off x="7955279" y="4617720"/>
+            <a:ext cx="3200400" cy="777240"/>
+          </a:xfrm>
+          <a:prstGeom prst="roundRect">
+            <a:avLst>
+              <a:gd name="adj" fmla="val 16000"/>
+            </a:avLst>
+          </a:prstGeom>
+          <a:solidFill>
+            <a:srgbClr val="52798A"/>
+          </a:solidFill>
+          <a:ln>
+            <a:noFill/>
+          </a:ln>
+          <a:effectLst/>
+        </p:spPr>
+        <p:style>
+          <a:lnRef idx="1">
+            <a:schemeClr val="accent1"/>
+          </a:lnRef>
+          <a:fillRef idx="3">
+            <a:schemeClr val="accent1"/>
+          </a:fillRef>
+          <a:effectRef idx="2">
+            <a:schemeClr val="accent1"/>
+          </a:effectRef>
+          <a:fontRef idx="minor">
+            <a:schemeClr val="lt1"/>
+          </a:fontRef>
+        </p:style>
+        <p:txBody>
+          <a:bodyPr rtlCol="0" anchor="ctr"/>
+          <a:lstStyle/>
+          <a:p>
+            <a:pPr algn="ctr"/>
+          </a:p>
+        </p:txBody>
+      </p:sp>
+      <p:sp>
+        <p:nvSpPr>
+          <p:cNvPr id="14" name="TextBox 13"/>
+          <p:cNvSpPr txBox="1"/>
+          <p:nvPr/>
+        </p:nvSpPr>
+        <p:spPr>
+          <a:xfrm>
+            <a:off x="7955279" y="4617720"/>
+            <a:ext cx="3200400" cy="777240"/>
+          </a:xfrm>
+          <a:prstGeom prst="rect">
+            <a:avLst/>
+          </a:prstGeom>
+          <a:noFill/>
+        </p:spPr>
+        <p:txBody>
+          <a:bodyPr wrap="square" anchor="ctr">
+            <a:spAutoFit/>
+          </a:bodyPr>
+          <a:lstStyle/>
+          <a:p>
+            <a:pPr algn="ctr"/>
+            <a:r>
+              <a:rPr sz="1700" b="0">
+                <a:solidFill>
+                  <a:srgbClr val="FFFFFF"/>
+                </a:solidFill>
+                <a:latin typeface="微软雅黑"/>
+                <a:ea typeface="微软雅黑"/>
+              </a:rPr>
+              <a:t>不够优秀</a:t>
+            </a:r>
+          </a:p>
+        </p:txBody>
+      </p:sp>
+      <p:sp>
+        <p:nvSpPr>
+          <p:cNvPr id="15" name="Rectangle 14"/>
+          <p:cNvSpPr/>
+          <p:nvPr/>
+        </p:nvSpPr>
+        <p:spPr>
+          <a:xfrm>
+            <a:off x="914400" y="6327648"/>
+            <a:ext cx="10360152" cy="7315"/>
+          </a:xfrm>
+          <a:prstGeom prst="rect">
+            <a:avLst/>
+          </a:prstGeom>
+          <a:solidFill>
+            <a:srgbClr val="DDE3E8"/>
+          </a:solidFill>
+          <a:ln>
+            <a:noFill/>
+          </a:ln>
+          <a:effectLst/>
+        </p:spPr>
+        <p:style>
+          <a:lnRef idx="1">
+            <a:schemeClr val="accent1"/>
+          </a:lnRef>
+          <a:fillRef idx="3">
+            <a:schemeClr val="accent1"/>
+          </a:fillRef>
+          <a:effectRef idx="2">
+            <a:schemeClr val="accent1"/>
+          </a:effectRef>
+          <a:fontRef idx="minor">
+            <a:schemeClr val="lt1"/>
+          </a:fontRef>
+        </p:style>
+        <p:txBody>
+          <a:bodyPr rtlCol="0" anchor="ctr"/>
+          <a:lstStyle/>
+          <a:p>
+            <a:pPr algn="ctr"/>
+          </a:p>
+        </p:txBody>
+      </p:sp>
+      <p:sp>
+        <p:nvSpPr>
+          <p:cNvPr id="16" name="TextBox 15"/>
+          <p:cNvSpPr txBox="1"/>
+          <p:nvPr/>
+        </p:nvSpPr>
+        <p:spPr>
+          <a:xfrm>
+            <a:off x="914400" y="6400800"/>
+            <a:ext cx="4572000" cy="320040"/>
           </a:xfrm>
           <a:prstGeom prst="rect">
             <a:avLst/>
@@ -5249,28 +5037,28 @@
           <a:p>
             <a:pPr algn="l"/>
             <a:r>
-              <a:rPr sz="1600" b="0">
-                <a:solidFill>
-                  <a:srgbClr val="6B6B6B"/>
+              <a:rPr sz="950" b="0">
+                <a:solidFill>
+                  <a:srgbClr val="98A2AB"/>
                 </a:solidFill>
                 <a:latin typeface="微软雅黑"/>
                 <a:ea typeface="微软雅黑"/>
               </a:rPr>
-              <a:t>不够漂亮 · 不够聪明 · 不够优秀</a:t>
-            </a:r>
-          </a:p>
-        </p:txBody>
-      </p:sp>
-      <p:sp>
-        <p:nvSpPr>
-          <p:cNvPr id="7" name="TextBox 6"/>
+              <a:t>创造有意义的人生</a:t>
+            </a:r>
+          </a:p>
+        </p:txBody>
+      </p:sp>
+      <p:sp>
+        <p:nvSpPr>
+          <p:cNvPr id="17" name="TextBox 16"/>
           <p:cNvSpPr txBox="1"/>
           <p:nvPr/>
         </p:nvSpPr>
         <p:spPr>
           <a:xfrm>
-            <a:off x="10424160" y="6327648"/>
-            <a:ext cx="850392" cy="320040"/>
+            <a:off x="10360152" y="6400800"/>
+            <a:ext cx="914400" cy="320040"/>
           </a:xfrm>
           <a:prstGeom prst="rect">
             <a:avLst/>
@@ -5285,9 +5073,9 @@
           <a:p>
             <a:pPr algn="r"/>
             <a:r>
-              <a:rPr sz="1050" b="0">
-                <a:solidFill>
-                  <a:srgbClr val="9A9A9A"/>
+              <a:rPr sz="1000" b="0">
+                <a:solidFill>
+                  <a:srgbClr val="98A2AB"/>
                 </a:solidFill>
                 <a:latin typeface="微软雅黑"/>
                 <a:ea typeface="微软雅黑"/>
@@ -5324,13 +5112,13 @@
         <p:spPr>
           <a:xfrm>
             <a:off x="0" y="0"/>
-            <a:ext cx="12191695" cy="6858000"/>
+            <a:ext cx="128016" cy="6858000"/>
           </a:xfrm>
           <a:prstGeom prst="rect">
             <a:avLst/>
           </a:prstGeom>
           <a:solidFill>
-            <a:srgbClr val="FFFFFF"/>
+            <a:srgbClr val="2F4858"/>
           </a:solidFill>
           <a:ln>
             <a:noFill/>
@@ -5361,92 +5149,20 @@
       </p:sp>
       <p:sp>
         <p:nvSpPr>
-          <p:cNvPr id="3" name="TextBox 2"/>
-          <p:cNvSpPr txBox="1"/>
-          <p:nvPr/>
-        </p:nvSpPr>
-        <p:spPr>
-          <a:xfrm>
-            <a:off x="914400" y="640080"/>
-            <a:ext cx="10332720" cy="320040"/>
-          </a:xfrm>
-          <a:prstGeom prst="rect">
-            <a:avLst/>
-          </a:prstGeom>
-          <a:noFill/>
-        </p:spPr>
-        <p:txBody>
-          <a:bodyPr wrap="square" anchor="t">
-            <a:spAutoFit/>
-          </a:bodyPr>
-          <a:lstStyle/>
-          <a:p>
-            <a:pPr algn="l"/>
-            <a:r>
-              <a:rPr sz="1150" b="0">
-                <a:solidFill>
-                  <a:srgbClr val="3A5A70"/>
-                </a:solidFill>
-                <a:latin typeface="微软雅黑"/>
-                <a:ea typeface="微软雅黑"/>
-              </a:rPr>
-              <a:t>本节框架</a:t>
-            </a:r>
-          </a:p>
-        </p:txBody>
-      </p:sp>
-      <p:sp>
-        <p:nvSpPr>
-          <p:cNvPr id="4" name="TextBox 3"/>
-          <p:cNvSpPr txBox="1"/>
-          <p:nvPr/>
-        </p:nvSpPr>
-        <p:spPr>
-          <a:xfrm>
-            <a:off x="914400" y="914400"/>
-            <a:ext cx="10332720" cy="685800"/>
-          </a:xfrm>
-          <a:prstGeom prst="rect">
-            <a:avLst/>
-          </a:prstGeom>
-          <a:noFill/>
-        </p:spPr>
-        <p:txBody>
-          <a:bodyPr wrap="square" anchor="t">
-            <a:spAutoFit/>
-          </a:bodyPr>
-          <a:lstStyle/>
-          <a:p>
-            <a:pPr algn="l"/>
-            <a:r>
-              <a:rPr sz="2900" b="0">
-                <a:solidFill>
-                  <a:srgbClr val="1B1B1B"/>
-                </a:solidFill>
-                <a:latin typeface="微软雅黑 Light"/>
-                <a:ea typeface="微软雅黑 Light"/>
-              </a:rPr>
-              <a:t>本节课的三个知识点</a:t>
-            </a:r>
-          </a:p>
-        </p:txBody>
-      </p:sp>
-      <p:sp>
-        <p:nvSpPr>
-          <p:cNvPr id="5" name="Rectangle 4"/>
+          <p:cNvPr id="3" name="Rectangle 2"/>
           <p:cNvSpPr/>
           <p:nvPr/>
         </p:nvSpPr>
         <p:spPr>
           <a:xfrm>
-            <a:off x="914400" y="1673352"/>
-            <a:ext cx="10360152" cy="10972"/>
+            <a:off x="914400" y="676656"/>
+            <a:ext cx="118872" cy="118872"/>
           </a:xfrm>
           <a:prstGeom prst="rect">
             <a:avLst/>
           </a:prstGeom>
           <a:solidFill>
-            <a:srgbClr val="D8D8D8"/>
+            <a:srgbClr val="52798A"/>
           </a:solidFill>
           <a:ln>
             <a:noFill/>
@@ -5477,14 +5193,14 @@
       </p:sp>
       <p:sp>
         <p:nvSpPr>
-          <p:cNvPr id="6" name="TextBox 5"/>
+          <p:cNvPr id="4" name="TextBox 3"/>
           <p:cNvSpPr txBox="1"/>
           <p:nvPr/>
         </p:nvSpPr>
         <p:spPr>
           <a:xfrm>
-            <a:off x="914400" y="2240280"/>
-            <a:ext cx="822960" cy="548640"/>
+            <a:off x="1133856" y="621792"/>
+            <a:ext cx="8229600" cy="320040"/>
           </a:xfrm>
           <a:prstGeom prst="rect">
             <a:avLst/>
@@ -5499,214 +5215,70 @@
           <a:p>
             <a:pPr algn="l"/>
             <a:r>
-              <a:rPr sz="1800" b="0">
-                <a:solidFill>
-                  <a:srgbClr val="8FA6B4"/>
+              <a:rPr sz="1150" b="0">
+                <a:solidFill>
+                  <a:srgbClr val="2F4858"/>
+                </a:solidFill>
+                <a:latin typeface="微软雅黑"/>
+                <a:ea typeface="微软雅黑"/>
+              </a:rPr>
+              <a:t>本节框架</a:t>
+            </a:r>
+          </a:p>
+        </p:txBody>
+      </p:sp>
+      <p:sp>
+        <p:nvSpPr>
+          <p:cNvPr id="5" name="TextBox 4"/>
+          <p:cNvSpPr txBox="1"/>
+          <p:nvPr/>
+        </p:nvSpPr>
+        <p:spPr>
+          <a:xfrm>
+            <a:off x="914400" y="896112"/>
+            <a:ext cx="10360152" cy="685800"/>
+          </a:xfrm>
+          <a:prstGeom prst="rect">
+            <a:avLst/>
+          </a:prstGeom>
+          <a:noFill/>
+        </p:spPr>
+        <p:txBody>
+          <a:bodyPr wrap="square" anchor="t">
+            <a:spAutoFit/>
+          </a:bodyPr>
+          <a:lstStyle/>
+          <a:p>
+            <a:pPr algn="l"/>
+            <a:r>
+              <a:rPr sz="2800" b="0">
+                <a:solidFill>
+                  <a:srgbClr val="1B1B1B"/>
                 </a:solidFill>
                 <a:latin typeface="微软雅黑 Light"/>
                 <a:ea typeface="微软雅黑 Light"/>
               </a:rPr>
-              <a:t>01</a:t>
-            </a:r>
-          </a:p>
-        </p:txBody>
-      </p:sp>
-      <p:sp>
-        <p:nvSpPr>
-          <p:cNvPr id="7" name="TextBox 6"/>
-          <p:cNvSpPr txBox="1"/>
-          <p:nvPr/>
-        </p:nvSpPr>
-        <p:spPr>
-          <a:xfrm>
-            <a:off x="1691640" y="2185416"/>
-            <a:ext cx="9601200" cy="640080"/>
-          </a:xfrm>
-          <a:prstGeom prst="rect">
-            <a:avLst/>
-          </a:prstGeom>
-          <a:noFill/>
-        </p:spPr>
-        <p:txBody>
-          <a:bodyPr wrap="square" anchor="t">
-            <a:spAutoFit/>
-          </a:bodyPr>
-          <a:lstStyle/>
-          <a:p>
-            <a:pPr algn="l"/>
-            <a:r>
-              <a:rPr sz="2300" b="0">
-                <a:solidFill>
-                  <a:srgbClr val="1B1B1B"/>
-                </a:solidFill>
-                <a:latin typeface="微软雅黑 Light"/>
-                <a:ea typeface="微软雅黑 Light"/>
-              </a:rPr>
-              <a:t>辩证看待人生矛盾</a:t>
-            </a:r>
-          </a:p>
-        </p:txBody>
-      </p:sp>
-      <p:sp>
-        <p:nvSpPr>
-          <p:cNvPr id="8" name="TextBox 7"/>
-          <p:cNvSpPr txBox="1"/>
-          <p:nvPr/>
-        </p:nvSpPr>
-        <p:spPr>
-          <a:xfrm>
-            <a:off x="914400" y="3108960"/>
-            <a:ext cx="822960" cy="548640"/>
-          </a:xfrm>
-          <a:prstGeom prst="rect">
-            <a:avLst/>
-          </a:prstGeom>
-          <a:noFill/>
-        </p:spPr>
-        <p:txBody>
-          <a:bodyPr wrap="square" anchor="t">
-            <a:spAutoFit/>
-          </a:bodyPr>
-          <a:lstStyle/>
-          <a:p>
-            <a:pPr algn="l"/>
-            <a:r>
-              <a:rPr sz="1800" b="0">
-                <a:solidFill>
-                  <a:srgbClr val="8FA6B4"/>
-                </a:solidFill>
-                <a:latin typeface="微软雅黑 Light"/>
-                <a:ea typeface="微软雅黑 Light"/>
-              </a:rPr>
-              <a:t>02</a:t>
-            </a:r>
-          </a:p>
-        </p:txBody>
-      </p:sp>
-      <p:sp>
-        <p:nvSpPr>
-          <p:cNvPr id="9" name="TextBox 8"/>
-          <p:cNvSpPr txBox="1"/>
-          <p:nvPr/>
-        </p:nvSpPr>
-        <p:spPr>
-          <a:xfrm>
-            <a:off x="1691640" y="3054096"/>
-            <a:ext cx="9601200" cy="640080"/>
-          </a:xfrm>
-          <a:prstGeom prst="rect">
-            <a:avLst/>
-          </a:prstGeom>
-          <a:noFill/>
-        </p:spPr>
-        <p:txBody>
-          <a:bodyPr wrap="square" anchor="t">
-            <a:spAutoFit/>
-          </a:bodyPr>
-          <a:lstStyle/>
-          <a:p>
-            <a:pPr algn="l"/>
-            <a:r>
-              <a:rPr sz="2300" b="0">
-                <a:solidFill>
-                  <a:srgbClr val="1B1B1B"/>
-                </a:solidFill>
-                <a:latin typeface="微软雅黑 Light"/>
-                <a:ea typeface="微软雅黑 Light"/>
-              </a:rPr>
-              <a:t>正确评价人生价值</a:t>
-            </a:r>
-          </a:p>
-        </p:txBody>
-      </p:sp>
-      <p:sp>
-        <p:nvSpPr>
-          <p:cNvPr id="10" name="TextBox 9"/>
-          <p:cNvSpPr txBox="1"/>
-          <p:nvPr/>
-        </p:nvSpPr>
-        <p:spPr>
-          <a:xfrm>
-            <a:off x="914400" y="3977640"/>
-            <a:ext cx="822960" cy="548640"/>
-          </a:xfrm>
-          <a:prstGeom prst="rect">
-            <a:avLst/>
-          </a:prstGeom>
-          <a:noFill/>
-        </p:spPr>
-        <p:txBody>
-          <a:bodyPr wrap="square" anchor="t">
-            <a:spAutoFit/>
-          </a:bodyPr>
-          <a:lstStyle/>
-          <a:p>
-            <a:pPr algn="l"/>
-            <a:r>
-              <a:rPr sz="1800" b="0">
-                <a:solidFill>
-                  <a:srgbClr val="8FA6B4"/>
-                </a:solidFill>
-                <a:latin typeface="微软雅黑 Light"/>
-                <a:ea typeface="微软雅黑 Light"/>
-              </a:rPr>
-              <a:t>03</a:t>
-            </a:r>
-          </a:p>
-        </p:txBody>
-      </p:sp>
-      <p:sp>
-        <p:nvSpPr>
-          <p:cNvPr id="11" name="TextBox 10"/>
-          <p:cNvSpPr txBox="1"/>
-          <p:nvPr/>
-        </p:nvSpPr>
-        <p:spPr>
-          <a:xfrm>
-            <a:off x="1691640" y="3922776"/>
-            <a:ext cx="9601200" cy="640080"/>
-          </a:xfrm>
-          <a:prstGeom prst="rect">
-            <a:avLst/>
-          </a:prstGeom>
-          <a:noFill/>
-        </p:spPr>
-        <p:txBody>
-          <a:bodyPr wrap="square" anchor="t">
-            <a:spAutoFit/>
-          </a:bodyPr>
-          <a:lstStyle/>
-          <a:p>
-            <a:pPr algn="l"/>
-            <a:r>
-              <a:rPr sz="2300" b="0">
-                <a:solidFill>
-                  <a:srgbClr val="1B1B1B"/>
-                </a:solidFill>
-                <a:latin typeface="微软雅黑 Light"/>
-                <a:ea typeface="微软雅黑 Light"/>
-              </a:rPr>
-              <a:t>成就出彩人生</a:t>
-            </a:r>
-          </a:p>
-        </p:txBody>
-      </p:sp>
-      <p:sp>
-        <p:nvSpPr>
-          <p:cNvPr id="12" name="Rectangle 11"/>
+              <a:t>本节课的三个知识点</a:t>
+            </a:r>
+          </a:p>
+        </p:txBody>
+      </p:sp>
+      <p:sp>
+        <p:nvSpPr>
+          <p:cNvPr id="6" name="Rectangle 5"/>
           <p:cNvSpPr/>
           <p:nvPr/>
         </p:nvSpPr>
         <p:spPr>
           <a:xfrm>
-            <a:off x="914400" y="5257800"/>
+            <a:off x="914400" y="1645920"/>
             <a:ext cx="10360152" cy="10972"/>
           </a:xfrm>
           <a:prstGeom prst="rect">
             <a:avLst/>
           </a:prstGeom>
           <a:solidFill>
-            <a:srgbClr val="D8D8D8"/>
+            <a:srgbClr val="DDE3E8"/>
           </a:solidFill>
           <a:ln>
             <a:noFill/>
@@ -5737,14 +5309,96 @@
       </p:sp>
       <p:sp>
         <p:nvSpPr>
-          <p:cNvPr id="13" name="TextBox 12"/>
+          <p:cNvPr id="7" name="Rounded Rectangle 6"/>
+          <p:cNvSpPr/>
+          <p:nvPr/>
+        </p:nvSpPr>
+        <p:spPr>
+          <a:xfrm>
+            <a:off x="914400" y="2148840"/>
+            <a:ext cx="603504" cy="603504"/>
+          </a:xfrm>
+          <a:prstGeom prst="roundRect">
+            <a:avLst>
+              <a:gd name="adj" fmla="val 22000"/>
+            </a:avLst>
+          </a:prstGeom>
+          <a:solidFill>
+            <a:srgbClr val="2F4858"/>
+          </a:solidFill>
+          <a:ln>
+            <a:noFill/>
+          </a:ln>
+          <a:effectLst/>
+        </p:spPr>
+        <p:style>
+          <a:lnRef idx="1">
+            <a:schemeClr val="accent1"/>
+          </a:lnRef>
+          <a:fillRef idx="3">
+            <a:schemeClr val="accent1"/>
+          </a:fillRef>
+          <a:effectRef idx="2">
+            <a:schemeClr val="accent1"/>
+          </a:effectRef>
+          <a:fontRef idx="minor">
+            <a:schemeClr val="lt1"/>
+          </a:fontRef>
+        </p:style>
+        <p:txBody>
+          <a:bodyPr rtlCol="0" anchor="ctr"/>
+          <a:lstStyle/>
+          <a:p>
+            <a:pPr algn="ctr"/>
+          </a:p>
+        </p:txBody>
+      </p:sp>
+      <p:sp>
+        <p:nvSpPr>
+          <p:cNvPr id="8" name="TextBox 7"/>
           <p:cNvSpPr txBox="1"/>
           <p:nvPr/>
         </p:nvSpPr>
         <p:spPr>
           <a:xfrm>
-            <a:off x="914400" y="5440680"/>
-            <a:ext cx="10332720" cy="457200"/>
+            <a:off x="914400" y="2148840"/>
+            <a:ext cx="603504" cy="603504"/>
+          </a:xfrm>
+          <a:prstGeom prst="rect">
+            <a:avLst/>
+          </a:prstGeom>
+          <a:noFill/>
+        </p:spPr>
+        <p:txBody>
+          <a:bodyPr wrap="square" anchor="ctr">
+            <a:spAutoFit/>
+          </a:bodyPr>
+          <a:lstStyle/>
+          <a:p>
+            <a:pPr algn="ctr"/>
+            <a:r>
+              <a:rPr sz="1500" b="0">
+                <a:solidFill>
+                  <a:srgbClr val="FFFFFF"/>
+                </a:solidFill>
+                <a:latin typeface="微软雅黑"/>
+                <a:ea typeface="微软雅黑"/>
+              </a:rPr>
+              <a:t>01</a:t>
+            </a:r>
+          </a:p>
+        </p:txBody>
+      </p:sp>
+      <p:sp>
+        <p:nvSpPr>
+          <p:cNvPr id="9" name="TextBox 8"/>
+          <p:cNvSpPr txBox="1"/>
+          <p:nvPr/>
+        </p:nvSpPr>
+        <p:spPr>
+          <a:xfrm>
+            <a:off x="1737360" y="2103120"/>
+            <a:ext cx="9326880" cy="640080"/>
           </a:xfrm>
           <a:prstGeom prst="rect">
             <a:avLst/>
@@ -5759,9 +5413,459 @@
           <a:p>
             <a:pPr algn="l"/>
             <a:r>
+              <a:rPr sz="2200" b="0">
+                <a:solidFill>
+                  <a:srgbClr val="1B1B1B"/>
+                </a:solidFill>
+                <a:latin typeface="微软雅黑 Light"/>
+                <a:ea typeface="微软雅黑 Light"/>
+              </a:rPr>
+              <a:t>辩证看待人生矛盾</a:t>
+            </a:r>
+          </a:p>
+        </p:txBody>
+      </p:sp>
+      <p:sp>
+        <p:nvSpPr>
+          <p:cNvPr id="10" name="Rectangle 9"/>
+          <p:cNvSpPr/>
+          <p:nvPr/>
+        </p:nvSpPr>
+        <p:spPr>
+          <a:xfrm>
+            <a:off x="914400" y="2935224"/>
+            <a:ext cx="10360152" cy="9144"/>
+          </a:xfrm>
+          <a:prstGeom prst="rect">
+            <a:avLst/>
+          </a:prstGeom>
+          <a:solidFill>
+            <a:srgbClr val="DDE3E8"/>
+          </a:solidFill>
+          <a:ln>
+            <a:noFill/>
+          </a:ln>
+          <a:effectLst/>
+        </p:spPr>
+        <p:style>
+          <a:lnRef idx="1">
+            <a:schemeClr val="accent1"/>
+          </a:lnRef>
+          <a:fillRef idx="3">
+            <a:schemeClr val="accent1"/>
+          </a:fillRef>
+          <a:effectRef idx="2">
+            <a:schemeClr val="accent1"/>
+          </a:effectRef>
+          <a:fontRef idx="minor">
+            <a:schemeClr val="lt1"/>
+          </a:fontRef>
+        </p:style>
+        <p:txBody>
+          <a:bodyPr rtlCol="0" anchor="ctr"/>
+          <a:lstStyle/>
+          <a:p>
+            <a:pPr algn="ctr"/>
+          </a:p>
+        </p:txBody>
+      </p:sp>
+      <p:sp>
+        <p:nvSpPr>
+          <p:cNvPr id="11" name="Rounded Rectangle 10"/>
+          <p:cNvSpPr/>
+          <p:nvPr/>
+        </p:nvSpPr>
+        <p:spPr>
+          <a:xfrm>
+            <a:off x="914400" y="3044952"/>
+            <a:ext cx="603504" cy="603504"/>
+          </a:xfrm>
+          <a:prstGeom prst="roundRect">
+            <a:avLst>
+              <a:gd name="adj" fmla="val 22000"/>
+            </a:avLst>
+          </a:prstGeom>
+          <a:solidFill>
+            <a:srgbClr val="2F4858"/>
+          </a:solidFill>
+          <a:ln>
+            <a:noFill/>
+          </a:ln>
+          <a:effectLst/>
+        </p:spPr>
+        <p:style>
+          <a:lnRef idx="1">
+            <a:schemeClr val="accent1"/>
+          </a:lnRef>
+          <a:fillRef idx="3">
+            <a:schemeClr val="accent1"/>
+          </a:fillRef>
+          <a:effectRef idx="2">
+            <a:schemeClr val="accent1"/>
+          </a:effectRef>
+          <a:fontRef idx="minor">
+            <a:schemeClr val="lt1"/>
+          </a:fontRef>
+        </p:style>
+        <p:txBody>
+          <a:bodyPr rtlCol="0" anchor="ctr"/>
+          <a:lstStyle/>
+          <a:p>
+            <a:pPr algn="ctr"/>
+          </a:p>
+        </p:txBody>
+      </p:sp>
+      <p:sp>
+        <p:nvSpPr>
+          <p:cNvPr id="12" name="TextBox 11"/>
+          <p:cNvSpPr txBox="1"/>
+          <p:nvPr/>
+        </p:nvSpPr>
+        <p:spPr>
+          <a:xfrm>
+            <a:off x="914400" y="3044952"/>
+            <a:ext cx="603504" cy="603504"/>
+          </a:xfrm>
+          <a:prstGeom prst="rect">
+            <a:avLst/>
+          </a:prstGeom>
+          <a:noFill/>
+        </p:spPr>
+        <p:txBody>
+          <a:bodyPr wrap="square" anchor="ctr">
+            <a:spAutoFit/>
+          </a:bodyPr>
+          <a:lstStyle/>
+          <a:p>
+            <a:pPr algn="ctr"/>
+            <a:r>
+              <a:rPr sz="1500" b="0">
+                <a:solidFill>
+                  <a:srgbClr val="FFFFFF"/>
+                </a:solidFill>
+                <a:latin typeface="微软雅黑"/>
+                <a:ea typeface="微软雅黑"/>
+              </a:rPr>
+              <a:t>02</a:t>
+            </a:r>
+          </a:p>
+        </p:txBody>
+      </p:sp>
+      <p:sp>
+        <p:nvSpPr>
+          <p:cNvPr id="13" name="TextBox 12"/>
+          <p:cNvSpPr txBox="1"/>
+          <p:nvPr/>
+        </p:nvSpPr>
+        <p:spPr>
+          <a:xfrm>
+            <a:off x="1737360" y="2999232"/>
+            <a:ext cx="9326880" cy="640080"/>
+          </a:xfrm>
+          <a:prstGeom prst="rect">
+            <a:avLst/>
+          </a:prstGeom>
+          <a:noFill/>
+        </p:spPr>
+        <p:txBody>
+          <a:bodyPr wrap="square" anchor="t">
+            <a:spAutoFit/>
+          </a:bodyPr>
+          <a:lstStyle/>
+          <a:p>
+            <a:pPr algn="l"/>
+            <a:r>
+              <a:rPr sz="2200" b="0">
+                <a:solidFill>
+                  <a:srgbClr val="1B1B1B"/>
+                </a:solidFill>
+                <a:latin typeface="微软雅黑 Light"/>
+                <a:ea typeface="微软雅黑 Light"/>
+              </a:rPr>
+              <a:t>正确评价人生价值</a:t>
+            </a:r>
+          </a:p>
+        </p:txBody>
+      </p:sp>
+      <p:sp>
+        <p:nvSpPr>
+          <p:cNvPr id="14" name="Rectangle 13"/>
+          <p:cNvSpPr/>
+          <p:nvPr/>
+        </p:nvSpPr>
+        <p:spPr>
+          <a:xfrm>
+            <a:off x="914400" y="3831336"/>
+            <a:ext cx="10360152" cy="9144"/>
+          </a:xfrm>
+          <a:prstGeom prst="rect">
+            <a:avLst/>
+          </a:prstGeom>
+          <a:solidFill>
+            <a:srgbClr val="DDE3E8"/>
+          </a:solidFill>
+          <a:ln>
+            <a:noFill/>
+          </a:ln>
+          <a:effectLst/>
+        </p:spPr>
+        <p:style>
+          <a:lnRef idx="1">
+            <a:schemeClr val="accent1"/>
+          </a:lnRef>
+          <a:fillRef idx="3">
+            <a:schemeClr val="accent1"/>
+          </a:fillRef>
+          <a:effectRef idx="2">
+            <a:schemeClr val="accent1"/>
+          </a:effectRef>
+          <a:fontRef idx="minor">
+            <a:schemeClr val="lt1"/>
+          </a:fontRef>
+        </p:style>
+        <p:txBody>
+          <a:bodyPr rtlCol="0" anchor="ctr"/>
+          <a:lstStyle/>
+          <a:p>
+            <a:pPr algn="ctr"/>
+          </a:p>
+        </p:txBody>
+      </p:sp>
+      <p:sp>
+        <p:nvSpPr>
+          <p:cNvPr id="15" name="Rounded Rectangle 14"/>
+          <p:cNvSpPr/>
+          <p:nvPr/>
+        </p:nvSpPr>
+        <p:spPr>
+          <a:xfrm>
+            <a:off x="914400" y="3941064"/>
+            <a:ext cx="603504" cy="603504"/>
+          </a:xfrm>
+          <a:prstGeom prst="roundRect">
+            <a:avLst>
+              <a:gd name="adj" fmla="val 22000"/>
+            </a:avLst>
+          </a:prstGeom>
+          <a:solidFill>
+            <a:srgbClr val="2F4858"/>
+          </a:solidFill>
+          <a:ln>
+            <a:noFill/>
+          </a:ln>
+          <a:effectLst/>
+        </p:spPr>
+        <p:style>
+          <a:lnRef idx="1">
+            <a:schemeClr val="accent1"/>
+          </a:lnRef>
+          <a:fillRef idx="3">
+            <a:schemeClr val="accent1"/>
+          </a:fillRef>
+          <a:effectRef idx="2">
+            <a:schemeClr val="accent1"/>
+          </a:effectRef>
+          <a:fontRef idx="minor">
+            <a:schemeClr val="lt1"/>
+          </a:fontRef>
+        </p:style>
+        <p:txBody>
+          <a:bodyPr rtlCol="0" anchor="ctr"/>
+          <a:lstStyle/>
+          <a:p>
+            <a:pPr algn="ctr"/>
+          </a:p>
+        </p:txBody>
+      </p:sp>
+      <p:sp>
+        <p:nvSpPr>
+          <p:cNvPr id="16" name="TextBox 15"/>
+          <p:cNvSpPr txBox="1"/>
+          <p:nvPr/>
+        </p:nvSpPr>
+        <p:spPr>
+          <a:xfrm>
+            <a:off x="914400" y="3941064"/>
+            <a:ext cx="603504" cy="603504"/>
+          </a:xfrm>
+          <a:prstGeom prst="rect">
+            <a:avLst/>
+          </a:prstGeom>
+          <a:noFill/>
+        </p:spPr>
+        <p:txBody>
+          <a:bodyPr wrap="square" anchor="ctr">
+            <a:spAutoFit/>
+          </a:bodyPr>
+          <a:lstStyle/>
+          <a:p>
+            <a:pPr algn="ctr"/>
+            <a:r>
+              <a:rPr sz="1500" b="0">
+                <a:solidFill>
+                  <a:srgbClr val="FFFFFF"/>
+                </a:solidFill>
+                <a:latin typeface="微软雅黑"/>
+                <a:ea typeface="微软雅黑"/>
+              </a:rPr>
+              <a:t>03</a:t>
+            </a:r>
+          </a:p>
+        </p:txBody>
+      </p:sp>
+      <p:sp>
+        <p:nvSpPr>
+          <p:cNvPr id="17" name="TextBox 16"/>
+          <p:cNvSpPr txBox="1"/>
+          <p:nvPr/>
+        </p:nvSpPr>
+        <p:spPr>
+          <a:xfrm>
+            <a:off x="1737360" y="3895344"/>
+            <a:ext cx="9326880" cy="640080"/>
+          </a:xfrm>
+          <a:prstGeom prst="rect">
+            <a:avLst/>
+          </a:prstGeom>
+          <a:noFill/>
+        </p:spPr>
+        <p:txBody>
+          <a:bodyPr wrap="square" anchor="t">
+            <a:spAutoFit/>
+          </a:bodyPr>
+          <a:lstStyle/>
+          <a:p>
+            <a:pPr algn="l"/>
+            <a:r>
+              <a:rPr sz="2200" b="0">
+                <a:solidFill>
+                  <a:srgbClr val="1B1B1B"/>
+                </a:solidFill>
+                <a:latin typeface="微软雅黑 Light"/>
+                <a:ea typeface="微软雅黑 Light"/>
+              </a:rPr>
+              <a:t>成就出彩人生</a:t>
+            </a:r>
+          </a:p>
+        </p:txBody>
+      </p:sp>
+      <p:sp>
+        <p:nvSpPr>
+          <p:cNvPr id="18" name="Rounded Rectangle 17"/>
+          <p:cNvSpPr/>
+          <p:nvPr/>
+        </p:nvSpPr>
+        <p:spPr>
+          <a:xfrm>
+            <a:off x="822960" y="4983480"/>
+            <a:ext cx="10543032" cy="777240"/>
+          </a:xfrm>
+          <a:prstGeom prst="roundRect">
+            <a:avLst>
+              <a:gd name="adj" fmla="val 10000"/>
+            </a:avLst>
+          </a:prstGeom>
+          <a:solidFill>
+            <a:srgbClr val="EEF2F5"/>
+          </a:solidFill>
+          <a:ln>
+            <a:noFill/>
+          </a:ln>
+          <a:effectLst/>
+        </p:spPr>
+        <p:style>
+          <a:lnRef idx="1">
+            <a:schemeClr val="accent1"/>
+          </a:lnRef>
+          <a:fillRef idx="3">
+            <a:schemeClr val="accent1"/>
+          </a:fillRef>
+          <a:effectRef idx="2">
+            <a:schemeClr val="accent1"/>
+          </a:effectRef>
+          <a:fontRef idx="minor">
+            <a:schemeClr val="lt1"/>
+          </a:fontRef>
+        </p:style>
+        <p:txBody>
+          <a:bodyPr rtlCol="0" anchor="ctr"/>
+          <a:lstStyle/>
+          <a:p>
+            <a:pPr algn="ctr"/>
+          </a:p>
+        </p:txBody>
+      </p:sp>
+      <p:sp>
+        <p:nvSpPr>
+          <p:cNvPr id="19" name="Rectangle 18"/>
+          <p:cNvSpPr/>
+          <p:nvPr/>
+        </p:nvSpPr>
+        <p:spPr>
+          <a:xfrm>
+            <a:off x="822960" y="4983480"/>
+            <a:ext cx="64008" cy="777240"/>
+          </a:xfrm>
+          <a:prstGeom prst="rect">
+            <a:avLst/>
+          </a:prstGeom>
+          <a:solidFill>
+            <a:srgbClr val="52798A"/>
+          </a:solidFill>
+          <a:ln>
+            <a:noFill/>
+          </a:ln>
+          <a:effectLst/>
+        </p:spPr>
+        <p:style>
+          <a:lnRef idx="1">
+            <a:schemeClr val="accent1"/>
+          </a:lnRef>
+          <a:fillRef idx="3">
+            <a:schemeClr val="accent1"/>
+          </a:fillRef>
+          <a:effectRef idx="2">
+            <a:schemeClr val="accent1"/>
+          </a:effectRef>
+          <a:fontRef idx="minor">
+            <a:schemeClr val="lt1"/>
+          </a:fontRef>
+        </p:style>
+        <p:txBody>
+          <a:bodyPr rtlCol="0" anchor="ctr"/>
+          <a:lstStyle/>
+          <a:p>
+            <a:pPr algn="ctr"/>
+          </a:p>
+        </p:txBody>
+      </p:sp>
+      <p:sp>
+        <p:nvSpPr>
+          <p:cNvPr id="20" name="TextBox 19"/>
+          <p:cNvSpPr txBox="1"/>
+          <p:nvPr/>
+        </p:nvSpPr>
+        <p:spPr>
+          <a:xfrm>
+            <a:off x="1143000" y="5138928"/>
+            <a:ext cx="9966960" cy="457200"/>
+          </a:xfrm>
+          <a:prstGeom prst="rect">
+            <a:avLst/>
+          </a:prstGeom>
+          <a:noFill/>
+        </p:spPr>
+        <p:txBody>
+          <a:bodyPr wrap="square" anchor="t">
+            <a:spAutoFit/>
+          </a:bodyPr>
+          <a:lstStyle/>
+          <a:p>
+            <a:pPr algn="l"/>
+            <a:r>
               <a:rPr sz="1400" b="0">
                 <a:solidFill>
-                  <a:srgbClr val="6B6B6B"/>
+                  <a:srgbClr val="5F6B76"/>
                 </a:solidFill>
                 <a:latin typeface="微软雅黑"/>
                 <a:ea typeface="微软雅黑"/>
@@ -5773,14 +5877,58 @@
       </p:sp>
       <p:sp>
         <p:nvSpPr>
-          <p:cNvPr id="14" name="TextBox 13"/>
+          <p:cNvPr id="21" name="Rectangle 20"/>
+          <p:cNvSpPr/>
+          <p:nvPr/>
+        </p:nvSpPr>
+        <p:spPr>
+          <a:xfrm>
+            <a:off x="914400" y="6327648"/>
+            <a:ext cx="10360152" cy="7315"/>
+          </a:xfrm>
+          <a:prstGeom prst="rect">
+            <a:avLst/>
+          </a:prstGeom>
+          <a:solidFill>
+            <a:srgbClr val="DDE3E8"/>
+          </a:solidFill>
+          <a:ln>
+            <a:noFill/>
+          </a:ln>
+          <a:effectLst/>
+        </p:spPr>
+        <p:style>
+          <a:lnRef idx="1">
+            <a:schemeClr val="accent1"/>
+          </a:lnRef>
+          <a:fillRef idx="3">
+            <a:schemeClr val="accent1"/>
+          </a:fillRef>
+          <a:effectRef idx="2">
+            <a:schemeClr val="accent1"/>
+          </a:effectRef>
+          <a:fontRef idx="minor">
+            <a:schemeClr val="lt1"/>
+          </a:fontRef>
+        </p:style>
+        <p:txBody>
+          <a:bodyPr rtlCol="0" anchor="ctr"/>
+          <a:lstStyle/>
+          <a:p>
+            <a:pPr algn="ctr"/>
+          </a:p>
+        </p:txBody>
+      </p:sp>
+      <p:sp>
+        <p:nvSpPr>
+          <p:cNvPr id="22" name="TextBox 21"/>
           <p:cNvSpPr txBox="1"/>
           <p:nvPr/>
         </p:nvSpPr>
         <p:spPr>
           <a:xfrm>
-            <a:off x="10424160" y="6327648"/>
-            <a:ext cx="850392" cy="320040"/>
+            <a:off x="914400" y="6400800"/>
+            <a:ext cx="4572000" cy="320040"/>
           </a:xfrm>
           <a:prstGeom prst="rect">
             <a:avLst/>
@@ -5793,11 +5941,47 @@
           </a:bodyPr>
           <a:lstStyle/>
           <a:p>
+            <a:pPr algn="l"/>
+            <a:r>
+              <a:rPr sz="950" b="0">
+                <a:solidFill>
+                  <a:srgbClr val="98A2AB"/>
+                </a:solidFill>
+                <a:latin typeface="微软雅黑"/>
+                <a:ea typeface="微软雅黑"/>
+              </a:rPr>
+              <a:t>创造有意义的人生</a:t>
+            </a:r>
+          </a:p>
+        </p:txBody>
+      </p:sp>
+      <p:sp>
+        <p:nvSpPr>
+          <p:cNvPr id="23" name="TextBox 22"/>
+          <p:cNvSpPr txBox="1"/>
+          <p:nvPr/>
+        </p:nvSpPr>
+        <p:spPr>
+          <a:xfrm>
+            <a:off x="10360152" y="6400800"/>
+            <a:ext cx="914400" cy="320040"/>
+          </a:xfrm>
+          <a:prstGeom prst="rect">
+            <a:avLst/>
+          </a:prstGeom>
+          <a:noFill/>
+        </p:spPr>
+        <p:txBody>
+          <a:bodyPr wrap="square" anchor="t">
+            <a:spAutoFit/>
+          </a:bodyPr>
+          <a:lstStyle/>
+          <a:p>
             <a:pPr algn="r"/>
             <a:r>
-              <a:rPr sz="1050" b="0">
-                <a:solidFill>
-                  <a:srgbClr val="9A9A9A"/>
+              <a:rPr sz="1000" b="0">
+                <a:solidFill>
+                  <a:srgbClr val="98A2AB"/>
                 </a:solidFill>
                 <a:latin typeface="微软雅黑"/>
                 <a:ea typeface="微软雅黑"/>
@@ -5834,13 +6018,13 @@
         <p:spPr>
           <a:xfrm>
             <a:off x="0" y="0"/>
-            <a:ext cx="12191695" cy="6858000"/>
+            <a:ext cx="128016" cy="6858000"/>
           </a:xfrm>
           <a:prstGeom prst="rect">
             <a:avLst/>
           </a:prstGeom>
           <a:solidFill>
-            <a:srgbClr val="FFFFFF"/>
+            <a:srgbClr val="2F4858"/>
           </a:solidFill>
           <a:ln>
             <a:noFill/>
@@ -5871,92 +6055,20 @@
       </p:sp>
       <p:sp>
         <p:nvSpPr>
-          <p:cNvPr id="3" name="TextBox 2"/>
-          <p:cNvSpPr txBox="1"/>
-          <p:nvPr/>
-        </p:nvSpPr>
-        <p:spPr>
-          <a:xfrm>
-            <a:off x="914400" y="640080"/>
-            <a:ext cx="10332720" cy="320040"/>
-          </a:xfrm>
-          <a:prstGeom prst="rect">
-            <a:avLst/>
-          </a:prstGeom>
-          <a:noFill/>
-        </p:spPr>
-        <p:txBody>
-          <a:bodyPr wrap="square" anchor="t">
-            <a:spAutoFit/>
-          </a:bodyPr>
-          <a:lstStyle/>
-          <a:p>
-            <a:pPr algn="l"/>
-            <a:r>
-              <a:rPr sz="1150" b="0">
-                <a:solidFill>
-                  <a:srgbClr val="3A5A70"/>
-                </a:solidFill>
-                <a:latin typeface="微软雅黑"/>
-                <a:ea typeface="微软雅黑"/>
-              </a:rPr>
-              <a:t>我的故事</a:t>
-            </a:r>
-          </a:p>
-        </p:txBody>
-      </p:sp>
-      <p:sp>
-        <p:nvSpPr>
-          <p:cNvPr id="4" name="TextBox 3"/>
-          <p:cNvSpPr txBox="1"/>
-          <p:nvPr/>
-        </p:nvSpPr>
-        <p:spPr>
-          <a:xfrm>
-            <a:off x="914400" y="914400"/>
-            <a:ext cx="10332720" cy="685800"/>
-          </a:xfrm>
-          <a:prstGeom prst="rect">
-            <a:avLst/>
-          </a:prstGeom>
-          <a:noFill/>
-        </p:spPr>
-        <p:txBody>
-          <a:bodyPr wrap="square" anchor="t">
-            <a:spAutoFit/>
-          </a:bodyPr>
-          <a:lstStyle/>
-          <a:p>
-            <a:pPr algn="l"/>
-            <a:r>
-              <a:rPr sz="2900" b="0">
-                <a:solidFill>
-                  <a:srgbClr val="1B1B1B"/>
-                </a:solidFill>
-                <a:latin typeface="微软雅黑 Light"/>
-                <a:ea typeface="微软雅黑 Light"/>
-              </a:rPr>
-              <a:t>两次被否定</a:t>
-            </a:r>
-          </a:p>
-        </p:txBody>
-      </p:sp>
-      <p:sp>
-        <p:nvSpPr>
-          <p:cNvPr id="5" name="Rectangle 4"/>
+          <p:cNvPr id="3" name="Rectangle 2"/>
           <p:cNvSpPr/>
           <p:nvPr/>
         </p:nvSpPr>
         <p:spPr>
           <a:xfrm>
-            <a:off x="914400" y="1673352"/>
-            <a:ext cx="10360152" cy="10972"/>
+            <a:off x="914400" y="676656"/>
+            <a:ext cx="118872" cy="118872"/>
           </a:xfrm>
           <a:prstGeom prst="rect">
             <a:avLst/>
           </a:prstGeom>
           <a:solidFill>
-            <a:srgbClr val="D8D8D8"/>
+            <a:srgbClr val="52798A"/>
           </a:solidFill>
           <a:ln>
             <a:noFill/>
@@ -5987,20 +6099,92 @@
       </p:sp>
       <p:sp>
         <p:nvSpPr>
+          <p:cNvPr id="4" name="TextBox 3"/>
+          <p:cNvSpPr txBox="1"/>
+          <p:nvPr/>
+        </p:nvSpPr>
+        <p:spPr>
+          <a:xfrm>
+            <a:off x="1133856" y="621792"/>
+            <a:ext cx="8229600" cy="320040"/>
+          </a:xfrm>
+          <a:prstGeom prst="rect">
+            <a:avLst/>
+          </a:prstGeom>
+          <a:noFill/>
+        </p:spPr>
+        <p:txBody>
+          <a:bodyPr wrap="square" anchor="t">
+            <a:spAutoFit/>
+          </a:bodyPr>
+          <a:lstStyle/>
+          <a:p>
+            <a:pPr algn="l"/>
+            <a:r>
+              <a:rPr sz="1150" b="0">
+                <a:solidFill>
+                  <a:srgbClr val="2F4858"/>
+                </a:solidFill>
+                <a:latin typeface="微软雅黑"/>
+                <a:ea typeface="微软雅黑"/>
+              </a:rPr>
+              <a:t>我的故事</a:t>
+            </a:r>
+          </a:p>
+        </p:txBody>
+      </p:sp>
+      <p:sp>
+        <p:nvSpPr>
+          <p:cNvPr id="5" name="TextBox 4"/>
+          <p:cNvSpPr txBox="1"/>
+          <p:nvPr/>
+        </p:nvSpPr>
+        <p:spPr>
+          <a:xfrm>
+            <a:off x="914400" y="896112"/>
+            <a:ext cx="10360152" cy="685800"/>
+          </a:xfrm>
+          <a:prstGeom prst="rect">
+            <a:avLst/>
+          </a:prstGeom>
+          <a:noFill/>
+        </p:spPr>
+        <p:txBody>
+          <a:bodyPr wrap="square" anchor="t">
+            <a:spAutoFit/>
+          </a:bodyPr>
+          <a:lstStyle/>
+          <a:p>
+            <a:pPr algn="l"/>
+            <a:r>
+              <a:rPr sz="2800" b="0">
+                <a:solidFill>
+                  <a:srgbClr val="1B1B1B"/>
+                </a:solidFill>
+                <a:latin typeface="微软雅黑 Light"/>
+                <a:ea typeface="微软雅黑 Light"/>
+              </a:rPr>
+              <a:t>两次被否定</a:t>
+            </a:r>
+          </a:p>
+        </p:txBody>
+      </p:sp>
+      <p:sp>
+        <p:nvSpPr>
           <p:cNvPr id="6" name="Rectangle 5"/>
           <p:cNvSpPr/>
           <p:nvPr/>
         </p:nvSpPr>
         <p:spPr>
           <a:xfrm>
-            <a:off x="914400" y="2578608"/>
-            <a:ext cx="10972" cy="1170432"/>
+            <a:off x="914400" y="1645920"/>
+            <a:ext cx="10360152" cy="10972"/>
           </a:xfrm>
           <a:prstGeom prst="rect">
             <a:avLst/>
           </a:prstGeom>
           <a:solidFill>
-            <a:srgbClr val="8FA6B4"/>
+            <a:srgbClr val="DDE3E8"/>
           </a:solidFill>
           <a:ln>
             <a:noFill/>
@@ -6031,14 +6215,104 @@
       </p:sp>
       <p:sp>
         <p:nvSpPr>
-          <p:cNvPr id="7" name="TextBox 6"/>
+          <p:cNvPr id="7" name="Rounded Rectangle 6"/>
+          <p:cNvSpPr/>
+          <p:nvPr/>
+        </p:nvSpPr>
+        <p:spPr>
+          <a:xfrm>
+            <a:off x="822960" y="2103120"/>
+            <a:ext cx="10543032" cy="1874519"/>
+          </a:xfrm>
+          <a:prstGeom prst="roundRect">
+            <a:avLst>
+              <a:gd name="adj" fmla="val 6000"/>
+            </a:avLst>
+          </a:prstGeom>
+          <a:solidFill>
+            <a:srgbClr val="EEF2F5"/>
+          </a:solidFill>
+          <a:ln>
+            <a:noFill/>
+          </a:ln>
+          <a:effectLst/>
+        </p:spPr>
+        <p:style>
+          <a:lnRef idx="1">
+            <a:schemeClr val="accent1"/>
+          </a:lnRef>
+          <a:fillRef idx="3">
+            <a:schemeClr val="accent1"/>
+          </a:fillRef>
+          <a:effectRef idx="2">
+            <a:schemeClr val="accent1"/>
+          </a:effectRef>
+          <a:fontRef idx="minor">
+            <a:schemeClr val="lt1"/>
+          </a:fontRef>
+        </p:style>
+        <p:txBody>
+          <a:bodyPr rtlCol="0" anchor="ctr"/>
+          <a:lstStyle/>
+          <a:p>
+            <a:pPr algn="ctr"/>
+          </a:p>
+        </p:txBody>
+      </p:sp>
+      <p:sp>
+        <p:nvSpPr>
+          <p:cNvPr id="8" name="Rectangle 7"/>
+          <p:cNvSpPr/>
+          <p:nvPr/>
+        </p:nvSpPr>
+        <p:spPr>
+          <a:xfrm>
+            <a:off x="822960" y="2103120"/>
+            <a:ext cx="64008" cy="1874519"/>
+          </a:xfrm>
+          <a:prstGeom prst="rect">
+            <a:avLst/>
+          </a:prstGeom>
+          <a:solidFill>
+            <a:srgbClr val="52798A"/>
+          </a:solidFill>
+          <a:ln>
+            <a:noFill/>
+          </a:ln>
+          <a:effectLst/>
+        </p:spPr>
+        <p:style>
+          <a:lnRef idx="1">
+            <a:schemeClr val="accent1"/>
+          </a:lnRef>
+          <a:fillRef idx="3">
+            <a:schemeClr val="accent1"/>
+          </a:fillRef>
+          <a:effectRef idx="2">
+            <a:schemeClr val="accent1"/>
+          </a:effectRef>
+          <a:fontRef idx="minor">
+            <a:schemeClr val="lt1"/>
+          </a:fontRef>
+        </p:style>
+        <p:txBody>
+          <a:bodyPr rtlCol="0" anchor="ctr"/>
+          <a:lstStyle/>
+          <a:p>
+            <a:pPr algn="ctr"/>
+          </a:p>
+        </p:txBody>
+      </p:sp>
+      <p:sp>
+        <p:nvSpPr>
+          <p:cNvPr id="9" name="TextBox 8"/>
           <p:cNvSpPr txBox="1"/>
           <p:nvPr/>
         </p:nvSpPr>
         <p:spPr>
           <a:xfrm>
-            <a:off x="1207008" y="2505456"/>
-            <a:ext cx="9601200" cy="1371600"/>
+            <a:off x="1234440" y="2331720"/>
+            <a:ext cx="9692640" cy="1463040"/>
           </a:xfrm>
           <a:prstGeom prst="rect">
             <a:avLst/>
@@ -6057,7 +6331,7 @@
               </a:spcAft>
             </a:pPr>
             <a:r>
-              <a:rPr sz="2500" b="0">
+              <a:rPr sz="2400" b="0">
                 <a:solidFill>
                   <a:srgbClr val="1B1B1B"/>
                 </a:solidFill>
@@ -6070,7 +6344,7 @@
           <a:p>
             <a:pPr algn="l"/>
             <a:r>
-              <a:rPr sz="2500" b="0">
+              <a:rPr sz="2400" b="0">
                 <a:solidFill>
                   <a:srgbClr val="1B1B1B"/>
                 </a:solidFill>
@@ -6084,20 +6358,20 @@
       </p:sp>
       <p:sp>
         <p:nvSpPr>
-          <p:cNvPr id="8" name="Rectangle 7"/>
+          <p:cNvPr id="10" name="Rectangle 9"/>
           <p:cNvSpPr/>
           <p:nvPr/>
         </p:nvSpPr>
         <p:spPr>
           <a:xfrm>
-            <a:off x="914400" y="4343400"/>
+            <a:off x="914400" y="4224528"/>
             <a:ext cx="10360152" cy="10972"/>
           </a:xfrm>
           <a:prstGeom prst="rect">
             <a:avLst/>
           </a:prstGeom>
           <a:solidFill>
-            <a:srgbClr val="D8D8D8"/>
+            <a:srgbClr val="DDE3E8"/>
           </a:solidFill>
           <a:ln>
             <a:noFill/>
@@ -6128,14 +6402,14 @@
       </p:sp>
       <p:sp>
         <p:nvSpPr>
-          <p:cNvPr id="9" name="TextBox 8"/>
+          <p:cNvPr id="11" name="TextBox 10"/>
           <p:cNvSpPr txBox="1"/>
           <p:nvPr/>
         </p:nvSpPr>
         <p:spPr>
           <a:xfrm>
-            <a:off x="914400" y="4572000"/>
-            <a:ext cx="10332720" cy="1280160"/>
+            <a:off x="914400" y="4434840"/>
+            <a:ext cx="10360152" cy="1280160"/>
           </a:xfrm>
           <a:prstGeom prst="rect">
             <a:avLst/>
@@ -6154,9 +6428,9 @@
               </a:lnSpc>
             </a:pPr>
             <a:r>
-              <a:rPr sz="1800" b="0">
-                <a:solidFill>
-                  <a:srgbClr val="6B6B6B"/>
+              <a:rPr sz="1700" b="0">
+                <a:solidFill>
+                  <a:srgbClr val="5F6B76"/>
                 </a:solidFill>
                 <a:latin typeface="微软雅黑"/>
                 <a:ea typeface="微软雅黑"/>
@@ -6173,7 +6447,7 @@
             <a:r>
               <a:rPr sz="2000" b="0">
                 <a:solidFill>
-                  <a:srgbClr val="3A5A70"/>
+                  <a:srgbClr val="2F4858"/>
                 </a:solidFill>
                 <a:latin typeface="微软雅黑 Light"/>
                 <a:ea typeface="微软雅黑 Light"/>
@@ -6185,14 +6459,58 @@
       </p:sp>
       <p:sp>
         <p:nvSpPr>
-          <p:cNvPr id="10" name="TextBox 9"/>
+          <p:cNvPr id="12" name="Rectangle 11"/>
+          <p:cNvSpPr/>
+          <p:nvPr/>
+        </p:nvSpPr>
+        <p:spPr>
+          <a:xfrm>
+            <a:off x="914400" y="6327648"/>
+            <a:ext cx="10360152" cy="7315"/>
+          </a:xfrm>
+          <a:prstGeom prst="rect">
+            <a:avLst/>
+          </a:prstGeom>
+          <a:solidFill>
+            <a:srgbClr val="DDE3E8"/>
+          </a:solidFill>
+          <a:ln>
+            <a:noFill/>
+          </a:ln>
+          <a:effectLst/>
+        </p:spPr>
+        <p:style>
+          <a:lnRef idx="1">
+            <a:schemeClr val="accent1"/>
+          </a:lnRef>
+          <a:fillRef idx="3">
+            <a:schemeClr val="accent1"/>
+          </a:fillRef>
+          <a:effectRef idx="2">
+            <a:schemeClr val="accent1"/>
+          </a:effectRef>
+          <a:fontRef idx="minor">
+            <a:schemeClr val="lt1"/>
+          </a:fontRef>
+        </p:style>
+        <p:txBody>
+          <a:bodyPr rtlCol="0" anchor="ctr"/>
+          <a:lstStyle/>
+          <a:p>
+            <a:pPr algn="ctr"/>
+          </a:p>
+        </p:txBody>
+      </p:sp>
+      <p:sp>
+        <p:nvSpPr>
+          <p:cNvPr id="13" name="TextBox 12"/>
           <p:cNvSpPr txBox="1"/>
           <p:nvPr/>
         </p:nvSpPr>
         <p:spPr>
           <a:xfrm>
-            <a:off x="10424160" y="6327648"/>
-            <a:ext cx="850392" cy="320040"/>
+            <a:off x="914400" y="6400800"/>
+            <a:ext cx="4572000" cy="320040"/>
           </a:xfrm>
           <a:prstGeom prst="rect">
             <a:avLst/>
@@ -6205,11 +6523,47 @@
           </a:bodyPr>
           <a:lstStyle/>
           <a:p>
+            <a:pPr algn="l"/>
+            <a:r>
+              <a:rPr sz="950" b="0">
+                <a:solidFill>
+                  <a:srgbClr val="98A2AB"/>
+                </a:solidFill>
+                <a:latin typeface="微软雅黑"/>
+                <a:ea typeface="微软雅黑"/>
+              </a:rPr>
+              <a:t>创造有意义的人生</a:t>
+            </a:r>
+          </a:p>
+        </p:txBody>
+      </p:sp>
+      <p:sp>
+        <p:nvSpPr>
+          <p:cNvPr id="14" name="TextBox 13"/>
+          <p:cNvSpPr txBox="1"/>
+          <p:nvPr/>
+        </p:nvSpPr>
+        <p:spPr>
+          <a:xfrm>
+            <a:off x="10360152" y="6400800"/>
+            <a:ext cx="914400" cy="320040"/>
+          </a:xfrm>
+          <a:prstGeom prst="rect">
+            <a:avLst/>
+          </a:prstGeom>
+          <a:noFill/>
+        </p:spPr>
+        <p:txBody>
+          <a:bodyPr wrap="square" anchor="t">
+            <a:spAutoFit/>
+          </a:bodyPr>
+          <a:lstStyle/>
+          <a:p>
             <a:pPr algn="r"/>
             <a:r>
-              <a:rPr sz="1050" b="0">
-                <a:solidFill>
-                  <a:srgbClr val="9A9A9A"/>
+              <a:rPr sz="1000" b="0">
+                <a:solidFill>
+                  <a:srgbClr val="98A2AB"/>
                 </a:solidFill>
                 <a:latin typeface="微软雅黑"/>
                 <a:ea typeface="微软雅黑"/>
@@ -6246,13 +6600,13 @@
         <p:spPr>
           <a:xfrm>
             <a:off x="0" y="0"/>
-            <a:ext cx="12191695" cy="6858000"/>
+            <a:ext cx="128016" cy="6858000"/>
           </a:xfrm>
           <a:prstGeom prst="rect">
             <a:avLst/>
           </a:prstGeom>
           <a:solidFill>
-            <a:srgbClr val="FFFFFF"/>
+            <a:srgbClr val="2F4858"/>
           </a:solidFill>
           <a:ln>
             <a:noFill/>
@@ -6283,92 +6637,20 @@
       </p:sp>
       <p:sp>
         <p:nvSpPr>
-          <p:cNvPr id="3" name="TextBox 2"/>
-          <p:cNvSpPr txBox="1"/>
-          <p:nvPr/>
-        </p:nvSpPr>
-        <p:spPr>
-          <a:xfrm>
-            <a:off x="914400" y="640080"/>
-            <a:ext cx="10332720" cy="320040"/>
-          </a:xfrm>
-          <a:prstGeom prst="rect">
-            <a:avLst/>
-          </a:prstGeom>
-          <a:noFill/>
-        </p:spPr>
-        <p:txBody>
-          <a:bodyPr wrap="square" anchor="t">
-            <a:spAutoFit/>
-          </a:bodyPr>
-          <a:lstStyle/>
-          <a:p>
-            <a:pPr algn="l"/>
-            <a:r>
-              <a:rPr sz="1150" b="0">
-                <a:solidFill>
-                  <a:srgbClr val="3A5A70"/>
-                </a:solidFill>
-                <a:latin typeface="微软雅黑"/>
-                <a:ea typeface="微软雅黑"/>
-              </a:rPr>
-              <a:t>共鸣</a:t>
-            </a:r>
-          </a:p>
-        </p:txBody>
-      </p:sp>
-      <p:sp>
-        <p:nvSpPr>
-          <p:cNvPr id="4" name="TextBox 3"/>
-          <p:cNvSpPr txBox="1"/>
-          <p:nvPr/>
-        </p:nvSpPr>
-        <p:spPr>
-          <a:xfrm>
-            <a:off x="914400" y="914400"/>
-            <a:ext cx="10332720" cy="685800"/>
-          </a:xfrm>
-          <a:prstGeom prst="rect">
-            <a:avLst/>
-          </a:prstGeom>
-          <a:noFill/>
-        </p:spPr>
-        <p:txBody>
-          <a:bodyPr wrap="square" anchor="t">
-            <a:spAutoFit/>
-          </a:bodyPr>
-          <a:lstStyle/>
-          <a:p>
-            <a:pPr algn="l"/>
-            <a:r>
-              <a:rPr sz="2900" b="0">
-                <a:solidFill>
-                  <a:srgbClr val="1B1B1B"/>
-                </a:solidFill>
-                <a:latin typeface="微软雅黑 Light"/>
-                <a:ea typeface="微软雅黑 Light"/>
-              </a:rPr>
-              <a:t>其实，不止我一个</a:t>
-            </a:r>
-          </a:p>
-        </p:txBody>
-      </p:sp>
-      <p:sp>
-        <p:nvSpPr>
-          <p:cNvPr id="5" name="Rectangle 4"/>
+          <p:cNvPr id="3" name="Rectangle 2"/>
           <p:cNvSpPr/>
           <p:nvPr/>
         </p:nvSpPr>
         <p:spPr>
           <a:xfrm>
-            <a:off x="914400" y="1673352"/>
-            <a:ext cx="10360152" cy="10972"/>
+            <a:off x="914400" y="676656"/>
+            <a:ext cx="118872" cy="118872"/>
           </a:xfrm>
           <a:prstGeom prst="rect">
             <a:avLst/>
           </a:prstGeom>
           <a:solidFill>
-            <a:srgbClr val="D8D8D8"/>
+            <a:srgbClr val="52798A"/>
           </a:solidFill>
           <a:ln>
             <a:noFill/>
@@ -6399,14 +6681,14 @@
       </p:sp>
       <p:sp>
         <p:nvSpPr>
-          <p:cNvPr id="6" name="TextBox 5"/>
+          <p:cNvPr id="4" name="TextBox 3"/>
           <p:cNvSpPr txBox="1"/>
           <p:nvPr/>
         </p:nvSpPr>
         <p:spPr>
           <a:xfrm>
-            <a:off x="914400" y="2999232"/>
-            <a:ext cx="10332720" cy="914400"/>
+            <a:off x="1133856" y="621792"/>
+            <a:ext cx="8229600" cy="320040"/>
           </a:xfrm>
           <a:prstGeom prst="rect">
             <a:avLst/>
@@ -6421,34 +6703,70 @@
           <a:p>
             <a:pPr algn="l"/>
             <a:r>
-              <a:rPr sz="2700" b="0">
+              <a:rPr sz="1150" b="0">
+                <a:solidFill>
+                  <a:srgbClr val="2F4858"/>
+                </a:solidFill>
+                <a:latin typeface="微软雅黑"/>
+                <a:ea typeface="微软雅黑"/>
+              </a:rPr>
+              <a:t>共鸣</a:t>
+            </a:r>
+          </a:p>
+        </p:txBody>
+      </p:sp>
+      <p:sp>
+        <p:nvSpPr>
+          <p:cNvPr id="5" name="TextBox 4"/>
+          <p:cNvSpPr txBox="1"/>
+          <p:nvPr/>
+        </p:nvSpPr>
+        <p:spPr>
+          <a:xfrm>
+            <a:off x="914400" y="896112"/>
+            <a:ext cx="10360152" cy="685800"/>
+          </a:xfrm>
+          <a:prstGeom prst="rect">
+            <a:avLst/>
+          </a:prstGeom>
+          <a:noFill/>
+        </p:spPr>
+        <p:txBody>
+          <a:bodyPr wrap="square" anchor="t">
+            <a:spAutoFit/>
+          </a:bodyPr>
+          <a:lstStyle/>
+          <a:p>
+            <a:pPr algn="l"/>
+            <a:r>
+              <a:rPr sz="2800" b="0">
                 <a:solidFill>
                   <a:srgbClr val="1B1B1B"/>
                 </a:solidFill>
                 <a:latin typeface="微软雅黑 Light"/>
                 <a:ea typeface="微软雅黑 Light"/>
               </a:rPr>
-              <a:t>容貌焦虑　·　身材焦虑　·　能力焦虑</a:t>
-            </a:r>
-          </a:p>
-        </p:txBody>
-      </p:sp>
-      <p:sp>
-        <p:nvSpPr>
-          <p:cNvPr id="7" name="Rectangle 6"/>
+              <a:t>其实，不止我一个</a:t>
+            </a:r>
+          </a:p>
+        </p:txBody>
+      </p:sp>
+      <p:sp>
+        <p:nvSpPr>
+          <p:cNvPr id="6" name="Rectangle 5"/>
           <p:cNvSpPr/>
           <p:nvPr/>
         </p:nvSpPr>
         <p:spPr>
           <a:xfrm>
-            <a:off x="914400" y="4389120"/>
+            <a:off x="914400" y="1645920"/>
             <a:ext cx="10360152" cy="10972"/>
           </a:xfrm>
           <a:prstGeom prst="rect">
             <a:avLst/>
           </a:prstGeom>
           <a:solidFill>
-            <a:srgbClr val="D8D8D8"/>
+            <a:srgbClr val="DDE3E8"/>
           </a:solidFill>
           <a:ln>
             <a:noFill/>
@@ -6479,14 +6797,304 @@
       </p:sp>
       <p:sp>
         <p:nvSpPr>
+          <p:cNvPr id="7" name="Rounded Rectangle 6"/>
+          <p:cNvSpPr/>
+          <p:nvPr/>
+        </p:nvSpPr>
+        <p:spPr>
+          <a:xfrm>
+            <a:off x="914400" y="2788920"/>
+            <a:ext cx="3246120" cy="914400"/>
+          </a:xfrm>
+          <a:prstGeom prst="roundRect">
+            <a:avLst>
+              <a:gd name="adj" fmla="val 16000"/>
+            </a:avLst>
+          </a:prstGeom>
+          <a:solidFill>
+            <a:srgbClr val="52798A"/>
+          </a:solidFill>
+          <a:ln>
+            <a:noFill/>
+          </a:ln>
+          <a:effectLst/>
+        </p:spPr>
+        <p:style>
+          <a:lnRef idx="1">
+            <a:schemeClr val="accent1"/>
+          </a:lnRef>
+          <a:fillRef idx="3">
+            <a:schemeClr val="accent1"/>
+          </a:fillRef>
+          <a:effectRef idx="2">
+            <a:schemeClr val="accent1"/>
+          </a:effectRef>
+          <a:fontRef idx="minor">
+            <a:schemeClr val="lt1"/>
+          </a:fontRef>
+        </p:style>
+        <p:txBody>
+          <a:bodyPr rtlCol="0" anchor="ctr"/>
+          <a:lstStyle/>
+          <a:p>
+            <a:pPr algn="ctr"/>
+          </a:p>
+        </p:txBody>
+      </p:sp>
+      <p:sp>
+        <p:nvSpPr>
           <p:cNvPr id="8" name="TextBox 7"/>
           <p:cNvSpPr txBox="1"/>
           <p:nvPr/>
         </p:nvSpPr>
         <p:spPr>
           <a:xfrm>
-            <a:off x="914400" y="4617720"/>
-            <a:ext cx="10332720" cy="548640"/>
+            <a:off x="914400" y="2788920"/>
+            <a:ext cx="3246120" cy="914400"/>
+          </a:xfrm>
+          <a:prstGeom prst="rect">
+            <a:avLst/>
+          </a:prstGeom>
+          <a:noFill/>
+        </p:spPr>
+        <p:txBody>
+          <a:bodyPr wrap="square" anchor="ctr">
+            <a:spAutoFit/>
+          </a:bodyPr>
+          <a:lstStyle/>
+          <a:p>
+            <a:pPr algn="ctr"/>
+            <a:r>
+              <a:rPr sz="2000" b="0">
+                <a:solidFill>
+                  <a:srgbClr val="FFFFFF"/>
+                </a:solidFill>
+                <a:latin typeface="微软雅黑"/>
+                <a:ea typeface="微软雅黑"/>
+              </a:rPr>
+              <a:t>容貌焦虑</a:t>
+            </a:r>
+          </a:p>
+        </p:txBody>
+      </p:sp>
+      <p:sp>
+        <p:nvSpPr>
+          <p:cNvPr id="9" name="Rounded Rectangle 8"/>
+          <p:cNvSpPr/>
+          <p:nvPr/>
+        </p:nvSpPr>
+        <p:spPr>
+          <a:xfrm>
+            <a:off x="4471416" y="2788920"/>
+            <a:ext cx="3246120" cy="914400"/>
+          </a:xfrm>
+          <a:prstGeom prst="roundRect">
+            <a:avLst>
+              <a:gd name="adj" fmla="val 16000"/>
+            </a:avLst>
+          </a:prstGeom>
+          <a:solidFill>
+            <a:srgbClr val="52798A"/>
+          </a:solidFill>
+          <a:ln>
+            <a:noFill/>
+          </a:ln>
+          <a:effectLst/>
+        </p:spPr>
+        <p:style>
+          <a:lnRef idx="1">
+            <a:schemeClr val="accent1"/>
+          </a:lnRef>
+          <a:fillRef idx="3">
+            <a:schemeClr val="accent1"/>
+          </a:fillRef>
+          <a:effectRef idx="2">
+            <a:schemeClr val="accent1"/>
+          </a:effectRef>
+          <a:fontRef idx="minor">
+            <a:schemeClr val="lt1"/>
+          </a:fontRef>
+        </p:style>
+        <p:txBody>
+          <a:bodyPr rtlCol="0" anchor="ctr"/>
+          <a:lstStyle/>
+          <a:p>
+            <a:pPr algn="ctr"/>
+          </a:p>
+        </p:txBody>
+      </p:sp>
+      <p:sp>
+        <p:nvSpPr>
+          <p:cNvPr id="10" name="TextBox 9"/>
+          <p:cNvSpPr txBox="1"/>
+          <p:nvPr/>
+        </p:nvSpPr>
+        <p:spPr>
+          <a:xfrm>
+            <a:off x="4471416" y="2788920"/>
+            <a:ext cx="3246120" cy="914400"/>
+          </a:xfrm>
+          <a:prstGeom prst="rect">
+            <a:avLst/>
+          </a:prstGeom>
+          <a:noFill/>
+        </p:spPr>
+        <p:txBody>
+          <a:bodyPr wrap="square" anchor="ctr">
+            <a:spAutoFit/>
+          </a:bodyPr>
+          <a:lstStyle/>
+          <a:p>
+            <a:pPr algn="ctr"/>
+            <a:r>
+              <a:rPr sz="2000" b="0">
+                <a:solidFill>
+                  <a:srgbClr val="FFFFFF"/>
+                </a:solidFill>
+                <a:latin typeface="微软雅黑"/>
+                <a:ea typeface="微软雅黑"/>
+              </a:rPr>
+              <a:t>身材焦虑</a:t>
+            </a:r>
+          </a:p>
+        </p:txBody>
+      </p:sp>
+      <p:sp>
+        <p:nvSpPr>
+          <p:cNvPr id="11" name="Rounded Rectangle 10"/>
+          <p:cNvSpPr/>
+          <p:nvPr/>
+        </p:nvSpPr>
+        <p:spPr>
+          <a:xfrm>
+            <a:off x="8028431" y="2788920"/>
+            <a:ext cx="3246120" cy="914400"/>
+          </a:xfrm>
+          <a:prstGeom prst="roundRect">
+            <a:avLst>
+              <a:gd name="adj" fmla="val 16000"/>
+            </a:avLst>
+          </a:prstGeom>
+          <a:solidFill>
+            <a:srgbClr val="52798A"/>
+          </a:solidFill>
+          <a:ln>
+            <a:noFill/>
+          </a:ln>
+          <a:effectLst/>
+        </p:spPr>
+        <p:style>
+          <a:lnRef idx="1">
+            <a:schemeClr val="accent1"/>
+          </a:lnRef>
+          <a:fillRef idx="3">
+            <a:schemeClr val="accent1"/>
+          </a:fillRef>
+          <a:effectRef idx="2">
+            <a:schemeClr val="accent1"/>
+          </a:effectRef>
+          <a:fontRef idx="minor">
+            <a:schemeClr val="lt1"/>
+          </a:fontRef>
+        </p:style>
+        <p:txBody>
+          <a:bodyPr rtlCol="0" anchor="ctr"/>
+          <a:lstStyle/>
+          <a:p>
+            <a:pPr algn="ctr"/>
+          </a:p>
+        </p:txBody>
+      </p:sp>
+      <p:sp>
+        <p:nvSpPr>
+          <p:cNvPr id="12" name="TextBox 11"/>
+          <p:cNvSpPr txBox="1"/>
+          <p:nvPr/>
+        </p:nvSpPr>
+        <p:spPr>
+          <a:xfrm>
+            <a:off x="8028431" y="2788920"/>
+            <a:ext cx="3246120" cy="914400"/>
+          </a:xfrm>
+          <a:prstGeom prst="rect">
+            <a:avLst/>
+          </a:prstGeom>
+          <a:noFill/>
+        </p:spPr>
+        <p:txBody>
+          <a:bodyPr wrap="square" anchor="ctr">
+            <a:spAutoFit/>
+          </a:bodyPr>
+          <a:lstStyle/>
+          <a:p>
+            <a:pPr algn="ctr"/>
+            <a:r>
+              <a:rPr sz="2000" b="0">
+                <a:solidFill>
+                  <a:srgbClr val="FFFFFF"/>
+                </a:solidFill>
+                <a:latin typeface="微软雅黑"/>
+                <a:ea typeface="微软雅黑"/>
+              </a:rPr>
+              <a:t>能力焦虑</a:t>
+            </a:r>
+          </a:p>
+        </p:txBody>
+      </p:sp>
+      <p:sp>
+        <p:nvSpPr>
+          <p:cNvPr id="13" name="Rectangle 12"/>
+          <p:cNvSpPr/>
+          <p:nvPr/>
+        </p:nvSpPr>
+        <p:spPr>
+          <a:xfrm>
+            <a:off x="914400" y="4434840"/>
+            <a:ext cx="10360152" cy="10972"/>
+          </a:xfrm>
+          <a:prstGeom prst="rect">
+            <a:avLst/>
+          </a:prstGeom>
+          <a:solidFill>
+            <a:srgbClr val="DDE3E8"/>
+          </a:solidFill>
+          <a:ln>
+            <a:noFill/>
+          </a:ln>
+          <a:effectLst/>
+        </p:spPr>
+        <p:style>
+          <a:lnRef idx="1">
+            <a:schemeClr val="accent1"/>
+          </a:lnRef>
+          <a:fillRef idx="3">
+            <a:schemeClr val="accent1"/>
+          </a:fillRef>
+          <a:effectRef idx="2">
+            <a:schemeClr val="accent1"/>
+          </a:effectRef>
+          <a:fontRef idx="minor">
+            <a:schemeClr val="lt1"/>
+          </a:fontRef>
+        </p:style>
+        <p:txBody>
+          <a:bodyPr rtlCol="0" anchor="ctr"/>
+          <a:lstStyle/>
+          <a:p>
+            <a:pPr algn="ctr"/>
+          </a:p>
+        </p:txBody>
+      </p:sp>
+      <p:sp>
+        <p:nvSpPr>
+          <p:cNvPr id="14" name="TextBox 13"/>
+          <p:cNvSpPr txBox="1"/>
+          <p:nvPr/>
+        </p:nvSpPr>
+        <p:spPr>
+          <a:xfrm>
+            <a:off x="914400" y="4663440"/>
+            <a:ext cx="10360152" cy="548640"/>
           </a:xfrm>
           <a:prstGeom prst="rect">
             <a:avLst/>
@@ -6503,7 +7111,7 @@
             <a:r>
               <a:rPr sz="1800" b="0">
                 <a:solidFill>
-                  <a:srgbClr val="6B6B6B"/>
+                  <a:srgbClr val="5F6B76"/>
                 </a:solidFill>
                 <a:latin typeface="微软雅黑"/>
                 <a:ea typeface="微软雅黑"/>
@@ -6515,14 +7123,58 @@
       </p:sp>
       <p:sp>
         <p:nvSpPr>
-          <p:cNvPr id="9" name="TextBox 8"/>
+          <p:cNvPr id="15" name="Rectangle 14"/>
+          <p:cNvSpPr/>
+          <p:nvPr/>
+        </p:nvSpPr>
+        <p:spPr>
+          <a:xfrm>
+            <a:off x="914400" y="6327648"/>
+            <a:ext cx="10360152" cy="7315"/>
+          </a:xfrm>
+          <a:prstGeom prst="rect">
+            <a:avLst/>
+          </a:prstGeom>
+          <a:solidFill>
+            <a:srgbClr val="DDE3E8"/>
+          </a:solidFill>
+          <a:ln>
+            <a:noFill/>
+          </a:ln>
+          <a:effectLst/>
+        </p:spPr>
+        <p:style>
+          <a:lnRef idx="1">
+            <a:schemeClr val="accent1"/>
+          </a:lnRef>
+          <a:fillRef idx="3">
+            <a:schemeClr val="accent1"/>
+          </a:fillRef>
+          <a:effectRef idx="2">
+            <a:schemeClr val="accent1"/>
+          </a:effectRef>
+          <a:fontRef idx="minor">
+            <a:schemeClr val="lt1"/>
+          </a:fontRef>
+        </p:style>
+        <p:txBody>
+          <a:bodyPr rtlCol="0" anchor="ctr"/>
+          <a:lstStyle/>
+          <a:p>
+            <a:pPr algn="ctr"/>
+          </a:p>
+        </p:txBody>
+      </p:sp>
+      <p:sp>
+        <p:nvSpPr>
+          <p:cNvPr id="16" name="TextBox 15"/>
           <p:cNvSpPr txBox="1"/>
           <p:nvPr/>
         </p:nvSpPr>
         <p:spPr>
           <a:xfrm>
-            <a:off x="10424160" y="6327648"/>
-            <a:ext cx="850392" cy="320040"/>
+            <a:off x="914400" y="6400800"/>
+            <a:ext cx="4572000" cy="320040"/>
           </a:xfrm>
           <a:prstGeom prst="rect">
             <a:avLst/>
@@ -6535,11 +7187,47 @@
           </a:bodyPr>
           <a:lstStyle/>
           <a:p>
+            <a:pPr algn="l"/>
+            <a:r>
+              <a:rPr sz="950" b="0">
+                <a:solidFill>
+                  <a:srgbClr val="98A2AB"/>
+                </a:solidFill>
+                <a:latin typeface="微软雅黑"/>
+                <a:ea typeface="微软雅黑"/>
+              </a:rPr>
+              <a:t>创造有意义的人生</a:t>
+            </a:r>
+          </a:p>
+        </p:txBody>
+      </p:sp>
+      <p:sp>
+        <p:nvSpPr>
+          <p:cNvPr id="17" name="TextBox 16"/>
+          <p:cNvSpPr txBox="1"/>
+          <p:nvPr/>
+        </p:nvSpPr>
+        <p:spPr>
+          <a:xfrm>
+            <a:off x="10360152" y="6400800"/>
+            <a:ext cx="914400" cy="320040"/>
+          </a:xfrm>
+          <a:prstGeom prst="rect">
+            <a:avLst/>
+          </a:prstGeom>
+          <a:noFill/>
+        </p:spPr>
+        <p:txBody>
+          <a:bodyPr wrap="square" anchor="t">
+            <a:spAutoFit/>
+          </a:bodyPr>
+          <a:lstStyle/>
+          <a:p>
             <a:pPr algn="r"/>
             <a:r>
-              <a:rPr sz="1050" b="0">
-                <a:solidFill>
-                  <a:srgbClr val="9A9A9A"/>
+              <a:rPr sz="1000" b="0">
+                <a:solidFill>
+                  <a:srgbClr val="98A2AB"/>
                 </a:solidFill>
                 <a:latin typeface="微软雅黑"/>
                 <a:ea typeface="微软雅黑"/>
@@ -6576,13 +7264,13 @@
         <p:spPr>
           <a:xfrm>
             <a:off x="0" y="0"/>
-            <a:ext cx="12191695" cy="6858000"/>
+            <a:ext cx="128016" cy="6858000"/>
           </a:xfrm>
           <a:prstGeom prst="rect">
             <a:avLst/>
           </a:prstGeom>
           <a:solidFill>
-            <a:srgbClr val="FFFFFF"/>
+            <a:srgbClr val="2F4858"/>
           </a:solidFill>
           <a:ln>
             <a:noFill/>
@@ -6613,92 +7301,20 @@
       </p:sp>
       <p:sp>
         <p:nvSpPr>
-          <p:cNvPr id="3" name="TextBox 2"/>
-          <p:cNvSpPr txBox="1"/>
-          <p:nvPr/>
-        </p:nvSpPr>
-        <p:spPr>
-          <a:xfrm>
-            <a:off x="914400" y="640080"/>
-            <a:ext cx="10332720" cy="320040"/>
-          </a:xfrm>
-          <a:prstGeom prst="rect">
-            <a:avLst/>
-          </a:prstGeom>
-          <a:noFill/>
-        </p:spPr>
-        <p:txBody>
-          <a:bodyPr wrap="square" anchor="t">
-            <a:spAutoFit/>
-          </a:bodyPr>
-          <a:lstStyle/>
-          <a:p>
-            <a:pPr algn="l"/>
-            <a:r>
-              <a:rPr sz="1150" b="0">
-                <a:solidFill>
-                  <a:srgbClr val="3A5A70"/>
-                </a:solidFill>
-                <a:latin typeface="微软雅黑"/>
-                <a:ea typeface="微软雅黑"/>
-              </a:rPr>
-              <a:t>知识点一</a:t>
-            </a:r>
-          </a:p>
-        </p:txBody>
-      </p:sp>
-      <p:sp>
-        <p:nvSpPr>
-          <p:cNvPr id="4" name="TextBox 3"/>
-          <p:cNvSpPr txBox="1"/>
-          <p:nvPr/>
-        </p:nvSpPr>
-        <p:spPr>
-          <a:xfrm>
-            <a:off x="914400" y="914400"/>
-            <a:ext cx="10332720" cy="685800"/>
-          </a:xfrm>
-          <a:prstGeom prst="rect">
-            <a:avLst/>
-          </a:prstGeom>
-          <a:noFill/>
-        </p:spPr>
-        <p:txBody>
-          <a:bodyPr wrap="square" anchor="t">
-            <a:spAutoFit/>
-          </a:bodyPr>
-          <a:lstStyle/>
-          <a:p>
-            <a:pPr algn="l"/>
-            <a:r>
-              <a:rPr sz="2900" b="0">
-                <a:solidFill>
-                  <a:srgbClr val="1B1B1B"/>
-                </a:solidFill>
-                <a:latin typeface="微软雅黑 Light"/>
-                <a:ea typeface="微软雅黑 Light"/>
-              </a:rPr>
-              <a:t>辩证看待人生矛盾</a:t>
-            </a:r>
-          </a:p>
-        </p:txBody>
-      </p:sp>
-      <p:sp>
-        <p:nvSpPr>
-          <p:cNvPr id="5" name="Rectangle 4"/>
+          <p:cNvPr id="3" name="Rectangle 2"/>
           <p:cNvSpPr/>
           <p:nvPr/>
         </p:nvSpPr>
         <p:spPr>
           <a:xfrm>
-            <a:off x="914400" y="1673352"/>
-            <a:ext cx="10360152" cy="10972"/>
+            <a:off x="914400" y="676656"/>
+            <a:ext cx="118872" cy="118872"/>
           </a:xfrm>
           <a:prstGeom prst="rect">
             <a:avLst/>
           </a:prstGeom>
           <a:solidFill>
-            <a:srgbClr val="D8D8D8"/>
+            <a:srgbClr val="52798A"/>
           </a:solidFill>
           <a:ln>
             <a:noFill/>
@@ -6729,14 +7345,14 @@
       </p:sp>
       <p:sp>
         <p:nvSpPr>
-          <p:cNvPr id="6" name="TextBox 5"/>
+          <p:cNvPr id="4" name="TextBox 3"/>
           <p:cNvSpPr txBox="1"/>
           <p:nvPr/>
         </p:nvSpPr>
         <p:spPr>
           <a:xfrm>
-            <a:off x="914400" y="2240280"/>
-            <a:ext cx="10332720" cy="640080"/>
+            <a:off x="1133856" y="621792"/>
+            <a:ext cx="8229600" cy="320040"/>
           </a:xfrm>
           <a:prstGeom prst="rect">
             <a:avLst/>
@@ -6751,106 +7367,70 @@
           <a:p>
             <a:pPr algn="l"/>
             <a:r>
-              <a:rPr sz="2200" b="0">
-                <a:solidFill>
-                  <a:srgbClr val="3A5A70"/>
+              <a:rPr sz="1150" b="0">
+                <a:solidFill>
+                  <a:srgbClr val="2F4858"/>
+                </a:solidFill>
+                <a:latin typeface="微软雅黑"/>
+                <a:ea typeface="微软雅黑"/>
+              </a:rPr>
+              <a:t>知识点一</a:t>
+            </a:r>
+          </a:p>
+        </p:txBody>
+      </p:sp>
+      <p:sp>
+        <p:nvSpPr>
+          <p:cNvPr id="5" name="TextBox 4"/>
+          <p:cNvSpPr txBox="1"/>
+          <p:nvPr/>
+        </p:nvSpPr>
+        <p:spPr>
+          <a:xfrm>
+            <a:off x="914400" y="896112"/>
+            <a:ext cx="10360152" cy="685800"/>
+          </a:xfrm>
+          <a:prstGeom prst="rect">
+            <a:avLst/>
+          </a:prstGeom>
+          <a:noFill/>
+        </p:spPr>
+        <p:txBody>
+          <a:bodyPr wrap="square" anchor="t">
+            <a:spAutoFit/>
+          </a:bodyPr>
+          <a:lstStyle/>
+          <a:p>
+            <a:pPr algn="l"/>
+            <a:r>
+              <a:rPr sz="2800" b="0">
+                <a:solidFill>
+                  <a:srgbClr val="1B1B1B"/>
                 </a:solidFill>
                 <a:latin typeface="微软雅黑 Light"/>
                 <a:ea typeface="微软雅黑 Light"/>
               </a:rPr>
-              <a:t>对立统一　·　相互转化　·　一定条件</a:t>
-            </a:r>
-          </a:p>
-        </p:txBody>
-      </p:sp>
-      <p:sp>
-        <p:nvSpPr>
-          <p:cNvPr id="7" name="TextBox 6"/>
-          <p:cNvSpPr txBox="1"/>
-          <p:nvPr/>
-        </p:nvSpPr>
-        <p:spPr>
-          <a:xfrm>
-            <a:off x="914400" y="3200400"/>
-            <a:ext cx="10332720" cy="548640"/>
-          </a:xfrm>
-          <a:prstGeom prst="rect">
-            <a:avLst/>
-          </a:prstGeom>
-          <a:noFill/>
-        </p:spPr>
-        <p:txBody>
-          <a:bodyPr wrap="square" anchor="t">
-            <a:spAutoFit/>
-          </a:bodyPr>
-          <a:lstStyle/>
-          <a:p>
-            <a:pPr algn="l"/>
-            <a:r>
-              <a:rPr sz="1300" b="0">
-                <a:solidFill>
-                  <a:srgbClr val="9A9A9A"/>
-                </a:solidFill>
-                <a:latin typeface="微软雅黑"/>
-                <a:ea typeface="微软雅黑"/>
-              </a:rPr>
-              <a:t>课本常讲的“五观”</a:t>
-            </a:r>
-          </a:p>
-        </p:txBody>
-      </p:sp>
-      <p:sp>
-        <p:nvSpPr>
-          <p:cNvPr id="8" name="TextBox 7"/>
-          <p:cNvSpPr txBox="1"/>
-          <p:nvPr/>
-        </p:nvSpPr>
-        <p:spPr>
-          <a:xfrm>
-            <a:off x="914400" y="3520440"/>
-            <a:ext cx="10332720" cy="548640"/>
-          </a:xfrm>
-          <a:prstGeom prst="rect">
-            <a:avLst/>
-          </a:prstGeom>
-          <a:noFill/>
-        </p:spPr>
-        <p:txBody>
-          <a:bodyPr wrap="square" anchor="t">
-            <a:spAutoFit/>
-          </a:bodyPr>
-          <a:lstStyle/>
-          <a:p>
-            <a:pPr algn="l"/>
-            <a:r>
-              <a:rPr sz="2000" b="0">
-                <a:solidFill>
-                  <a:srgbClr val="1B1B1B"/>
-                </a:solidFill>
-                <a:latin typeface="微软雅黑 Light"/>
-                <a:ea typeface="微软雅黑 Light"/>
-              </a:rPr>
-              <a:t>得失　·　苦乐　·　顺逆　·　生死　·　荣辱</a:t>
-            </a:r>
-          </a:p>
-        </p:txBody>
-      </p:sp>
-      <p:sp>
-        <p:nvSpPr>
-          <p:cNvPr id="9" name="Rectangle 8"/>
+              <a:t>辩证看待人生矛盾</a:t>
+            </a:r>
+          </a:p>
+        </p:txBody>
+      </p:sp>
+      <p:sp>
+        <p:nvSpPr>
+          <p:cNvPr id="6" name="Rectangle 5"/>
           <p:cNvSpPr/>
           <p:nvPr/>
         </p:nvSpPr>
         <p:spPr>
           <a:xfrm>
-            <a:off x="914400" y="4709160"/>
+            <a:off x="914400" y="1645920"/>
             <a:ext cx="10360152" cy="10972"/>
           </a:xfrm>
           <a:prstGeom prst="rect">
             <a:avLst/>
           </a:prstGeom>
           <a:solidFill>
-            <a:srgbClr val="D8D8D8"/>
+            <a:srgbClr val="DDE3E8"/>
           </a:solidFill>
           <a:ln>
             <a:noFill/>
@@ -6881,14 +7461,104 @@
       </p:sp>
       <p:sp>
         <p:nvSpPr>
-          <p:cNvPr id="10" name="TextBox 9"/>
+          <p:cNvPr id="7" name="Rounded Rectangle 6"/>
+          <p:cNvSpPr/>
+          <p:nvPr/>
+        </p:nvSpPr>
+        <p:spPr>
+          <a:xfrm>
+            <a:off x="822960" y="2084831"/>
+            <a:ext cx="10543032" cy="777240"/>
+          </a:xfrm>
+          <a:prstGeom prst="roundRect">
+            <a:avLst>
+              <a:gd name="adj" fmla="val 10000"/>
+            </a:avLst>
+          </a:prstGeom>
+          <a:solidFill>
+            <a:srgbClr val="EEF2F5"/>
+          </a:solidFill>
+          <a:ln>
+            <a:noFill/>
+          </a:ln>
+          <a:effectLst/>
+        </p:spPr>
+        <p:style>
+          <a:lnRef idx="1">
+            <a:schemeClr val="accent1"/>
+          </a:lnRef>
+          <a:fillRef idx="3">
+            <a:schemeClr val="accent1"/>
+          </a:fillRef>
+          <a:effectRef idx="2">
+            <a:schemeClr val="accent1"/>
+          </a:effectRef>
+          <a:fontRef idx="minor">
+            <a:schemeClr val="lt1"/>
+          </a:fontRef>
+        </p:style>
+        <p:txBody>
+          <a:bodyPr rtlCol="0" anchor="ctr"/>
+          <a:lstStyle/>
+          <a:p>
+            <a:pPr algn="ctr"/>
+          </a:p>
+        </p:txBody>
+      </p:sp>
+      <p:sp>
+        <p:nvSpPr>
+          <p:cNvPr id="8" name="Rectangle 7"/>
+          <p:cNvSpPr/>
+          <p:nvPr/>
+        </p:nvSpPr>
+        <p:spPr>
+          <a:xfrm>
+            <a:off x="822960" y="2084831"/>
+            <a:ext cx="64008" cy="777240"/>
+          </a:xfrm>
+          <a:prstGeom prst="rect">
+            <a:avLst/>
+          </a:prstGeom>
+          <a:solidFill>
+            <a:srgbClr val="52798A"/>
+          </a:solidFill>
+          <a:ln>
+            <a:noFill/>
+          </a:ln>
+          <a:effectLst/>
+        </p:spPr>
+        <p:style>
+          <a:lnRef idx="1">
+            <a:schemeClr val="accent1"/>
+          </a:lnRef>
+          <a:fillRef idx="3">
+            <a:schemeClr val="accent1"/>
+          </a:fillRef>
+          <a:effectRef idx="2">
+            <a:schemeClr val="accent1"/>
+          </a:effectRef>
+          <a:fontRef idx="minor">
+            <a:schemeClr val="lt1"/>
+          </a:fontRef>
+        </p:style>
+        <p:txBody>
+          <a:bodyPr rtlCol="0" anchor="ctr"/>
+          <a:lstStyle/>
+          <a:p>
+            <a:pPr algn="ctr"/>
+          </a:p>
+        </p:txBody>
+      </p:sp>
+      <p:sp>
+        <p:nvSpPr>
+          <p:cNvPr id="9" name="TextBox 8"/>
           <p:cNvSpPr txBox="1"/>
           <p:nvPr/>
         </p:nvSpPr>
         <p:spPr>
           <a:xfrm>
-            <a:off x="914400" y="4937760"/>
-            <a:ext cx="10332720" cy="1097280"/>
+            <a:off x="1143000" y="2258568"/>
+            <a:ext cx="9966960" cy="457200"/>
           </a:xfrm>
           <a:prstGeom prst="rect">
             <a:avLst/>
@@ -6901,15 +7571,631 @@
           </a:bodyPr>
           <a:lstStyle/>
           <a:p>
+            <a:pPr algn="l"/>
+            <a:r>
+              <a:rPr sz="2100" b="0">
+                <a:solidFill>
+                  <a:srgbClr val="2F4858"/>
+                </a:solidFill>
+                <a:latin typeface="微软雅黑 Light"/>
+                <a:ea typeface="微软雅黑 Light"/>
+              </a:rPr>
+              <a:t>对立统一　·　相互转化　·　一定条件</a:t>
+            </a:r>
+          </a:p>
+        </p:txBody>
+      </p:sp>
+      <p:sp>
+        <p:nvSpPr>
+          <p:cNvPr id="10" name="TextBox 9"/>
+          <p:cNvSpPr txBox="1"/>
+          <p:nvPr/>
+        </p:nvSpPr>
+        <p:spPr>
+          <a:xfrm>
+            <a:off x="914400" y="3108960"/>
+            <a:ext cx="10360152" cy="365760"/>
+          </a:xfrm>
+          <a:prstGeom prst="rect">
+            <a:avLst/>
+          </a:prstGeom>
+          <a:noFill/>
+        </p:spPr>
+        <p:txBody>
+          <a:bodyPr wrap="square" anchor="t">
+            <a:spAutoFit/>
+          </a:bodyPr>
+          <a:lstStyle/>
+          <a:p>
+            <a:pPr algn="l"/>
+            <a:r>
+              <a:rPr sz="1250" b="0">
+                <a:solidFill>
+                  <a:srgbClr val="98A2AB"/>
+                </a:solidFill>
+                <a:latin typeface="微软雅黑"/>
+                <a:ea typeface="微软雅黑"/>
+              </a:rPr>
+              <a:t>课本常讲的「五观」</a:t>
+            </a:r>
+          </a:p>
+        </p:txBody>
+      </p:sp>
+      <p:sp>
+        <p:nvSpPr>
+          <p:cNvPr id="11" name="Rounded Rectangle 10"/>
+          <p:cNvSpPr/>
+          <p:nvPr/>
+        </p:nvSpPr>
+        <p:spPr>
+          <a:xfrm>
+            <a:off x="914400" y="3456432"/>
+            <a:ext cx="1938528" cy="640080"/>
+          </a:xfrm>
+          <a:prstGeom prst="roundRect">
+            <a:avLst>
+              <a:gd name="adj" fmla="val 14000"/>
+            </a:avLst>
+          </a:prstGeom>
+          <a:solidFill>
+            <a:srgbClr val="E2EAEF"/>
+          </a:solidFill>
+          <a:ln>
+            <a:noFill/>
+          </a:ln>
+          <a:effectLst/>
+        </p:spPr>
+        <p:style>
+          <a:lnRef idx="1">
+            <a:schemeClr val="accent1"/>
+          </a:lnRef>
+          <a:fillRef idx="3">
+            <a:schemeClr val="accent1"/>
+          </a:fillRef>
+          <a:effectRef idx="2">
+            <a:schemeClr val="accent1"/>
+          </a:effectRef>
+          <a:fontRef idx="minor">
+            <a:schemeClr val="lt1"/>
+          </a:fontRef>
+        </p:style>
+        <p:txBody>
+          <a:bodyPr rtlCol="0" anchor="ctr"/>
+          <a:lstStyle/>
+          <a:p>
+            <a:pPr algn="ctr"/>
+          </a:p>
+        </p:txBody>
+      </p:sp>
+      <p:sp>
+        <p:nvSpPr>
+          <p:cNvPr id="12" name="TextBox 11"/>
+          <p:cNvSpPr txBox="1"/>
+          <p:nvPr/>
+        </p:nvSpPr>
+        <p:spPr>
+          <a:xfrm>
+            <a:off x="914400" y="3456432"/>
+            <a:ext cx="1938528" cy="640080"/>
+          </a:xfrm>
+          <a:prstGeom prst="rect">
+            <a:avLst/>
+          </a:prstGeom>
+          <a:noFill/>
+        </p:spPr>
+        <p:txBody>
+          <a:bodyPr wrap="square" anchor="ctr">
+            <a:spAutoFit/>
+          </a:bodyPr>
+          <a:lstStyle/>
+          <a:p>
+            <a:pPr algn="ctr"/>
+            <a:r>
+              <a:rPr sz="1600" b="0">
+                <a:solidFill>
+                  <a:srgbClr val="2F4858"/>
+                </a:solidFill>
+                <a:latin typeface="微软雅黑"/>
+                <a:ea typeface="微软雅黑"/>
+              </a:rPr>
+              <a:t>得失</a:t>
+            </a:r>
+          </a:p>
+        </p:txBody>
+      </p:sp>
+      <p:sp>
+        <p:nvSpPr>
+          <p:cNvPr id="13" name="Rounded Rectangle 12"/>
+          <p:cNvSpPr/>
+          <p:nvPr/>
+        </p:nvSpPr>
+        <p:spPr>
+          <a:xfrm>
+            <a:off x="3017520" y="3456432"/>
+            <a:ext cx="1938528" cy="640080"/>
+          </a:xfrm>
+          <a:prstGeom prst="roundRect">
+            <a:avLst>
+              <a:gd name="adj" fmla="val 14000"/>
+            </a:avLst>
+          </a:prstGeom>
+          <a:solidFill>
+            <a:srgbClr val="E2EAEF"/>
+          </a:solidFill>
+          <a:ln>
+            <a:noFill/>
+          </a:ln>
+          <a:effectLst/>
+        </p:spPr>
+        <p:style>
+          <a:lnRef idx="1">
+            <a:schemeClr val="accent1"/>
+          </a:lnRef>
+          <a:fillRef idx="3">
+            <a:schemeClr val="accent1"/>
+          </a:fillRef>
+          <a:effectRef idx="2">
+            <a:schemeClr val="accent1"/>
+          </a:effectRef>
+          <a:fontRef idx="minor">
+            <a:schemeClr val="lt1"/>
+          </a:fontRef>
+        </p:style>
+        <p:txBody>
+          <a:bodyPr rtlCol="0" anchor="ctr"/>
+          <a:lstStyle/>
+          <a:p>
+            <a:pPr algn="ctr"/>
+          </a:p>
+        </p:txBody>
+      </p:sp>
+      <p:sp>
+        <p:nvSpPr>
+          <p:cNvPr id="14" name="TextBox 13"/>
+          <p:cNvSpPr txBox="1"/>
+          <p:nvPr/>
+        </p:nvSpPr>
+        <p:spPr>
+          <a:xfrm>
+            <a:off x="3017520" y="3456432"/>
+            <a:ext cx="1938528" cy="640080"/>
+          </a:xfrm>
+          <a:prstGeom prst="rect">
+            <a:avLst/>
+          </a:prstGeom>
+          <a:noFill/>
+        </p:spPr>
+        <p:txBody>
+          <a:bodyPr wrap="square" anchor="ctr">
+            <a:spAutoFit/>
+          </a:bodyPr>
+          <a:lstStyle/>
+          <a:p>
+            <a:pPr algn="ctr"/>
+            <a:r>
+              <a:rPr sz="1600" b="0">
+                <a:solidFill>
+                  <a:srgbClr val="2F4858"/>
+                </a:solidFill>
+                <a:latin typeface="微软雅黑"/>
+                <a:ea typeface="微软雅黑"/>
+              </a:rPr>
+              <a:t>苦乐</a:t>
+            </a:r>
+          </a:p>
+        </p:txBody>
+      </p:sp>
+      <p:sp>
+        <p:nvSpPr>
+          <p:cNvPr id="15" name="Rounded Rectangle 14"/>
+          <p:cNvSpPr/>
+          <p:nvPr/>
+        </p:nvSpPr>
+        <p:spPr>
+          <a:xfrm>
+            <a:off x="5120640" y="3456432"/>
+            <a:ext cx="1938528" cy="640080"/>
+          </a:xfrm>
+          <a:prstGeom prst="roundRect">
+            <a:avLst>
+              <a:gd name="adj" fmla="val 14000"/>
+            </a:avLst>
+          </a:prstGeom>
+          <a:solidFill>
+            <a:srgbClr val="E2EAEF"/>
+          </a:solidFill>
+          <a:ln>
+            <a:noFill/>
+          </a:ln>
+          <a:effectLst/>
+        </p:spPr>
+        <p:style>
+          <a:lnRef idx="1">
+            <a:schemeClr val="accent1"/>
+          </a:lnRef>
+          <a:fillRef idx="3">
+            <a:schemeClr val="accent1"/>
+          </a:fillRef>
+          <a:effectRef idx="2">
+            <a:schemeClr val="accent1"/>
+          </a:effectRef>
+          <a:fontRef idx="minor">
+            <a:schemeClr val="lt1"/>
+          </a:fontRef>
+        </p:style>
+        <p:txBody>
+          <a:bodyPr rtlCol="0" anchor="ctr"/>
+          <a:lstStyle/>
+          <a:p>
+            <a:pPr algn="ctr"/>
+          </a:p>
+        </p:txBody>
+      </p:sp>
+      <p:sp>
+        <p:nvSpPr>
+          <p:cNvPr id="16" name="TextBox 15"/>
+          <p:cNvSpPr txBox="1"/>
+          <p:nvPr/>
+        </p:nvSpPr>
+        <p:spPr>
+          <a:xfrm>
+            <a:off x="5120640" y="3456432"/>
+            <a:ext cx="1938528" cy="640080"/>
+          </a:xfrm>
+          <a:prstGeom prst="rect">
+            <a:avLst/>
+          </a:prstGeom>
+          <a:noFill/>
+        </p:spPr>
+        <p:txBody>
+          <a:bodyPr wrap="square" anchor="ctr">
+            <a:spAutoFit/>
+          </a:bodyPr>
+          <a:lstStyle/>
+          <a:p>
+            <a:pPr algn="ctr"/>
+            <a:r>
+              <a:rPr sz="1600" b="0">
+                <a:solidFill>
+                  <a:srgbClr val="2F4858"/>
+                </a:solidFill>
+                <a:latin typeface="微软雅黑"/>
+                <a:ea typeface="微软雅黑"/>
+              </a:rPr>
+              <a:t>顺逆</a:t>
+            </a:r>
+          </a:p>
+        </p:txBody>
+      </p:sp>
+      <p:sp>
+        <p:nvSpPr>
+          <p:cNvPr id="17" name="Rounded Rectangle 16"/>
+          <p:cNvSpPr/>
+          <p:nvPr/>
+        </p:nvSpPr>
+        <p:spPr>
+          <a:xfrm>
+            <a:off x="7223760" y="3456432"/>
+            <a:ext cx="1938528" cy="640080"/>
+          </a:xfrm>
+          <a:prstGeom prst="roundRect">
+            <a:avLst>
+              <a:gd name="adj" fmla="val 14000"/>
+            </a:avLst>
+          </a:prstGeom>
+          <a:solidFill>
+            <a:srgbClr val="E2EAEF"/>
+          </a:solidFill>
+          <a:ln>
+            <a:noFill/>
+          </a:ln>
+          <a:effectLst/>
+        </p:spPr>
+        <p:style>
+          <a:lnRef idx="1">
+            <a:schemeClr val="accent1"/>
+          </a:lnRef>
+          <a:fillRef idx="3">
+            <a:schemeClr val="accent1"/>
+          </a:fillRef>
+          <a:effectRef idx="2">
+            <a:schemeClr val="accent1"/>
+          </a:effectRef>
+          <a:fontRef idx="minor">
+            <a:schemeClr val="lt1"/>
+          </a:fontRef>
+        </p:style>
+        <p:txBody>
+          <a:bodyPr rtlCol="0" anchor="ctr"/>
+          <a:lstStyle/>
+          <a:p>
+            <a:pPr algn="ctr"/>
+          </a:p>
+        </p:txBody>
+      </p:sp>
+      <p:sp>
+        <p:nvSpPr>
+          <p:cNvPr id="18" name="TextBox 17"/>
+          <p:cNvSpPr txBox="1"/>
+          <p:nvPr/>
+        </p:nvSpPr>
+        <p:spPr>
+          <a:xfrm>
+            <a:off x="7223760" y="3456432"/>
+            <a:ext cx="1938528" cy="640080"/>
+          </a:xfrm>
+          <a:prstGeom prst="rect">
+            <a:avLst/>
+          </a:prstGeom>
+          <a:noFill/>
+        </p:spPr>
+        <p:txBody>
+          <a:bodyPr wrap="square" anchor="ctr">
+            <a:spAutoFit/>
+          </a:bodyPr>
+          <a:lstStyle/>
+          <a:p>
+            <a:pPr algn="ctr"/>
+            <a:r>
+              <a:rPr sz="1600" b="0">
+                <a:solidFill>
+                  <a:srgbClr val="2F4858"/>
+                </a:solidFill>
+                <a:latin typeface="微软雅黑"/>
+                <a:ea typeface="微软雅黑"/>
+              </a:rPr>
+              <a:t>生死</a:t>
+            </a:r>
+          </a:p>
+        </p:txBody>
+      </p:sp>
+      <p:sp>
+        <p:nvSpPr>
+          <p:cNvPr id="19" name="Rounded Rectangle 18"/>
+          <p:cNvSpPr/>
+          <p:nvPr/>
+        </p:nvSpPr>
+        <p:spPr>
+          <a:xfrm>
+            <a:off x="9326880" y="3456432"/>
+            <a:ext cx="1938528" cy="640080"/>
+          </a:xfrm>
+          <a:prstGeom prst="roundRect">
+            <a:avLst>
+              <a:gd name="adj" fmla="val 14000"/>
+            </a:avLst>
+          </a:prstGeom>
+          <a:solidFill>
+            <a:srgbClr val="E2EAEF"/>
+          </a:solidFill>
+          <a:ln>
+            <a:noFill/>
+          </a:ln>
+          <a:effectLst/>
+        </p:spPr>
+        <p:style>
+          <a:lnRef idx="1">
+            <a:schemeClr val="accent1"/>
+          </a:lnRef>
+          <a:fillRef idx="3">
+            <a:schemeClr val="accent1"/>
+          </a:fillRef>
+          <a:effectRef idx="2">
+            <a:schemeClr val="accent1"/>
+          </a:effectRef>
+          <a:fontRef idx="minor">
+            <a:schemeClr val="lt1"/>
+          </a:fontRef>
+        </p:style>
+        <p:txBody>
+          <a:bodyPr rtlCol="0" anchor="ctr"/>
+          <a:lstStyle/>
+          <a:p>
+            <a:pPr algn="ctr"/>
+          </a:p>
+        </p:txBody>
+      </p:sp>
+      <p:sp>
+        <p:nvSpPr>
+          <p:cNvPr id="20" name="TextBox 19"/>
+          <p:cNvSpPr txBox="1"/>
+          <p:nvPr/>
+        </p:nvSpPr>
+        <p:spPr>
+          <a:xfrm>
+            <a:off x="9326880" y="3456432"/>
+            <a:ext cx="1938528" cy="640080"/>
+          </a:xfrm>
+          <a:prstGeom prst="rect">
+            <a:avLst/>
+          </a:prstGeom>
+          <a:noFill/>
+        </p:spPr>
+        <p:txBody>
+          <a:bodyPr wrap="square" anchor="ctr">
+            <a:spAutoFit/>
+          </a:bodyPr>
+          <a:lstStyle/>
+          <a:p>
+            <a:pPr algn="ctr"/>
+            <a:r>
+              <a:rPr sz="1600" b="0">
+                <a:solidFill>
+                  <a:srgbClr val="2F4858"/>
+                </a:solidFill>
+                <a:latin typeface="微软雅黑"/>
+                <a:ea typeface="微软雅黑"/>
+              </a:rPr>
+              <a:t>荣辱</a:t>
+            </a:r>
+          </a:p>
+        </p:txBody>
+      </p:sp>
+      <p:sp>
+        <p:nvSpPr>
+          <p:cNvPr id="21" name="Rectangle 20"/>
+          <p:cNvSpPr/>
+          <p:nvPr/>
+        </p:nvSpPr>
+        <p:spPr>
+          <a:xfrm>
+            <a:off x="914400" y="4526280"/>
+            <a:ext cx="10360152" cy="10972"/>
+          </a:xfrm>
+          <a:prstGeom prst="rect">
+            <a:avLst/>
+          </a:prstGeom>
+          <a:solidFill>
+            <a:srgbClr val="DDE3E8"/>
+          </a:solidFill>
+          <a:ln>
+            <a:noFill/>
+          </a:ln>
+          <a:effectLst/>
+        </p:spPr>
+        <p:style>
+          <a:lnRef idx="1">
+            <a:schemeClr val="accent1"/>
+          </a:lnRef>
+          <a:fillRef idx="3">
+            <a:schemeClr val="accent1"/>
+          </a:fillRef>
+          <a:effectRef idx="2">
+            <a:schemeClr val="accent1"/>
+          </a:effectRef>
+          <a:fontRef idx="minor">
+            <a:schemeClr val="lt1"/>
+          </a:fontRef>
+        </p:style>
+        <p:txBody>
+          <a:bodyPr rtlCol="0" anchor="ctr"/>
+          <a:lstStyle/>
+          <a:p>
+            <a:pPr algn="ctr"/>
+          </a:p>
+        </p:txBody>
+      </p:sp>
+      <p:sp>
+        <p:nvSpPr>
+          <p:cNvPr id="22" name="Rounded Rectangle 21"/>
+          <p:cNvSpPr/>
+          <p:nvPr/>
+        </p:nvSpPr>
+        <p:spPr>
+          <a:xfrm>
+            <a:off x="822960" y="4709160"/>
+            <a:ext cx="10543032" cy="1051560"/>
+          </a:xfrm>
+          <a:prstGeom prst="roundRect">
+            <a:avLst>
+              <a:gd name="adj" fmla="val 8000"/>
+            </a:avLst>
+          </a:prstGeom>
+          <a:solidFill>
+            <a:srgbClr val="EEF2F5"/>
+          </a:solidFill>
+          <a:ln>
+            <a:noFill/>
+          </a:ln>
+          <a:effectLst/>
+        </p:spPr>
+        <p:style>
+          <a:lnRef idx="1">
+            <a:schemeClr val="accent1"/>
+          </a:lnRef>
+          <a:fillRef idx="3">
+            <a:schemeClr val="accent1"/>
+          </a:fillRef>
+          <a:effectRef idx="2">
+            <a:schemeClr val="accent1"/>
+          </a:effectRef>
+          <a:fontRef idx="minor">
+            <a:schemeClr val="lt1"/>
+          </a:fontRef>
+        </p:style>
+        <p:txBody>
+          <a:bodyPr rtlCol="0" anchor="ctr"/>
+          <a:lstStyle/>
+          <a:p>
+            <a:pPr algn="ctr"/>
+          </a:p>
+        </p:txBody>
+      </p:sp>
+      <p:sp>
+        <p:nvSpPr>
+          <p:cNvPr id="23" name="Rectangle 22"/>
+          <p:cNvSpPr/>
+          <p:nvPr/>
+        </p:nvSpPr>
+        <p:spPr>
+          <a:xfrm>
+            <a:off x="822960" y="4709160"/>
+            <a:ext cx="64008" cy="1051560"/>
+          </a:xfrm>
+          <a:prstGeom prst="rect">
+            <a:avLst/>
+          </a:prstGeom>
+          <a:solidFill>
+            <a:srgbClr val="52798A"/>
+          </a:solidFill>
+          <a:ln>
+            <a:noFill/>
+          </a:ln>
+          <a:effectLst/>
+        </p:spPr>
+        <p:style>
+          <a:lnRef idx="1">
+            <a:schemeClr val="accent1"/>
+          </a:lnRef>
+          <a:fillRef idx="3">
+            <a:schemeClr val="accent1"/>
+          </a:fillRef>
+          <a:effectRef idx="2">
+            <a:schemeClr val="accent1"/>
+          </a:effectRef>
+          <a:fontRef idx="minor">
+            <a:schemeClr val="lt1"/>
+          </a:fontRef>
+        </p:style>
+        <p:txBody>
+          <a:bodyPr rtlCol="0" anchor="ctr"/>
+          <a:lstStyle/>
+          <a:p>
+            <a:pPr algn="ctr"/>
+          </a:p>
+        </p:txBody>
+      </p:sp>
+      <p:sp>
+        <p:nvSpPr>
+          <p:cNvPr id="24" name="TextBox 23"/>
+          <p:cNvSpPr txBox="1"/>
+          <p:nvPr/>
+        </p:nvSpPr>
+        <p:spPr>
+          <a:xfrm>
+            <a:off x="1143000" y="4864608"/>
+            <a:ext cx="9966960" cy="822960"/>
+          </a:xfrm>
+          <a:prstGeom prst="rect">
+            <a:avLst/>
+          </a:prstGeom>
+          <a:noFill/>
+        </p:spPr>
+        <p:txBody>
+          <a:bodyPr wrap="square" anchor="t">
+            <a:spAutoFit/>
+          </a:bodyPr>
+          <a:lstStyle/>
+          <a:p>
             <a:pPr algn="l">
               <a:lnSpc>
-                <a:spcPct val="130000"/>
+                <a:spcPct val="125000"/>
               </a:lnSpc>
             </a:pPr>
             <a:r>
-              <a:rPr sz="1800" b="0">
-                <a:solidFill>
-                  <a:srgbClr val="6B6B6B"/>
+              <a:rPr sz="1500" b="0">
+                <a:solidFill>
+                  <a:srgbClr val="5F6B76"/>
                 </a:solidFill>
                 <a:latin typeface="微软雅黑"/>
                 <a:ea typeface="微软雅黑"/>
@@ -6920,32 +8206,76 @@
           <a:p>
             <a:pPr algn="l">
               <a:lnSpc>
-                <a:spcPct val="130000"/>
+                <a:spcPct val="125000"/>
               </a:lnSpc>
             </a:pPr>
             <a:r>
-              <a:rPr sz="2000" b="0">
-                <a:solidFill>
-                  <a:srgbClr val="3A5A70"/>
+              <a:rPr sz="1800" b="0">
+                <a:solidFill>
+                  <a:srgbClr val="2F4858"/>
                 </a:solidFill>
                 <a:latin typeface="微软雅黑 Light"/>
                 <a:ea typeface="微软雅黑 Light"/>
               </a:rPr>
-              <a:t>在于“一定条件”：你怎么对待它，决定它把你带向哪里。</a:t>
-            </a:r>
-          </a:p>
-        </p:txBody>
-      </p:sp>
-      <p:sp>
-        <p:nvSpPr>
-          <p:cNvPr id="11" name="TextBox 10"/>
+              <a:t>在于「一定条件」：你怎么对待它，决定它把你带向哪里。</a:t>
+            </a:r>
+          </a:p>
+        </p:txBody>
+      </p:sp>
+      <p:sp>
+        <p:nvSpPr>
+          <p:cNvPr id="25" name="Rectangle 24"/>
+          <p:cNvSpPr/>
+          <p:nvPr/>
+        </p:nvSpPr>
+        <p:spPr>
+          <a:xfrm>
+            <a:off x="914400" y="6327648"/>
+            <a:ext cx="10360152" cy="7315"/>
+          </a:xfrm>
+          <a:prstGeom prst="rect">
+            <a:avLst/>
+          </a:prstGeom>
+          <a:solidFill>
+            <a:srgbClr val="DDE3E8"/>
+          </a:solidFill>
+          <a:ln>
+            <a:noFill/>
+          </a:ln>
+          <a:effectLst/>
+        </p:spPr>
+        <p:style>
+          <a:lnRef idx="1">
+            <a:schemeClr val="accent1"/>
+          </a:lnRef>
+          <a:fillRef idx="3">
+            <a:schemeClr val="accent1"/>
+          </a:fillRef>
+          <a:effectRef idx="2">
+            <a:schemeClr val="accent1"/>
+          </a:effectRef>
+          <a:fontRef idx="minor">
+            <a:schemeClr val="lt1"/>
+          </a:fontRef>
+        </p:style>
+        <p:txBody>
+          <a:bodyPr rtlCol="0" anchor="ctr"/>
+          <a:lstStyle/>
+          <a:p>
+            <a:pPr algn="ctr"/>
+          </a:p>
+        </p:txBody>
+      </p:sp>
+      <p:sp>
+        <p:nvSpPr>
+          <p:cNvPr id="26" name="TextBox 25"/>
           <p:cNvSpPr txBox="1"/>
           <p:nvPr/>
         </p:nvSpPr>
         <p:spPr>
           <a:xfrm>
-            <a:off x="10424160" y="6327648"/>
-            <a:ext cx="850392" cy="320040"/>
+            <a:off x="914400" y="6400800"/>
+            <a:ext cx="4572000" cy="320040"/>
           </a:xfrm>
           <a:prstGeom prst="rect">
             <a:avLst/>
@@ -6958,11 +8288,47 @@
           </a:bodyPr>
           <a:lstStyle/>
           <a:p>
+            <a:pPr algn="l"/>
+            <a:r>
+              <a:rPr sz="950" b="0">
+                <a:solidFill>
+                  <a:srgbClr val="98A2AB"/>
+                </a:solidFill>
+                <a:latin typeface="微软雅黑"/>
+                <a:ea typeface="微软雅黑"/>
+              </a:rPr>
+              <a:t>创造有意义的人生</a:t>
+            </a:r>
+          </a:p>
+        </p:txBody>
+      </p:sp>
+      <p:sp>
+        <p:nvSpPr>
+          <p:cNvPr id="27" name="TextBox 26"/>
+          <p:cNvSpPr txBox="1"/>
+          <p:nvPr/>
+        </p:nvSpPr>
+        <p:spPr>
+          <a:xfrm>
+            <a:off x="10360152" y="6400800"/>
+            <a:ext cx="914400" cy="320040"/>
+          </a:xfrm>
+          <a:prstGeom prst="rect">
+            <a:avLst/>
+          </a:prstGeom>
+          <a:noFill/>
+        </p:spPr>
+        <p:txBody>
+          <a:bodyPr wrap="square" anchor="t">
+            <a:spAutoFit/>
+          </a:bodyPr>
+          <a:lstStyle/>
+          <a:p>
             <a:pPr algn="r"/>
             <a:r>
-              <a:rPr sz="1050" b="0">
-                <a:solidFill>
-                  <a:srgbClr val="9A9A9A"/>
+              <a:rPr sz="1000" b="0">
+                <a:solidFill>
+                  <a:srgbClr val="98A2AB"/>
                 </a:solidFill>
                 <a:latin typeface="微软雅黑"/>
                 <a:ea typeface="微软雅黑"/>
@@ -6999,13 +8365,13 @@
         <p:spPr>
           <a:xfrm>
             <a:off x="0" y="0"/>
-            <a:ext cx="12191695" cy="6858000"/>
+            <a:ext cx="128016" cy="6858000"/>
           </a:xfrm>
           <a:prstGeom prst="rect">
             <a:avLst/>
           </a:prstGeom>
           <a:solidFill>
-            <a:srgbClr val="FFFFFF"/>
+            <a:srgbClr val="2F4858"/>
           </a:solidFill>
           <a:ln>
             <a:noFill/>
@@ -7036,92 +8402,20 @@
       </p:sp>
       <p:sp>
         <p:nvSpPr>
-          <p:cNvPr id="3" name="TextBox 2"/>
-          <p:cNvSpPr txBox="1"/>
-          <p:nvPr/>
-        </p:nvSpPr>
-        <p:spPr>
-          <a:xfrm>
-            <a:off x="914400" y="640080"/>
-            <a:ext cx="10332720" cy="320040"/>
-          </a:xfrm>
-          <a:prstGeom prst="rect">
-            <a:avLst/>
-          </a:prstGeom>
-          <a:noFill/>
-        </p:spPr>
-        <p:txBody>
-          <a:bodyPr wrap="square" anchor="t">
-            <a:spAutoFit/>
-          </a:bodyPr>
-          <a:lstStyle/>
-          <a:p>
-            <a:pPr algn="l"/>
-            <a:r>
-              <a:rPr sz="1150" b="0">
-                <a:solidFill>
-                  <a:srgbClr val="3A5A70"/>
-                </a:solidFill>
-                <a:latin typeface="微软雅黑"/>
-                <a:ea typeface="微软雅黑"/>
-              </a:rPr>
-              <a:t>知识点二</a:t>
-            </a:r>
-          </a:p>
-        </p:txBody>
-      </p:sp>
-      <p:sp>
-        <p:nvSpPr>
-          <p:cNvPr id="4" name="TextBox 3"/>
-          <p:cNvSpPr txBox="1"/>
-          <p:nvPr/>
-        </p:nvSpPr>
-        <p:spPr>
-          <a:xfrm>
-            <a:off x="914400" y="914400"/>
-            <a:ext cx="10332720" cy="685800"/>
-          </a:xfrm>
-          <a:prstGeom prst="rect">
-            <a:avLst/>
-          </a:prstGeom>
-          <a:noFill/>
-        </p:spPr>
-        <p:txBody>
-          <a:bodyPr wrap="square" anchor="t">
-            <a:spAutoFit/>
-          </a:bodyPr>
-          <a:lstStyle/>
-          <a:p>
-            <a:pPr algn="l"/>
-            <a:r>
-              <a:rPr sz="2900" b="0">
-                <a:solidFill>
-                  <a:srgbClr val="1B1B1B"/>
-                </a:solidFill>
-                <a:latin typeface="微软雅黑 Light"/>
-                <a:ea typeface="微软雅黑 Light"/>
-              </a:rPr>
-              <a:t>正确评价人生价值</a:t>
-            </a:r>
-          </a:p>
-        </p:txBody>
-      </p:sp>
-      <p:sp>
-        <p:nvSpPr>
-          <p:cNvPr id="5" name="Rectangle 4"/>
+          <p:cNvPr id="3" name="Rectangle 2"/>
           <p:cNvSpPr/>
           <p:nvPr/>
         </p:nvSpPr>
         <p:spPr>
           <a:xfrm>
-            <a:off x="914400" y="1673352"/>
-            <a:ext cx="10360152" cy="10972"/>
+            <a:off x="914400" y="676656"/>
+            <a:ext cx="118872" cy="118872"/>
           </a:xfrm>
           <a:prstGeom prst="rect">
             <a:avLst/>
           </a:prstGeom>
           <a:solidFill>
-            <a:srgbClr val="D8D8D8"/>
+            <a:srgbClr val="52798A"/>
           </a:solidFill>
           <a:ln>
             <a:noFill/>
@@ -7152,14 +8446,14 @@
       </p:sp>
       <p:sp>
         <p:nvSpPr>
-          <p:cNvPr id="6" name="TextBox 5"/>
+          <p:cNvPr id="4" name="TextBox 3"/>
           <p:cNvSpPr txBox="1"/>
           <p:nvPr/>
         </p:nvSpPr>
         <p:spPr>
           <a:xfrm>
-            <a:off x="914400" y="2286000"/>
-            <a:ext cx="10332720" cy="822960"/>
+            <a:off x="1133856" y="621792"/>
+            <a:ext cx="8229600" cy="320040"/>
           </a:xfrm>
           <a:prstGeom prst="rect">
             <a:avLst/>
@@ -7172,53 +8466,72 @@
           </a:bodyPr>
           <a:lstStyle/>
           <a:p>
-            <a:pPr algn="l">
-              <a:spcAft>
-                <a:spcPts val="600"/>
-              </a:spcAft>
-            </a:pPr>
-            <a:r>
-              <a:rPr sz="2200" b="0">
+            <a:pPr algn="l"/>
+            <a:r>
+              <a:rPr sz="1150" b="0">
+                <a:solidFill>
+                  <a:srgbClr val="2F4858"/>
+                </a:solidFill>
+                <a:latin typeface="微软雅黑"/>
+                <a:ea typeface="微软雅黑"/>
+              </a:rPr>
+              <a:t>知识点二</a:t>
+            </a:r>
+          </a:p>
+        </p:txBody>
+      </p:sp>
+      <p:sp>
+        <p:nvSpPr>
+          <p:cNvPr id="5" name="TextBox 4"/>
+          <p:cNvSpPr txBox="1"/>
+          <p:nvPr/>
+        </p:nvSpPr>
+        <p:spPr>
+          <a:xfrm>
+            <a:off x="914400" y="896112"/>
+            <a:ext cx="10360152" cy="685800"/>
+          </a:xfrm>
+          <a:prstGeom prst="rect">
+            <a:avLst/>
+          </a:prstGeom>
+          <a:noFill/>
+        </p:spPr>
+        <p:txBody>
+          <a:bodyPr wrap="square" anchor="t">
+            <a:spAutoFit/>
+          </a:bodyPr>
+          <a:lstStyle/>
+          <a:p>
+            <a:pPr algn="l"/>
+            <a:r>
+              <a:rPr sz="2800" b="0">
                 <a:solidFill>
                   <a:srgbClr val="1B1B1B"/>
                 </a:solidFill>
                 <a:latin typeface="微软雅黑 Light"/>
                 <a:ea typeface="微软雅黑 Light"/>
               </a:rPr>
-              <a:t>人生价值 ＝ 自我价值 ＋ 社会价值</a:t>
-            </a:r>
-          </a:p>
-          <a:p>
-            <a:pPr algn="l"/>
-            <a:r>
-              <a:rPr sz="1400" b="0">
-                <a:solidFill>
-                  <a:srgbClr val="9A9A9A"/>
-                </a:solidFill>
-                <a:latin typeface="微软雅黑"/>
-                <a:ea typeface="微软雅黑"/>
-              </a:rPr>
-              <a:t>（社会价值是主要方面）</a:t>
-            </a:r>
-          </a:p>
-        </p:txBody>
-      </p:sp>
-      <p:sp>
-        <p:nvSpPr>
-          <p:cNvPr id="7" name="Rectangle 6"/>
+              <a:t>正确评价人生价值</a:t>
+            </a:r>
+          </a:p>
+        </p:txBody>
+      </p:sp>
+      <p:sp>
+        <p:nvSpPr>
+          <p:cNvPr id="6" name="Rectangle 5"/>
           <p:cNvSpPr/>
           <p:nvPr/>
         </p:nvSpPr>
         <p:spPr>
           <a:xfrm>
-            <a:off x="914400" y="3611880"/>
+            <a:off x="914400" y="1645920"/>
             <a:ext cx="10360152" cy="10972"/>
           </a:xfrm>
           <a:prstGeom prst="rect">
             <a:avLst/>
           </a:prstGeom>
           <a:solidFill>
-            <a:srgbClr val="D8D8D8"/>
+            <a:srgbClr val="DDE3E8"/>
           </a:solidFill>
           <a:ln>
             <a:noFill/>
@@ -7249,14 +8562,104 @@
       </p:sp>
       <p:sp>
         <p:nvSpPr>
-          <p:cNvPr id="8" name="TextBox 7"/>
+          <p:cNvPr id="7" name="Rounded Rectangle 6"/>
+          <p:cNvSpPr/>
+          <p:nvPr/>
+        </p:nvSpPr>
+        <p:spPr>
+          <a:xfrm>
+            <a:off x="822960" y="2084831"/>
+            <a:ext cx="10543032" cy="960120"/>
+          </a:xfrm>
+          <a:prstGeom prst="roundRect">
+            <a:avLst>
+              <a:gd name="adj" fmla="val 8000"/>
+            </a:avLst>
+          </a:prstGeom>
+          <a:solidFill>
+            <a:srgbClr val="EEF2F5"/>
+          </a:solidFill>
+          <a:ln>
+            <a:noFill/>
+          </a:ln>
+          <a:effectLst/>
+        </p:spPr>
+        <p:style>
+          <a:lnRef idx="1">
+            <a:schemeClr val="accent1"/>
+          </a:lnRef>
+          <a:fillRef idx="3">
+            <a:schemeClr val="accent1"/>
+          </a:fillRef>
+          <a:effectRef idx="2">
+            <a:schemeClr val="accent1"/>
+          </a:effectRef>
+          <a:fontRef idx="minor">
+            <a:schemeClr val="lt1"/>
+          </a:fontRef>
+        </p:style>
+        <p:txBody>
+          <a:bodyPr rtlCol="0" anchor="ctr"/>
+          <a:lstStyle/>
+          <a:p>
+            <a:pPr algn="ctr"/>
+          </a:p>
+        </p:txBody>
+      </p:sp>
+      <p:sp>
+        <p:nvSpPr>
+          <p:cNvPr id="8" name="Rectangle 7"/>
+          <p:cNvSpPr/>
+          <p:nvPr/>
+        </p:nvSpPr>
+        <p:spPr>
+          <a:xfrm>
+            <a:off x="822960" y="2084831"/>
+            <a:ext cx="64008" cy="960120"/>
+          </a:xfrm>
+          <a:prstGeom prst="rect">
+            <a:avLst/>
+          </a:prstGeom>
+          <a:solidFill>
+            <a:srgbClr val="52798A"/>
+          </a:solidFill>
+          <a:ln>
+            <a:noFill/>
+          </a:ln>
+          <a:effectLst/>
+        </p:spPr>
+        <p:style>
+          <a:lnRef idx="1">
+            <a:schemeClr val="accent1"/>
+          </a:lnRef>
+          <a:fillRef idx="3">
+            <a:schemeClr val="accent1"/>
+          </a:fillRef>
+          <a:effectRef idx="2">
+            <a:schemeClr val="accent1"/>
+          </a:effectRef>
+          <a:fontRef idx="minor">
+            <a:schemeClr val="lt1"/>
+          </a:fontRef>
+        </p:style>
+        <p:txBody>
+          <a:bodyPr rtlCol="0" anchor="ctr"/>
+          <a:lstStyle/>
+          <a:p>
+            <a:pPr algn="ctr"/>
+          </a:p>
+        </p:txBody>
+      </p:sp>
+      <p:sp>
+        <p:nvSpPr>
+          <p:cNvPr id="9" name="TextBox 8"/>
           <p:cNvSpPr txBox="1"/>
           <p:nvPr/>
         </p:nvSpPr>
         <p:spPr>
           <a:xfrm>
-            <a:off x="914400" y="3840480"/>
-            <a:ext cx="10332720" cy="822960"/>
+            <a:off x="1143000" y="2212848"/>
+            <a:ext cx="9966960" cy="777240"/>
           </a:xfrm>
           <a:prstGeom prst="rect">
             <a:avLst/>
@@ -7275,9 +8678,102 @@
               </a:spcAft>
             </a:pPr>
             <a:r>
+              <a:rPr sz="2100" b="0">
+                <a:solidFill>
+                  <a:srgbClr val="1B1B1B"/>
+                </a:solidFill>
+                <a:latin typeface="微软雅黑 Light"/>
+                <a:ea typeface="微软雅黑 Light"/>
+              </a:rPr>
+              <a:t>人生价值 ＝ 自我价值 ＋ 社会价值</a:t>
+            </a:r>
+          </a:p>
+          <a:p>
+            <a:pPr algn="l"/>
+            <a:r>
               <a:rPr sz="1300" b="0">
                 <a:solidFill>
-                  <a:srgbClr val="9A9A9A"/>
+                  <a:srgbClr val="98A2AB"/>
+                </a:solidFill>
+                <a:latin typeface="微软雅黑"/>
+                <a:ea typeface="微软雅黑"/>
+              </a:rPr>
+              <a:t>（社会价值是主要方面）</a:t>
+            </a:r>
+          </a:p>
+        </p:txBody>
+      </p:sp>
+      <p:sp>
+        <p:nvSpPr>
+          <p:cNvPr id="10" name="Rectangle 9"/>
+          <p:cNvSpPr/>
+          <p:nvPr/>
+        </p:nvSpPr>
+        <p:spPr>
+          <a:xfrm>
+            <a:off x="914400" y="3383280"/>
+            <a:ext cx="10360152" cy="10972"/>
+          </a:xfrm>
+          <a:prstGeom prst="rect">
+            <a:avLst/>
+          </a:prstGeom>
+          <a:solidFill>
+            <a:srgbClr val="DDE3E8"/>
+          </a:solidFill>
+          <a:ln>
+            <a:noFill/>
+          </a:ln>
+          <a:effectLst/>
+        </p:spPr>
+        <p:style>
+          <a:lnRef idx="1">
+            <a:schemeClr val="accent1"/>
+          </a:lnRef>
+          <a:fillRef idx="3">
+            <a:schemeClr val="accent1"/>
+          </a:fillRef>
+          <a:effectRef idx="2">
+            <a:schemeClr val="accent1"/>
+          </a:effectRef>
+          <a:fontRef idx="minor">
+            <a:schemeClr val="lt1"/>
+          </a:fontRef>
+        </p:style>
+        <p:txBody>
+          <a:bodyPr rtlCol="0" anchor="ctr"/>
+          <a:lstStyle/>
+          <a:p>
+            <a:pPr algn="ctr"/>
+          </a:p>
+        </p:txBody>
+      </p:sp>
+      <p:sp>
+        <p:nvSpPr>
+          <p:cNvPr id="11" name="TextBox 10"/>
+          <p:cNvSpPr txBox="1"/>
+          <p:nvPr/>
+        </p:nvSpPr>
+        <p:spPr>
+          <a:xfrm>
+            <a:off x="914400" y="3584448"/>
+            <a:ext cx="10360152" cy="365760"/>
+          </a:xfrm>
+          <a:prstGeom prst="rect">
+            <a:avLst/>
+          </a:prstGeom>
+          <a:noFill/>
+        </p:spPr>
+        <p:txBody>
+          <a:bodyPr wrap="square" anchor="t">
+            <a:spAutoFit/>
+          </a:bodyPr>
+          <a:lstStyle/>
+          <a:p>
+            <a:pPr algn="l"/>
+            <a:r>
+              <a:rPr sz="1250" b="0">
+                <a:solidFill>
+                  <a:srgbClr val="98A2AB"/>
                 </a:solidFill>
                 <a:latin typeface="微软雅黑"/>
                 <a:ea typeface="微软雅黑"/>
@@ -7285,12 +8781,35 @@
               <a:t>评价的根本尺度</a:t>
             </a:r>
           </a:p>
+        </p:txBody>
+      </p:sp>
+      <p:sp>
+        <p:nvSpPr>
+          <p:cNvPr id="12" name="TextBox 11"/>
+          <p:cNvSpPr txBox="1"/>
+          <p:nvPr/>
+        </p:nvSpPr>
+        <p:spPr>
+          <a:xfrm>
+            <a:off x="914400" y="3886200"/>
+            <a:ext cx="10360152" cy="548640"/>
+          </a:xfrm>
+          <a:prstGeom prst="rect">
+            <a:avLst/>
+          </a:prstGeom>
+          <a:noFill/>
+        </p:spPr>
+        <p:txBody>
+          <a:bodyPr wrap="square" anchor="t">
+            <a:spAutoFit/>
+          </a:bodyPr>
+          <a:lstStyle/>
           <a:p>
             <a:pPr algn="l"/>
             <a:r>
-              <a:rPr sz="2200" b="0">
-                <a:solidFill>
-                  <a:srgbClr val="3A5A70"/>
+              <a:rPr sz="2100" b="0">
+                <a:solidFill>
+                  <a:srgbClr val="2F4858"/>
                 </a:solidFill>
                 <a:latin typeface="微软雅黑 Light"/>
                 <a:ea typeface="微软雅黑 Light"/>
@@ -7302,14 +8821,14 @@
       </p:sp>
       <p:sp>
         <p:nvSpPr>
-          <p:cNvPr id="9" name="TextBox 8"/>
+          <p:cNvPr id="13" name="TextBox 12"/>
           <p:cNvSpPr txBox="1"/>
           <p:nvPr/>
         </p:nvSpPr>
         <p:spPr>
           <a:xfrm>
-            <a:off x="914400" y="5349240"/>
-            <a:ext cx="10332720" cy="457200"/>
+            <a:off x="914400" y="4892040"/>
+            <a:ext cx="10360152" cy="457200"/>
           </a:xfrm>
           <a:prstGeom prst="rect">
             <a:avLst/>
@@ -7324,9 +8843,9 @@
           <a:p>
             <a:pPr algn="l"/>
             <a:r>
-              <a:rPr sz="1400" b="0">
-                <a:solidFill>
-                  <a:srgbClr val="6B6B6B"/>
+              <a:rPr sz="1350" b="0">
+                <a:solidFill>
+                  <a:srgbClr val="5F6B76"/>
                 </a:solidFill>
                 <a:latin typeface="微软雅黑"/>
                 <a:ea typeface="微软雅黑"/>
@@ -7338,14 +8857,58 @@
       </p:sp>
       <p:sp>
         <p:nvSpPr>
-          <p:cNvPr id="10" name="TextBox 9"/>
+          <p:cNvPr id="14" name="Rectangle 13"/>
+          <p:cNvSpPr/>
+          <p:nvPr/>
+        </p:nvSpPr>
+        <p:spPr>
+          <a:xfrm>
+            <a:off x="914400" y="6327648"/>
+            <a:ext cx="10360152" cy="7315"/>
+          </a:xfrm>
+          <a:prstGeom prst="rect">
+            <a:avLst/>
+          </a:prstGeom>
+          <a:solidFill>
+            <a:srgbClr val="DDE3E8"/>
+          </a:solidFill>
+          <a:ln>
+            <a:noFill/>
+          </a:ln>
+          <a:effectLst/>
+        </p:spPr>
+        <p:style>
+          <a:lnRef idx="1">
+            <a:schemeClr val="accent1"/>
+          </a:lnRef>
+          <a:fillRef idx="3">
+            <a:schemeClr val="accent1"/>
+          </a:fillRef>
+          <a:effectRef idx="2">
+            <a:schemeClr val="accent1"/>
+          </a:effectRef>
+          <a:fontRef idx="minor">
+            <a:schemeClr val="lt1"/>
+          </a:fontRef>
+        </p:style>
+        <p:txBody>
+          <a:bodyPr rtlCol="0" anchor="ctr"/>
+          <a:lstStyle/>
+          <a:p>
+            <a:pPr algn="ctr"/>
+          </a:p>
+        </p:txBody>
+      </p:sp>
+      <p:sp>
+        <p:nvSpPr>
+          <p:cNvPr id="15" name="TextBox 14"/>
           <p:cNvSpPr txBox="1"/>
           <p:nvPr/>
         </p:nvSpPr>
         <p:spPr>
           <a:xfrm>
-            <a:off x="10424160" y="6327648"/>
-            <a:ext cx="850392" cy="320040"/>
+            <a:off x="914400" y="6400800"/>
+            <a:ext cx="4572000" cy="320040"/>
           </a:xfrm>
           <a:prstGeom prst="rect">
             <a:avLst/>
@@ -7358,11 +8921,47 @@
           </a:bodyPr>
           <a:lstStyle/>
           <a:p>
+            <a:pPr algn="l"/>
+            <a:r>
+              <a:rPr sz="950" b="0">
+                <a:solidFill>
+                  <a:srgbClr val="98A2AB"/>
+                </a:solidFill>
+                <a:latin typeface="微软雅黑"/>
+                <a:ea typeface="微软雅黑"/>
+              </a:rPr>
+              <a:t>创造有意义的人生</a:t>
+            </a:r>
+          </a:p>
+        </p:txBody>
+      </p:sp>
+      <p:sp>
+        <p:nvSpPr>
+          <p:cNvPr id="16" name="TextBox 15"/>
+          <p:cNvSpPr txBox="1"/>
+          <p:nvPr/>
+        </p:nvSpPr>
+        <p:spPr>
+          <a:xfrm>
+            <a:off x="10360152" y="6400800"/>
+            <a:ext cx="914400" cy="320040"/>
+          </a:xfrm>
+          <a:prstGeom prst="rect">
+            <a:avLst/>
+          </a:prstGeom>
+          <a:noFill/>
+        </p:spPr>
+        <p:txBody>
+          <a:bodyPr wrap="square" anchor="t">
+            <a:spAutoFit/>
+          </a:bodyPr>
+          <a:lstStyle/>
+          <a:p>
             <a:pPr algn="r"/>
             <a:r>
-              <a:rPr sz="1050" b="0">
-                <a:solidFill>
-                  <a:srgbClr val="9A9A9A"/>
+              <a:rPr sz="1000" b="0">
+                <a:solidFill>
+                  <a:srgbClr val="98A2AB"/>
                 </a:solidFill>
                 <a:latin typeface="微软雅黑"/>
                 <a:ea typeface="微软雅黑"/>
@@ -7399,13 +8998,13 @@
         <p:spPr>
           <a:xfrm>
             <a:off x="0" y="0"/>
-            <a:ext cx="12191695" cy="6858000"/>
+            <a:ext cx="128016" cy="6858000"/>
           </a:xfrm>
           <a:prstGeom prst="rect">
             <a:avLst/>
           </a:prstGeom>
           <a:solidFill>
-            <a:srgbClr val="FFFFFF"/>
+            <a:srgbClr val="2F4858"/>
           </a:solidFill>
           <a:ln>
             <a:noFill/>
@@ -7436,92 +9035,20 @@
       </p:sp>
       <p:sp>
         <p:nvSpPr>
-          <p:cNvPr id="3" name="TextBox 2"/>
-          <p:cNvSpPr txBox="1"/>
-          <p:nvPr/>
-        </p:nvSpPr>
-        <p:spPr>
-          <a:xfrm>
-            <a:off x="914400" y="640080"/>
-            <a:ext cx="10332720" cy="320040"/>
-          </a:xfrm>
-          <a:prstGeom prst="rect">
-            <a:avLst/>
-          </a:prstGeom>
-          <a:noFill/>
-        </p:spPr>
-        <p:txBody>
-          <a:bodyPr wrap="square" anchor="t">
-            <a:spAutoFit/>
-          </a:bodyPr>
-          <a:lstStyle/>
-          <a:p>
-            <a:pPr algn="l"/>
-            <a:r>
-              <a:rPr sz="1150" b="0">
-                <a:solidFill>
-                  <a:srgbClr val="3A5A70"/>
-                </a:solidFill>
-                <a:latin typeface="微软雅黑"/>
-                <a:ea typeface="微软雅黑"/>
-              </a:rPr>
-              <a:t>借力与落回</a:t>
-            </a:r>
-          </a:p>
-        </p:txBody>
-      </p:sp>
-      <p:sp>
-        <p:nvSpPr>
-          <p:cNvPr id="4" name="TextBox 3"/>
-          <p:cNvSpPr txBox="1"/>
-          <p:nvPr/>
-        </p:nvSpPr>
-        <p:spPr>
-          <a:xfrm>
-            <a:off x="914400" y="914400"/>
-            <a:ext cx="10332720" cy="685800"/>
-          </a:xfrm>
-          <a:prstGeom prst="rect">
-            <a:avLst/>
-          </a:prstGeom>
-          <a:noFill/>
-        </p:spPr>
-        <p:txBody>
-          <a:bodyPr wrap="square" anchor="t">
-            <a:spAutoFit/>
-          </a:bodyPr>
-          <a:lstStyle/>
-          <a:p>
-            <a:pPr algn="l"/>
-            <a:r>
-              <a:rPr sz="2900" b="0">
-                <a:solidFill>
-                  <a:srgbClr val="1B1B1B"/>
-                </a:solidFill>
-                <a:latin typeface="微软雅黑 Light"/>
-                <a:ea typeface="微软雅黑 Light"/>
-              </a:rPr>
-              <a:t>存在主义 × 马克思主义</a:t>
-            </a:r>
-          </a:p>
-        </p:txBody>
-      </p:sp>
-      <p:sp>
-        <p:nvSpPr>
-          <p:cNvPr id="5" name="Rectangle 4"/>
+          <p:cNvPr id="3" name="Rectangle 2"/>
           <p:cNvSpPr/>
           <p:nvPr/>
         </p:nvSpPr>
         <p:spPr>
           <a:xfrm>
-            <a:off x="914400" y="1673352"/>
-            <a:ext cx="10360152" cy="10972"/>
+            <a:off x="914400" y="676656"/>
+            <a:ext cx="118872" cy="118872"/>
           </a:xfrm>
           <a:prstGeom prst="rect">
             <a:avLst/>
           </a:prstGeom>
           <a:solidFill>
-            <a:srgbClr val="D8D8D8"/>
+            <a:srgbClr val="52798A"/>
           </a:solidFill>
           <a:ln>
             <a:noFill/>
@@ -7552,20 +9079,92 @@
       </p:sp>
       <p:sp>
         <p:nvSpPr>
+          <p:cNvPr id="4" name="TextBox 3"/>
+          <p:cNvSpPr txBox="1"/>
+          <p:nvPr/>
+        </p:nvSpPr>
+        <p:spPr>
+          <a:xfrm>
+            <a:off x="1133856" y="621792"/>
+            <a:ext cx="8229600" cy="320040"/>
+          </a:xfrm>
+          <a:prstGeom prst="rect">
+            <a:avLst/>
+          </a:prstGeom>
+          <a:noFill/>
+        </p:spPr>
+        <p:txBody>
+          <a:bodyPr wrap="square" anchor="t">
+            <a:spAutoFit/>
+          </a:bodyPr>
+          <a:lstStyle/>
+          <a:p>
+            <a:pPr algn="l"/>
+            <a:r>
+              <a:rPr sz="1150" b="0">
+                <a:solidFill>
+                  <a:srgbClr val="2F4858"/>
+                </a:solidFill>
+                <a:latin typeface="微软雅黑"/>
+                <a:ea typeface="微软雅黑"/>
+              </a:rPr>
+              <a:t>借力与落回</a:t>
+            </a:r>
+          </a:p>
+        </p:txBody>
+      </p:sp>
+      <p:sp>
+        <p:nvSpPr>
+          <p:cNvPr id="5" name="TextBox 4"/>
+          <p:cNvSpPr txBox="1"/>
+          <p:nvPr/>
+        </p:nvSpPr>
+        <p:spPr>
+          <a:xfrm>
+            <a:off x="914400" y="896112"/>
+            <a:ext cx="10360152" cy="685800"/>
+          </a:xfrm>
+          <a:prstGeom prst="rect">
+            <a:avLst/>
+          </a:prstGeom>
+          <a:noFill/>
+        </p:spPr>
+        <p:txBody>
+          <a:bodyPr wrap="square" anchor="t">
+            <a:spAutoFit/>
+          </a:bodyPr>
+          <a:lstStyle/>
+          <a:p>
+            <a:pPr algn="l"/>
+            <a:r>
+              <a:rPr sz="2800" b="0">
+                <a:solidFill>
+                  <a:srgbClr val="1B1B1B"/>
+                </a:solidFill>
+                <a:latin typeface="微软雅黑 Light"/>
+                <a:ea typeface="微软雅黑 Light"/>
+              </a:rPr>
+              <a:t>存在主义 × 马克思主义</a:t>
+            </a:r>
+          </a:p>
+        </p:txBody>
+      </p:sp>
+      <p:sp>
+        <p:nvSpPr>
           <p:cNvPr id="6" name="Rectangle 5"/>
           <p:cNvSpPr/>
           <p:nvPr/>
         </p:nvSpPr>
         <p:spPr>
           <a:xfrm>
-            <a:off x="6053328" y="2724912"/>
-            <a:ext cx="10972" cy="1298448"/>
+            <a:off x="914400" y="1645920"/>
+            <a:ext cx="10360152" cy="10972"/>
           </a:xfrm>
           <a:prstGeom prst="rect">
             <a:avLst/>
           </a:prstGeom>
           <a:solidFill>
-            <a:srgbClr val="D8D8D8"/>
+            <a:srgbClr val="DDE3E8"/>
           </a:solidFill>
           <a:ln>
             <a:noFill/>
@@ -7596,202 +9195,22 @@
       </p:sp>
       <p:sp>
         <p:nvSpPr>
-          <p:cNvPr id="7" name="TextBox 6"/>
-          <p:cNvSpPr txBox="1"/>
-          <p:nvPr/>
-        </p:nvSpPr>
-        <p:spPr>
-          <a:xfrm>
-            <a:off x="914400" y="2761488"/>
-            <a:ext cx="4846320" cy="2011680"/>
-          </a:xfrm>
-          <a:prstGeom prst="rect">
-            <a:avLst/>
-          </a:prstGeom>
-          <a:noFill/>
-        </p:spPr>
-        <p:txBody>
-          <a:bodyPr wrap="square" anchor="t">
-            <a:spAutoFit/>
-          </a:bodyPr>
-          <a:lstStyle/>
-          <a:p>
-            <a:pPr algn="l">
-              <a:spcAft>
-                <a:spcPts val="800"/>
-              </a:spcAft>
-            </a:pPr>
-            <a:r>
-              <a:rPr sz="1700" b="0">
-                <a:solidFill>
-                  <a:srgbClr val="3A5A70"/>
-                </a:solidFill>
-                <a:latin typeface="微软雅黑"/>
-                <a:ea typeface="微软雅黑"/>
-              </a:rPr>
-              <a:t>存在主义</a:t>
-            </a:r>
-          </a:p>
-          <a:p>
-            <a:pPr algn="l">
-              <a:lnSpc>
-                <a:spcPct val="150000"/>
-              </a:lnSpc>
-            </a:pPr>
-            <a:r>
-              <a:rPr sz="1500" b="0">
-                <a:solidFill>
-                  <a:srgbClr val="1B1B1B"/>
-                </a:solidFill>
-                <a:latin typeface="微软雅黑"/>
-                <a:ea typeface="微软雅黑"/>
-              </a:rPr>
-              <a:t>人是自由的</a:t>
-            </a:r>
-          </a:p>
-          <a:p>
-            <a:pPr algn="l">
-              <a:lnSpc>
-                <a:spcPct val="150000"/>
-              </a:lnSpc>
-            </a:pPr>
-            <a:r>
-              <a:rPr sz="1500" b="0">
-                <a:solidFill>
-                  <a:srgbClr val="1B1B1B"/>
-                </a:solidFill>
-                <a:latin typeface="微软雅黑"/>
-                <a:ea typeface="微软雅黑"/>
-              </a:rPr>
-              <a:t>自由地选择，自负其责</a:t>
-            </a:r>
-          </a:p>
-          <a:p>
-            <a:pPr algn="l">
-              <a:lnSpc>
-                <a:spcPct val="150000"/>
-              </a:lnSpc>
-            </a:pPr>
-            <a:r>
-              <a:rPr sz="1500" b="0">
-                <a:solidFill>
-                  <a:srgbClr val="1B1B1B"/>
-                </a:solidFill>
-                <a:latin typeface="微软雅黑"/>
-                <a:ea typeface="微软雅黑"/>
-              </a:rPr>
-              <a:t>不该活在别人的目光里</a:t>
-            </a:r>
-          </a:p>
-        </p:txBody>
-      </p:sp>
-      <p:sp>
-        <p:nvSpPr>
-          <p:cNvPr id="8" name="TextBox 7"/>
-          <p:cNvSpPr txBox="1"/>
-          <p:nvPr/>
-        </p:nvSpPr>
-        <p:spPr>
-          <a:xfrm>
-            <a:off x="6355080" y="2761488"/>
-            <a:ext cx="4937760" cy="2011680"/>
-          </a:xfrm>
-          <a:prstGeom prst="rect">
-            <a:avLst/>
-          </a:prstGeom>
-          <a:noFill/>
-        </p:spPr>
-        <p:txBody>
-          <a:bodyPr wrap="square" anchor="t">
-            <a:spAutoFit/>
-          </a:bodyPr>
-          <a:lstStyle/>
-          <a:p>
-            <a:pPr algn="l">
-              <a:spcAft>
-                <a:spcPts val="800"/>
-              </a:spcAft>
-            </a:pPr>
-            <a:r>
-              <a:rPr sz="1700" b="0">
-                <a:solidFill>
-                  <a:srgbClr val="3A5A70"/>
-                </a:solidFill>
-                <a:latin typeface="微软雅黑"/>
-                <a:ea typeface="微软雅黑"/>
-              </a:rPr>
-              <a:t>马克思主义</a:t>
-            </a:r>
-          </a:p>
-          <a:p>
-            <a:pPr algn="l">
-              <a:lnSpc>
-                <a:spcPct val="150000"/>
-              </a:lnSpc>
-            </a:pPr>
-            <a:r>
-              <a:rPr sz="1500" b="0">
-                <a:solidFill>
-                  <a:srgbClr val="1B1B1B"/>
-                </a:solidFill>
-                <a:latin typeface="微软雅黑"/>
-                <a:ea typeface="微软雅黑"/>
-              </a:rPr>
-              <a:t>人的本质是一切社会关系的总和</a:t>
-            </a:r>
-          </a:p>
-          <a:p>
-            <a:pPr algn="l">
-              <a:lnSpc>
-                <a:spcPct val="150000"/>
-              </a:lnSpc>
-            </a:pPr>
-            <a:r>
-              <a:rPr sz="1500" b="0">
-                <a:solidFill>
-                  <a:srgbClr val="1B1B1B"/>
-                </a:solidFill>
-                <a:latin typeface="微软雅黑"/>
-                <a:ea typeface="微软雅黑"/>
-              </a:rPr>
-              <a:t>个人价值与社会价值相统一</a:t>
-            </a:r>
-          </a:p>
-          <a:p>
-            <a:pPr algn="l">
-              <a:lnSpc>
-                <a:spcPct val="150000"/>
-              </a:lnSpc>
-            </a:pPr>
-            <a:r>
-              <a:rPr sz="1500" b="0">
-                <a:solidFill>
-                  <a:srgbClr val="1B1B1B"/>
-                </a:solidFill>
-                <a:latin typeface="微软雅黑"/>
-                <a:ea typeface="微软雅黑"/>
-              </a:rPr>
-              <a:t>我们不是孤岛</a:t>
-            </a:r>
-          </a:p>
-        </p:txBody>
-      </p:sp>
-      <p:sp>
-        <p:nvSpPr>
-          <p:cNvPr id="9" name="Rectangle 8"/>
+          <p:cNvPr id="7" name="Rounded Rectangle 6"/>
           <p:cNvSpPr/>
           <p:nvPr/>
         </p:nvSpPr>
         <p:spPr>
           <a:xfrm>
-            <a:off x="914400" y="4617720"/>
-            <a:ext cx="10360152" cy="10972"/>
-          </a:xfrm>
-          <a:prstGeom prst="rect">
-            <a:avLst/>
+            <a:off x="822960" y="2148840"/>
+            <a:ext cx="5074920" cy="2240280"/>
+          </a:xfrm>
+          <a:prstGeom prst="roundRect">
+            <a:avLst>
+              <a:gd name="adj" fmla="val 6000"/>
+            </a:avLst>
           </a:prstGeom>
           <a:solidFill>
-            <a:srgbClr val="D8D8D8"/>
+            <a:srgbClr val="EEF2F5"/>
           </a:solidFill>
           <a:ln>
             <a:noFill/>
@@ -7822,14 +9241,140 @@
       </p:sp>
       <p:sp>
         <p:nvSpPr>
+          <p:cNvPr id="8" name="Rectangle 7"/>
+          <p:cNvSpPr/>
+          <p:nvPr/>
+        </p:nvSpPr>
+        <p:spPr>
+          <a:xfrm>
+            <a:off x="822960" y="2148840"/>
+            <a:ext cx="64008" cy="2240280"/>
+          </a:xfrm>
+          <a:prstGeom prst="rect">
+            <a:avLst/>
+          </a:prstGeom>
+          <a:solidFill>
+            <a:srgbClr val="52798A"/>
+          </a:solidFill>
+          <a:ln>
+            <a:noFill/>
+          </a:ln>
+          <a:effectLst/>
+        </p:spPr>
+        <p:style>
+          <a:lnRef idx="1">
+            <a:schemeClr val="accent1"/>
+          </a:lnRef>
+          <a:fillRef idx="3">
+            <a:schemeClr val="accent1"/>
+          </a:fillRef>
+          <a:effectRef idx="2">
+            <a:schemeClr val="accent1"/>
+          </a:effectRef>
+          <a:fontRef idx="minor">
+            <a:schemeClr val="lt1"/>
+          </a:fontRef>
+        </p:style>
+        <p:txBody>
+          <a:bodyPr rtlCol="0" anchor="ctr"/>
+          <a:lstStyle/>
+          <a:p>
+            <a:pPr algn="ctr"/>
+          </a:p>
+        </p:txBody>
+      </p:sp>
+      <p:sp>
+        <p:nvSpPr>
+          <p:cNvPr id="9" name="Rounded Rectangle 8"/>
+          <p:cNvSpPr/>
+          <p:nvPr/>
+        </p:nvSpPr>
+        <p:spPr>
+          <a:xfrm>
+            <a:off x="1143000" y="2359152"/>
+            <a:ext cx="1417320" cy="411480"/>
+          </a:xfrm>
+          <a:prstGeom prst="roundRect">
+            <a:avLst>
+              <a:gd name="adj" fmla="val 20000"/>
+            </a:avLst>
+          </a:prstGeom>
+          <a:solidFill>
+            <a:srgbClr val="2F4858"/>
+          </a:solidFill>
+          <a:ln>
+            <a:noFill/>
+          </a:ln>
+          <a:effectLst/>
+        </p:spPr>
+        <p:style>
+          <a:lnRef idx="1">
+            <a:schemeClr val="accent1"/>
+          </a:lnRef>
+          <a:fillRef idx="3">
+            <a:schemeClr val="accent1"/>
+          </a:fillRef>
+          <a:effectRef idx="2">
+            <a:schemeClr val="accent1"/>
+          </a:effectRef>
+          <a:fontRef idx="minor">
+            <a:schemeClr val="lt1"/>
+          </a:fontRef>
+        </p:style>
+        <p:txBody>
+          <a:bodyPr rtlCol="0" anchor="ctr"/>
+          <a:lstStyle/>
+          <a:p>
+            <a:pPr algn="ctr"/>
+          </a:p>
+        </p:txBody>
+      </p:sp>
+      <p:sp>
+        <p:nvSpPr>
           <p:cNvPr id="10" name="TextBox 9"/>
           <p:cNvSpPr txBox="1"/>
           <p:nvPr/>
         </p:nvSpPr>
         <p:spPr>
           <a:xfrm>
-            <a:off x="914400" y="4846320"/>
-            <a:ext cx="10332720" cy="914400"/>
+            <a:off x="1143000" y="2359152"/>
+            <a:ext cx="1417320" cy="411480"/>
+          </a:xfrm>
+          <a:prstGeom prst="rect">
+            <a:avLst/>
+          </a:prstGeom>
+          <a:noFill/>
+        </p:spPr>
+        <p:txBody>
+          <a:bodyPr wrap="square" anchor="ctr">
+            <a:spAutoFit/>
+          </a:bodyPr>
+          <a:lstStyle/>
+          <a:p>
+            <a:pPr algn="ctr"/>
+            <a:r>
+              <a:rPr sz="1300" b="0">
+                <a:solidFill>
+                  <a:srgbClr val="FFFFFF"/>
+                </a:solidFill>
+                <a:latin typeface="微软雅黑"/>
+                <a:ea typeface="微软雅黑"/>
+              </a:rPr>
+              <a:t>存在主义</a:t>
+            </a:r>
+          </a:p>
+        </p:txBody>
+      </p:sp>
+      <p:sp>
+        <p:nvSpPr>
+          <p:cNvPr id="11" name="TextBox 10"/>
+          <p:cNvSpPr txBox="1"/>
+          <p:nvPr/>
+        </p:nvSpPr>
+        <p:spPr>
+          <a:xfrm>
+            <a:off x="1143000" y="2926080"/>
+            <a:ext cx="4663440" cy="1371600"/>
           </a:xfrm>
           <a:prstGeom prst="rect">
             <a:avLst/>
@@ -7844,13 +9389,419 @@
           <a:p>
             <a:pPr algn="l">
               <a:lnSpc>
-                <a:spcPct val="130000"/>
+                <a:spcPct val="135000"/>
               </a:lnSpc>
             </a:pPr>
             <a:r>
-              <a:rPr sz="1800" b="0">
-                <a:solidFill>
-                  <a:srgbClr val="3A5A70"/>
+              <a:rPr sz="1450" b="0">
+                <a:solidFill>
+                  <a:srgbClr val="1B1B1B"/>
+                </a:solidFill>
+                <a:latin typeface="微软雅黑"/>
+                <a:ea typeface="微软雅黑"/>
+              </a:rPr>
+              <a:t>人是自由的</a:t>
+            </a:r>
+          </a:p>
+          <a:p>
+            <a:pPr algn="l">
+              <a:lnSpc>
+                <a:spcPct val="135000"/>
+              </a:lnSpc>
+            </a:pPr>
+            <a:r>
+              <a:rPr sz="1450" b="0">
+                <a:solidFill>
+                  <a:srgbClr val="1B1B1B"/>
+                </a:solidFill>
+                <a:latin typeface="微软雅黑"/>
+                <a:ea typeface="微软雅黑"/>
+              </a:rPr>
+              <a:t>自由地选择，自负其责</a:t>
+            </a:r>
+          </a:p>
+          <a:p>
+            <a:pPr algn="l">
+              <a:lnSpc>
+                <a:spcPct val="135000"/>
+              </a:lnSpc>
+            </a:pPr>
+            <a:r>
+              <a:rPr sz="1450" b="0">
+                <a:solidFill>
+                  <a:srgbClr val="1B1B1B"/>
+                </a:solidFill>
+                <a:latin typeface="微软雅黑"/>
+                <a:ea typeface="微软雅黑"/>
+              </a:rPr>
+              <a:t>不该活在别人的目光里</a:t>
+            </a:r>
+          </a:p>
+        </p:txBody>
+      </p:sp>
+      <p:sp>
+        <p:nvSpPr>
+          <p:cNvPr id="12" name="Rounded Rectangle 11"/>
+          <p:cNvSpPr/>
+          <p:nvPr/>
+        </p:nvSpPr>
+        <p:spPr>
+          <a:xfrm>
+            <a:off x="6345936" y="2148840"/>
+            <a:ext cx="5074920" cy="2240280"/>
+          </a:xfrm>
+          <a:prstGeom prst="roundRect">
+            <a:avLst>
+              <a:gd name="adj" fmla="val 6000"/>
+            </a:avLst>
+          </a:prstGeom>
+          <a:solidFill>
+            <a:srgbClr val="EEF2F5"/>
+          </a:solidFill>
+          <a:ln>
+            <a:noFill/>
+          </a:ln>
+          <a:effectLst/>
+        </p:spPr>
+        <p:style>
+          <a:lnRef idx="1">
+            <a:schemeClr val="accent1"/>
+          </a:lnRef>
+          <a:fillRef idx="3">
+            <a:schemeClr val="accent1"/>
+          </a:fillRef>
+          <a:effectRef idx="2">
+            <a:schemeClr val="accent1"/>
+          </a:effectRef>
+          <a:fontRef idx="minor">
+            <a:schemeClr val="lt1"/>
+          </a:fontRef>
+        </p:style>
+        <p:txBody>
+          <a:bodyPr rtlCol="0" anchor="ctr"/>
+          <a:lstStyle/>
+          <a:p>
+            <a:pPr algn="ctr"/>
+          </a:p>
+        </p:txBody>
+      </p:sp>
+      <p:sp>
+        <p:nvSpPr>
+          <p:cNvPr id="13" name="Rectangle 12"/>
+          <p:cNvSpPr/>
+          <p:nvPr/>
+        </p:nvSpPr>
+        <p:spPr>
+          <a:xfrm>
+            <a:off x="6345936" y="2148840"/>
+            <a:ext cx="64008" cy="2240280"/>
+          </a:xfrm>
+          <a:prstGeom prst="rect">
+            <a:avLst/>
+          </a:prstGeom>
+          <a:solidFill>
+            <a:srgbClr val="52798A"/>
+          </a:solidFill>
+          <a:ln>
+            <a:noFill/>
+          </a:ln>
+          <a:effectLst/>
+        </p:spPr>
+        <p:style>
+          <a:lnRef idx="1">
+            <a:schemeClr val="accent1"/>
+          </a:lnRef>
+          <a:fillRef idx="3">
+            <a:schemeClr val="accent1"/>
+          </a:fillRef>
+          <a:effectRef idx="2">
+            <a:schemeClr val="accent1"/>
+          </a:effectRef>
+          <a:fontRef idx="minor">
+            <a:schemeClr val="lt1"/>
+          </a:fontRef>
+        </p:style>
+        <p:txBody>
+          <a:bodyPr rtlCol="0" anchor="ctr"/>
+          <a:lstStyle/>
+          <a:p>
+            <a:pPr algn="ctr"/>
+          </a:p>
+        </p:txBody>
+      </p:sp>
+      <p:sp>
+        <p:nvSpPr>
+          <p:cNvPr id="14" name="Rounded Rectangle 13"/>
+          <p:cNvSpPr/>
+          <p:nvPr/>
+        </p:nvSpPr>
+        <p:spPr>
+          <a:xfrm>
+            <a:off x="6665976" y="2359152"/>
+            <a:ext cx="1691640" cy="411480"/>
+          </a:xfrm>
+          <a:prstGeom prst="roundRect">
+            <a:avLst>
+              <a:gd name="adj" fmla="val 20000"/>
+            </a:avLst>
+          </a:prstGeom>
+          <a:solidFill>
+            <a:srgbClr val="2F4858"/>
+          </a:solidFill>
+          <a:ln>
+            <a:noFill/>
+          </a:ln>
+          <a:effectLst/>
+        </p:spPr>
+        <p:style>
+          <a:lnRef idx="1">
+            <a:schemeClr val="accent1"/>
+          </a:lnRef>
+          <a:fillRef idx="3">
+            <a:schemeClr val="accent1"/>
+          </a:fillRef>
+          <a:effectRef idx="2">
+            <a:schemeClr val="accent1"/>
+          </a:effectRef>
+          <a:fontRef idx="minor">
+            <a:schemeClr val="lt1"/>
+          </a:fontRef>
+        </p:style>
+        <p:txBody>
+          <a:bodyPr rtlCol="0" anchor="ctr"/>
+          <a:lstStyle/>
+          <a:p>
+            <a:pPr algn="ctr"/>
+          </a:p>
+        </p:txBody>
+      </p:sp>
+      <p:sp>
+        <p:nvSpPr>
+          <p:cNvPr id="15" name="TextBox 14"/>
+          <p:cNvSpPr txBox="1"/>
+          <p:nvPr/>
+        </p:nvSpPr>
+        <p:spPr>
+          <a:xfrm>
+            <a:off x="6665976" y="2359152"/>
+            <a:ext cx="1691640" cy="411480"/>
+          </a:xfrm>
+          <a:prstGeom prst="rect">
+            <a:avLst/>
+          </a:prstGeom>
+          <a:noFill/>
+        </p:spPr>
+        <p:txBody>
+          <a:bodyPr wrap="square" anchor="ctr">
+            <a:spAutoFit/>
+          </a:bodyPr>
+          <a:lstStyle/>
+          <a:p>
+            <a:pPr algn="ctr"/>
+            <a:r>
+              <a:rPr sz="1300" b="0">
+                <a:solidFill>
+                  <a:srgbClr val="FFFFFF"/>
+                </a:solidFill>
+                <a:latin typeface="微软雅黑"/>
+                <a:ea typeface="微软雅黑"/>
+              </a:rPr>
+              <a:t>马克思主义</a:t>
+            </a:r>
+          </a:p>
+        </p:txBody>
+      </p:sp>
+      <p:sp>
+        <p:nvSpPr>
+          <p:cNvPr id="16" name="TextBox 15"/>
+          <p:cNvSpPr txBox="1"/>
+          <p:nvPr/>
+        </p:nvSpPr>
+        <p:spPr>
+          <a:xfrm>
+            <a:off x="6665976" y="2926080"/>
+            <a:ext cx="4663440" cy="1371600"/>
+          </a:xfrm>
+          <a:prstGeom prst="rect">
+            <a:avLst/>
+          </a:prstGeom>
+          <a:noFill/>
+        </p:spPr>
+        <p:txBody>
+          <a:bodyPr wrap="square" anchor="t">
+            <a:spAutoFit/>
+          </a:bodyPr>
+          <a:lstStyle/>
+          <a:p>
+            <a:pPr algn="l">
+              <a:lnSpc>
+                <a:spcPct val="135000"/>
+              </a:lnSpc>
+            </a:pPr>
+            <a:r>
+              <a:rPr sz="1450" b="0">
+                <a:solidFill>
+                  <a:srgbClr val="1B1B1B"/>
+                </a:solidFill>
+                <a:latin typeface="微软雅黑"/>
+                <a:ea typeface="微软雅黑"/>
+              </a:rPr>
+              <a:t>人的本质是一切社会关系的总和</a:t>
+            </a:r>
+          </a:p>
+          <a:p>
+            <a:pPr algn="l">
+              <a:lnSpc>
+                <a:spcPct val="135000"/>
+              </a:lnSpc>
+            </a:pPr>
+            <a:r>
+              <a:rPr sz="1450" b="0">
+                <a:solidFill>
+                  <a:srgbClr val="1B1B1B"/>
+                </a:solidFill>
+                <a:latin typeface="微软雅黑"/>
+                <a:ea typeface="微软雅黑"/>
+              </a:rPr>
+              <a:t>个人价值与社会价值相统一</a:t>
+            </a:r>
+          </a:p>
+          <a:p>
+            <a:pPr algn="l">
+              <a:lnSpc>
+                <a:spcPct val="135000"/>
+              </a:lnSpc>
+            </a:pPr>
+            <a:r>
+              <a:rPr sz="1450" b="0">
+                <a:solidFill>
+                  <a:srgbClr val="1B1B1B"/>
+                </a:solidFill>
+                <a:latin typeface="微软雅黑"/>
+                <a:ea typeface="微软雅黑"/>
+              </a:rPr>
+              <a:t>我们不是孤岛</a:t>
+            </a:r>
+          </a:p>
+        </p:txBody>
+      </p:sp>
+      <p:sp>
+        <p:nvSpPr>
+          <p:cNvPr id="17" name="Rounded Rectangle 16"/>
+          <p:cNvSpPr/>
+          <p:nvPr/>
+        </p:nvSpPr>
+        <p:spPr>
+          <a:xfrm>
+            <a:off x="822960" y="4663440"/>
+            <a:ext cx="10543032" cy="868680"/>
+          </a:xfrm>
+          <a:prstGeom prst="roundRect">
+            <a:avLst>
+              <a:gd name="adj" fmla="val 10000"/>
+            </a:avLst>
+          </a:prstGeom>
+          <a:solidFill>
+            <a:srgbClr val="EEF2F5"/>
+          </a:solidFill>
+          <a:ln>
+            <a:noFill/>
+          </a:ln>
+          <a:effectLst/>
+        </p:spPr>
+        <p:style>
+          <a:lnRef idx="1">
+            <a:schemeClr val="accent1"/>
+          </a:lnRef>
+          <a:fillRef idx="3">
+            <a:schemeClr val="accent1"/>
+          </a:fillRef>
+          <a:effectRef idx="2">
+            <a:schemeClr val="accent1"/>
+          </a:effectRef>
+          <a:fontRef idx="minor">
+            <a:schemeClr val="lt1"/>
+          </a:fontRef>
+        </p:style>
+        <p:txBody>
+          <a:bodyPr rtlCol="0" anchor="ctr"/>
+          <a:lstStyle/>
+          <a:p>
+            <a:pPr algn="ctr"/>
+          </a:p>
+        </p:txBody>
+      </p:sp>
+      <p:sp>
+        <p:nvSpPr>
+          <p:cNvPr id="18" name="Rectangle 17"/>
+          <p:cNvSpPr/>
+          <p:nvPr/>
+        </p:nvSpPr>
+        <p:spPr>
+          <a:xfrm>
+            <a:off x="822960" y="4663440"/>
+            <a:ext cx="64008" cy="868680"/>
+          </a:xfrm>
+          <a:prstGeom prst="rect">
+            <a:avLst/>
+          </a:prstGeom>
+          <a:solidFill>
+            <a:srgbClr val="52798A"/>
+          </a:solidFill>
+          <a:ln>
+            <a:noFill/>
+          </a:ln>
+          <a:effectLst/>
+        </p:spPr>
+        <p:style>
+          <a:lnRef idx="1">
+            <a:schemeClr val="accent1"/>
+          </a:lnRef>
+          <a:fillRef idx="3">
+            <a:schemeClr val="accent1"/>
+          </a:fillRef>
+          <a:effectRef idx="2">
+            <a:schemeClr val="accent1"/>
+          </a:effectRef>
+          <a:fontRef idx="minor">
+            <a:schemeClr val="lt1"/>
+          </a:fontRef>
+        </p:style>
+        <p:txBody>
+          <a:bodyPr rtlCol="0" anchor="ctr"/>
+          <a:lstStyle/>
+          <a:p>
+            <a:pPr algn="ctr"/>
+          </a:p>
+        </p:txBody>
+      </p:sp>
+      <p:sp>
+        <p:nvSpPr>
+          <p:cNvPr id="19" name="TextBox 18"/>
+          <p:cNvSpPr txBox="1"/>
+          <p:nvPr/>
+        </p:nvSpPr>
+        <p:spPr>
+          <a:xfrm>
+            <a:off x="1143000" y="4828032"/>
+            <a:ext cx="9966960" cy="640080"/>
+          </a:xfrm>
+          <a:prstGeom prst="rect">
+            <a:avLst/>
+          </a:prstGeom>
+          <a:noFill/>
+        </p:spPr>
+        <p:txBody>
+          <a:bodyPr wrap="square" anchor="t">
+            <a:spAutoFit/>
+          </a:bodyPr>
+          <a:lstStyle/>
+          <a:p>
+            <a:pPr algn="l"/>
+            <a:r>
+              <a:rPr sz="1650" b="0">
+                <a:solidFill>
+                  <a:srgbClr val="2F4858"/>
                 </a:solidFill>
                 <a:latin typeface="微软雅黑 Light"/>
                 <a:ea typeface="微软雅黑 Light"/>
@@ -7862,14 +9813,58 @@
       </p:sp>
       <p:sp>
         <p:nvSpPr>
-          <p:cNvPr id="11" name="TextBox 10"/>
+          <p:cNvPr id="20" name="Rectangle 19"/>
+          <p:cNvSpPr/>
+          <p:nvPr/>
+        </p:nvSpPr>
+        <p:spPr>
+          <a:xfrm>
+            <a:off x="914400" y="6327648"/>
+            <a:ext cx="10360152" cy="7315"/>
+          </a:xfrm>
+          <a:prstGeom prst="rect">
+            <a:avLst/>
+          </a:prstGeom>
+          <a:solidFill>
+            <a:srgbClr val="DDE3E8"/>
+          </a:solidFill>
+          <a:ln>
+            <a:noFill/>
+          </a:ln>
+          <a:effectLst/>
+        </p:spPr>
+        <p:style>
+          <a:lnRef idx="1">
+            <a:schemeClr val="accent1"/>
+          </a:lnRef>
+          <a:fillRef idx="3">
+            <a:schemeClr val="accent1"/>
+          </a:fillRef>
+          <a:effectRef idx="2">
+            <a:schemeClr val="accent1"/>
+          </a:effectRef>
+          <a:fontRef idx="minor">
+            <a:schemeClr val="lt1"/>
+          </a:fontRef>
+        </p:style>
+        <p:txBody>
+          <a:bodyPr rtlCol="0" anchor="ctr"/>
+          <a:lstStyle/>
+          <a:p>
+            <a:pPr algn="ctr"/>
+          </a:p>
+        </p:txBody>
+      </p:sp>
+      <p:sp>
+        <p:nvSpPr>
+          <p:cNvPr id="21" name="TextBox 20"/>
           <p:cNvSpPr txBox="1"/>
           <p:nvPr/>
         </p:nvSpPr>
         <p:spPr>
           <a:xfrm>
-            <a:off x="10424160" y="6327648"/>
-            <a:ext cx="850392" cy="320040"/>
+            <a:off x="914400" y="6400800"/>
+            <a:ext cx="4572000" cy="320040"/>
           </a:xfrm>
           <a:prstGeom prst="rect">
             <a:avLst/>
@@ -7882,11 +9877,47 @@
           </a:bodyPr>
           <a:lstStyle/>
           <a:p>
+            <a:pPr algn="l"/>
+            <a:r>
+              <a:rPr sz="950" b="0">
+                <a:solidFill>
+                  <a:srgbClr val="98A2AB"/>
+                </a:solidFill>
+                <a:latin typeface="微软雅黑"/>
+                <a:ea typeface="微软雅黑"/>
+              </a:rPr>
+              <a:t>创造有意义的人生</a:t>
+            </a:r>
+          </a:p>
+        </p:txBody>
+      </p:sp>
+      <p:sp>
+        <p:nvSpPr>
+          <p:cNvPr id="22" name="TextBox 21"/>
+          <p:cNvSpPr txBox="1"/>
+          <p:nvPr/>
+        </p:nvSpPr>
+        <p:spPr>
+          <a:xfrm>
+            <a:off x="10360152" y="6400800"/>
+            <a:ext cx="914400" cy="320040"/>
+          </a:xfrm>
+          <a:prstGeom prst="rect">
+            <a:avLst/>
+          </a:prstGeom>
+          <a:noFill/>
+        </p:spPr>
+        <p:txBody>
+          <a:bodyPr wrap="square" anchor="t">
+            <a:spAutoFit/>
+          </a:bodyPr>
+          <a:lstStyle/>
+          <a:p>
             <a:pPr algn="r"/>
             <a:r>
-              <a:rPr sz="1050" b="0">
-                <a:solidFill>
-                  <a:srgbClr val="9A9A9A"/>
+              <a:rPr sz="1000" b="0">
+                <a:solidFill>
+                  <a:srgbClr val="98A2AB"/>
                 </a:solidFill>
                 <a:latin typeface="微软雅黑"/>
                 <a:ea typeface="微软雅黑"/>
@@ -7923,13 +9954,13 @@
         <p:spPr>
           <a:xfrm>
             <a:off x="0" y="0"/>
-            <a:ext cx="12191695" cy="6858000"/>
+            <a:ext cx="128016" cy="6858000"/>
           </a:xfrm>
           <a:prstGeom prst="rect">
             <a:avLst/>
           </a:prstGeom>
           <a:solidFill>
-            <a:srgbClr val="FFFFFF"/>
+            <a:srgbClr val="2F4858"/>
           </a:solidFill>
           <a:ln>
             <a:noFill/>
@@ -7960,92 +9991,20 @@
       </p:sp>
       <p:sp>
         <p:nvSpPr>
-          <p:cNvPr id="3" name="TextBox 2"/>
-          <p:cNvSpPr txBox="1"/>
-          <p:nvPr/>
-        </p:nvSpPr>
-        <p:spPr>
-          <a:xfrm>
-            <a:off x="914400" y="640080"/>
-            <a:ext cx="10332720" cy="320040"/>
-          </a:xfrm>
-          <a:prstGeom prst="rect">
-            <a:avLst/>
-          </a:prstGeom>
-          <a:noFill/>
-        </p:spPr>
-        <p:txBody>
-          <a:bodyPr wrap="square" anchor="t">
-            <a:spAutoFit/>
-          </a:bodyPr>
-          <a:lstStyle/>
-          <a:p>
-            <a:pPr algn="l"/>
-            <a:r>
-              <a:rPr sz="1150" b="0">
-                <a:solidFill>
-                  <a:srgbClr val="3A5A70"/>
-                </a:solidFill>
-                <a:latin typeface="微软雅黑"/>
-                <a:ea typeface="微软雅黑"/>
-              </a:rPr>
-              <a:t>我的路</a:t>
-            </a:r>
-          </a:p>
-        </p:txBody>
-      </p:sp>
-      <p:sp>
-        <p:nvSpPr>
-          <p:cNvPr id="4" name="TextBox 3"/>
-          <p:cNvSpPr txBox="1"/>
-          <p:nvPr/>
-        </p:nvSpPr>
-        <p:spPr>
-          <a:xfrm>
-            <a:off x="914400" y="914400"/>
-            <a:ext cx="10332720" cy="685800"/>
-          </a:xfrm>
-          <a:prstGeom prst="rect">
-            <a:avLst/>
-          </a:prstGeom>
-          <a:noFill/>
-        </p:spPr>
-        <p:txBody>
-          <a:bodyPr wrap="square" anchor="t">
-            <a:spAutoFit/>
-          </a:bodyPr>
-          <a:lstStyle/>
-          <a:p>
-            <a:pPr algn="l"/>
-            <a:r>
-              <a:rPr sz="2900" b="0">
-                <a:solidFill>
-                  <a:srgbClr val="1B1B1B"/>
-                </a:solidFill>
-                <a:latin typeface="微软雅黑 Light"/>
-                <a:ea typeface="微软雅黑 Light"/>
-              </a:rPr>
-              <a:t>三条线，同一个起点</a:t>
-            </a:r>
-          </a:p>
-        </p:txBody>
-      </p:sp>
-      <p:sp>
-        <p:nvSpPr>
-          <p:cNvPr id="5" name="Rectangle 4"/>
+          <p:cNvPr id="3" name="Rectangle 2"/>
           <p:cNvSpPr/>
           <p:nvPr/>
         </p:nvSpPr>
         <p:spPr>
           <a:xfrm>
-            <a:off x="914400" y="1673352"/>
-            <a:ext cx="10360152" cy="10972"/>
+            <a:off x="914400" y="676656"/>
+            <a:ext cx="118872" cy="118872"/>
           </a:xfrm>
           <a:prstGeom prst="rect">
             <a:avLst/>
           </a:prstGeom>
           <a:solidFill>
-            <a:srgbClr val="D8D8D8"/>
+            <a:srgbClr val="52798A"/>
           </a:solidFill>
           <a:ln>
             <a:noFill/>
@@ -8076,14 +10035,14 @@
       </p:sp>
       <p:sp>
         <p:nvSpPr>
-          <p:cNvPr id="6" name="TextBox 5"/>
+          <p:cNvPr id="4" name="TextBox 3"/>
           <p:cNvSpPr txBox="1"/>
           <p:nvPr/>
         </p:nvSpPr>
         <p:spPr>
           <a:xfrm>
-            <a:off x="914400" y="2240280"/>
-            <a:ext cx="9875520" cy="502920"/>
+            <a:off x="1133856" y="621792"/>
+            <a:ext cx="8229600" cy="320040"/>
           </a:xfrm>
           <a:prstGeom prst="rect">
             <a:avLst/>
@@ -8098,70 +10057,70 @@
           <a:p>
             <a:pPr algn="l"/>
             <a:r>
-              <a:rPr sz="2200" b="0">
+              <a:rPr sz="1150" b="0">
+                <a:solidFill>
+                  <a:srgbClr val="2F4858"/>
+                </a:solidFill>
+                <a:latin typeface="微软雅黑"/>
+                <a:ea typeface="微软雅黑"/>
+              </a:rPr>
+              <a:t>我的路</a:t>
+            </a:r>
+          </a:p>
+        </p:txBody>
+      </p:sp>
+      <p:sp>
+        <p:nvSpPr>
+          <p:cNvPr id="5" name="TextBox 4"/>
+          <p:cNvSpPr txBox="1"/>
+          <p:nvPr/>
+        </p:nvSpPr>
+        <p:spPr>
+          <a:xfrm>
+            <a:off x="914400" y="896112"/>
+            <a:ext cx="10360152" cy="685800"/>
+          </a:xfrm>
+          <a:prstGeom prst="rect">
+            <a:avLst/>
+          </a:prstGeom>
+          <a:noFill/>
+        </p:spPr>
+        <p:txBody>
+          <a:bodyPr wrap="square" anchor="t">
+            <a:spAutoFit/>
+          </a:bodyPr>
+          <a:lstStyle/>
+          <a:p>
+            <a:pPr algn="l"/>
+            <a:r>
+              <a:rPr sz="2800" b="0">
                 <a:solidFill>
                   <a:srgbClr val="1B1B1B"/>
                 </a:solidFill>
                 <a:latin typeface="微软雅黑 Light"/>
                 <a:ea typeface="微软雅黑 Light"/>
               </a:rPr>
-              <a:t>动画</a:t>
-            </a:r>
-          </a:p>
-        </p:txBody>
-      </p:sp>
-      <p:sp>
-        <p:nvSpPr>
-          <p:cNvPr id="7" name="TextBox 6"/>
-          <p:cNvSpPr txBox="1"/>
-          <p:nvPr/>
-        </p:nvSpPr>
-        <p:spPr>
-          <a:xfrm>
-            <a:off x="914400" y="2807208"/>
-            <a:ext cx="9875520" cy="365760"/>
-          </a:xfrm>
-          <a:prstGeom prst="rect">
-            <a:avLst/>
-          </a:prstGeom>
-          <a:noFill/>
-        </p:spPr>
-        <p:txBody>
-          <a:bodyPr wrap="square" anchor="t">
-            <a:spAutoFit/>
-          </a:bodyPr>
-          <a:lstStyle/>
-          <a:p>
-            <a:pPr algn="l"/>
-            <a:r>
-              <a:rPr sz="1400" b="0">
-                <a:solidFill>
-                  <a:srgbClr val="6B6B6B"/>
-                </a:solidFill>
-                <a:latin typeface="微软雅黑"/>
-                <a:ea typeface="微软雅黑"/>
-              </a:rPr>
-              <a:t>在其中感受到纯粹的快乐、荒诞与美好带来的意义</a:t>
-            </a:r>
-          </a:p>
-        </p:txBody>
-      </p:sp>
-      <p:sp>
-        <p:nvSpPr>
-          <p:cNvPr id="8" name="Rectangle 7"/>
+              <a:t>三条线，同一个起点</a:t>
+            </a:r>
+          </a:p>
+        </p:txBody>
+      </p:sp>
+      <p:sp>
+        <p:nvSpPr>
+          <p:cNvPr id="6" name="Rectangle 5"/>
           <p:cNvSpPr/>
           <p:nvPr/>
         </p:nvSpPr>
         <p:spPr>
           <a:xfrm>
-            <a:off x="914400" y="3319272"/>
+            <a:off x="914400" y="1645920"/>
             <a:ext cx="10360152" cy="10972"/>
           </a:xfrm>
           <a:prstGeom prst="rect">
             <a:avLst/>
           </a:prstGeom>
           <a:solidFill>
-            <a:srgbClr val="D8D8D8"/>
+            <a:srgbClr val="DDE3E8"/>
           </a:solidFill>
           <a:ln>
             <a:noFill/>
@@ -8192,92 +10151,22 @@
       </p:sp>
       <p:sp>
         <p:nvSpPr>
-          <p:cNvPr id="9" name="TextBox 8"/>
-          <p:cNvSpPr txBox="1"/>
-          <p:nvPr/>
-        </p:nvSpPr>
-        <p:spPr>
-          <a:xfrm>
-            <a:off x="914400" y="3538728"/>
-            <a:ext cx="9875520" cy="502920"/>
-          </a:xfrm>
-          <a:prstGeom prst="rect">
-            <a:avLst/>
-          </a:prstGeom>
-          <a:noFill/>
-        </p:spPr>
-        <p:txBody>
-          <a:bodyPr wrap="square" anchor="t">
-            <a:spAutoFit/>
-          </a:bodyPr>
-          <a:lstStyle/>
-          <a:p>
-            <a:pPr algn="l"/>
-            <a:r>
-              <a:rPr sz="2200" b="0">
-                <a:solidFill>
-                  <a:srgbClr val="1B1B1B"/>
-                </a:solidFill>
-                <a:latin typeface="微软雅黑 Light"/>
-                <a:ea typeface="微软雅黑 Light"/>
-              </a:rPr>
-              <a:t>哲学</a:t>
-            </a:r>
-          </a:p>
-        </p:txBody>
-      </p:sp>
-      <p:sp>
-        <p:nvSpPr>
-          <p:cNvPr id="10" name="TextBox 9"/>
-          <p:cNvSpPr txBox="1"/>
-          <p:nvPr/>
-        </p:nvSpPr>
-        <p:spPr>
-          <a:xfrm>
-            <a:off x="914400" y="4105656"/>
-            <a:ext cx="9875520" cy="365760"/>
-          </a:xfrm>
-          <a:prstGeom prst="rect">
-            <a:avLst/>
-          </a:prstGeom>
-          <a:noFill/>
-        </p:spPr>
-        <p:txBody>
-          <a:bodyPr wrap="square" anchor="t">
-            <a:spAutoFit/>
-          </a:bodyPr>
-          <a:lstStyle/>
-          <a:p>
-            <a:pPr algn="l"/>
-            <a:r>
-              <a:rPr sz="1400" b="0">
-                <a:solidFill>
-                  <a:srgbClr val="6B6B6B"/>
-                </a:solidFill>
-                <a:latin typeface="微软雅黑"/>
-                <a:ea typeface="微软雅黑"/>
-              </a:rPr>
-              <a:t>因为想弄懂人与这个世界</a:t>
-            </a:r>
-          </a:p>
-        </p:txBody>
-      </p:sp>
-      <p:sp>
-        <p:nvSpPr>
-          <p:cNvPr id="11" name="Rectangle 10"/>
+          <p:cNvPr id="7" name="Rounded Rectangle 6"/>
           <p:cNvSpPr/>
           <p:nvPr/>
         </p:nvSpPr>
         <p:spPr>
           <a:xfrm>
-            <a:off x="914400" y="4617720"/>
-            <a:ext cx="10360152" cy="10972"/>
-          </a:xfrm>
-          <a:prstGeom prst="rect">
-            <a:avLst/>
+            <a:off x="914400" y="2148839"/>
+            <a:ext cx="457200" cy="457200"/>
+          </a:xfrm>
+          <a:prstGeom prst="roundRect">
+            <a:avLst>
+              <a:gd name="adj" fmla="val 22000"/>
+            </a:avLst>
           </a:prstGeom>
           <a:solidFill>
-            <a:srgbClr val="D8D8D8"/>
+            <a:srgbClr val="52798A"/>
           </a:solidFill>
           <a:ln>
             <a:noFill/>
@@ -8308,14 +10197,14 @@
       </p:sp>
       <p:sp>
         <p:nvSpPr>
-          <p:cNvPr id="12" name="TextBox 11"/>
+          <p:cNvPr id="8" name="TextBox 7"/>
           <p:cNvSpPr txBox="1"/>
           <p:nvPr/>
         </p:nvSpPr>
         <p:spPr>
           <a:xfrm>
-            <a:off x="914400" y="4837176"/>
-            <a:ext cx="9875520" cy="502920"/>
+            <a:off x="1554480" y="2066543"/>
+            <a:ext cx="9509760" cy="502920"/>
           </a:xfrm>
           <a:prstGeom prst="rect">
             <a:avLst/>
@@ -8330,7 +10219,331 @@
           <a:p>
             <a:pPr algn="l"/>
             <a:r>
-              <a:rPr sz="2200" b="0">
+              <a:rPr sz="2100" b="0">
+                <a:solidFill>
+                  <a:srgbClr val="1B1B1B"/>
+                </a:solidFill>
+                <a:latin typeface="微软雅黑 Light"/>
+                <a:ea typeface="微软雅黑 Light"/>
+              </a:rPr>
+              <a:t>动画</a:t>
+            </a:r>
+          </a:p>
+        </p:txBody>
+      </p:sp>
+      <p:sp>
+        <p:nvSpPr>
+          <p:cNvPr id="9" name="TextBox 8"/>
+          <p:cNvSpPr txBox="1"/>
+          <p:nvPr/>
+        </p:nvSpPr>
+        <p:spPr>
+          <a:xfrm>
+            <a:off x="1554480" y="2633472"/>
+            <a:ext cx="9509760" cy="365760"/>
+          </a:xfrm>
+          <a:prstGeom prst="rect">
+            <a:avLst/>
+          </a:prstGeom>
+          <a:noFill/>
+        </p:spPr>
+        <p:txBody>
+          <a:bodyPr wrap="square" anchor="t">
+            <a:spAutoFit/>
+          </a:bodyPr>
+          <a:lstStyle/>
+          <a:p>
+            <a:pPr algn="l"/>
+            <a:r>
+              <a:rPr sz="1350" b="0">
+                <a:solidFill>
+                  <a:srgbClr val="5F6B76"/>
+                </a:solidFill>
+                <a:latin typeface="微软雅黑"/>
+                <a:ea typeface="微软雅黑"/>
+              </a:rPr>
+              <a:t>在其中感受到纯粹的快乐、荒诞与美好带来的意义</a:t>
+            </a:r>
+          </a:p>
+        </p:txBody>
+      </p:sp>
+      <p:sp>
+        <p:nvSpPr>
+          <p:cNvPr id="10" name="Rectangle 9"/>
+          <p:cNvSpPr/>
+          <p:nvPr/>
+        </p:nvSpPr>
+        <p:spPr>
+          <a:xfrm>
+            <a:off x="914400" y="3163824"/>
+            <a:ext cx="10360152" cy="9144"/>
+          </a:xfrm>
+          <a:prstGeom prst="rect">
+            <a:avLst/>
+          </a:prstGeom>
+          <a:solidFill>
+            <a:srgbClr val="DDE3E8"/>
+          </a:solidFill>
+          <a:ln>
+            <a:noFill/>
+          </a:ln>
+          <a:effectLst/>
+        </p:spPr>
+        <p:style>
+          <a:lnRef idx="1">
+            <a:schemeClr val="accent1"/>
+          </a:lnRef>
+          <a:fillRef idx="3">
+            <a:schemeClr val="accent1"/>
+          </a:fillRef>
+          <a:effectRef idx="2">
+            <a:schemeClr val="accent1"/>
+          </a:effectRef>
+          <a:fontRef idx="minor">
+            <a:schemeClr val="lt1"/>
+          </a:fontRef>
+        </p:style>
+        <p:txBody>
+          <a:bodyPr rtlCol="0" anchor="ctr"/>
+          <a:lstStyle/>
+          <a:p>
+            <a:pPr algn="ctr"/>
+          </a:p>
+        </p:txBody>
+      </p:sp>
+      <p:sp>
+        <p:nvSpPr>
+          <p:cNvPr id="11" name="Rounded Rectangle 10"/>
+          <p:cNvSpPr/>
+          <p:nvPr/>
+        </p:nvSpPr>
+        <p:spPr>
+          <a:xfrm>
+            <a:off x="914400" y="3428999"/>
+            <a:ext cx="457200" cy="457200"/>
+          </a:xfrm>
+          <a:prstGeom prst="roundRect">
+            <a:avLst>
+              <a:gd name="adj" fmla="val 22000"/>
+            </a:avLst>
+          </a:prstGeom>
+          <a:solidFill>
+            <a:srgbClr val="52798A"/>
+          </a:solidFill>
+          <a:ln>
+            <a:noFill/>
+          </a:ln>
+          <a:effectLst/>
+        </p:spPr>
+        <p:style>
+          <a:lnRef idx="1">
+            <a:schemeClr val="accent1"/>
+          </a:lnRef>
+          <a:fillRef idx="3">
+            <a:schemeClr val="accent1"/>
+          </a:fillRef>
+          <a:effectRef idx="2">
+            <a:schemeClr val="accent1"/>
+          </a:effectRef>
+          <a:fontRef idx="minor">
+            <a:schemeClr val="lt1"/>
+          </a:fontRef>
+        </p:style>
+        <p:txBody>
+          <a:bodyPr rtlCol="0" anchor="ctr"/>
+          <a:lstStyle/>
+          <a:p>
+            <a:pPr algn="ctr"/>
+          </a:p>
+        </p:txBody>
+      </p:sp>
+      <p:sp>
+        <p:nvSpPr>
+          <p:cNvPr id="12" name="TextBox 11"/>
+          <p:cNvSpPr txBox="1"/>
+          <p:nvPr/>
+        </p:nvSpPr>
+        <p:spPr>
+          <a:xfrm>
+            <a:off x="1554480" y="3346703"/>
+            <a:ext cx="9509760" cy="502920"/>
+          </a:xfrm>
+          <a:prstGeom prst="rect">
+            <a:avLst/>
+          </a:prstGeom>
+          <a:noFill/>
+        </p:spPr>
+        <p:txBody>
+          <a:bodyPr wrap="square" anchor="t">
+            <a:spAutoFit/>
+          </a:bodyPr>
+          <a:lstStyle/>
+          <a:p>
+            <a:pPr algn="l"/>
+            <a:r>
+              <a:rPr sz="2100" b="0">
+                <a:solidFill>
+                  <a:srgbClr val="1B1B1B"/>
+                </a:solidFill>
+                <a:latin typeface="微软雅黑 Light"/>
+                <a:ea typeface="微软雅黑 Light"/>
+              </a:rPr>
+              <a:t>哲学</a:t>
+            </a:r>
+          </a:p>
+        </p:txBody>
+      </p:sp>
+      <p:sp>
+        <p:nvSpPr>
+          <p:cNvPr id="13" name="TextBox 12"/>
+          <p:cNvSpPr txBox="1"/>
+          <p:nvPr/>
+        </p:nvSpPr>
+        <p:spPr>
+          <a:xfrm>
+            <a:off x="1554480" y="3913631"/>
+            <a:ext cx="9509760" cy="365760"/>
+          </a:xfrm>
+          <a:prstGeom prst="rect">
+            <a:avLst/>
+          </a:prstGeom>
+          <a:noFill/>
+        </p:spPr>
+        <p:txBody>
+          <a:bodyPr wrap="square" anchor="t">
+            <a:spAutoFit/>
+          </a:bodyPr>
+          <a:lstStyle/>
+          <a:p>
+            <a:pPr algn="l"/>
+            <a:r>
+              <a:rPr sz="1350" b="0">
+                <a:solidFill>
+                  <a:srgbClr val="5F6B76"/>
+                </a:solidFill>
+                <a:latin typeface="微软雅黑"/>
+                <a:ea typeface="微软雅黑"/>
+              </a:rPr>
+              <a:t>因为想弄懂人与这个世界</a:t>
+            </a:r>
+          </a:p>
+        </p:txBody>
+      </p:sp>
+      <p:sp>
+        <p:nvSpPr>
+          <p:cNvPr id="14" name="Rectangle 13"/>
+          <p:cNvSpPr/>
+          <p:nvPr/>
+        </p:nvSpPr>
+        <p:spPr>
+          <a:xfrm>
+            <a:off x="914400" y="4443983"/>
+            <a:ext cx="10360152" cy="9144"/>
+          </a:xfrm>
+          <a:prstGeom prst="rect">
+            <a:avLst/>
+          </a:prstGeom>
+          <a:solidFill>
+            <a:srgbClr val="DDE3E8"/>
+          </a:solidFill>
+          <a:ln>
+            <a:noFill/>
+          </a:ln>
+          <a:effectLst/>
+        </p:spPr>
+        <p:style>
+          <a:lnRef idx="1">
+            <a:schemeClr val="accent1"/>
+          </a:lnRef>
+          <a:fillRef idx="3">
+            <a:schemeClr val="accent1"/>
+          </a:fillRef>
+          <a:effectRef idx="2">
+            <a:schemeClr val="accent1"/>
+          </a:effectRef>
+          <a:fontRef idx="minor">
+            <a:schemeClr val="lt1"/>
+          </a:fontRef>
+        </p:style>
+        <p:txBody>
+          <a:bodyPr rtlCol="0" anchor="ctr"/>
+          <a:lstStyle/>
+          <a:p>
+            <a:pPr algn="ctr"/>
+          </a:p>
+        </p:txBody>
+      </p:sp>
+      <p:sp>
+        <p:nvSpPr>
+          <p:cNvPr id="15" name="Rounded Rectangle 14"/>
+          <p:cNvSpPr/>
+          <p:nvPr/>
+        </p:nvSpPr>
+        <p:spPr>
+          <a:xfrm>
+            <a:off x="914400" y="4709159"/>
+            <a:ext cx="457200" cy="457200"/>
+          </a:xfrm>
+          <a:prstGeom prst="roundRect">
+            <a:avLst>
+              <a:gd name="adj" fmla="val 22000"/>
+            </a:avLst>
+          </a:prstGeom>
+          <a:solidFill>
+            <a:srgbClr val="52798A"/>
+          </a:solidFill>
+          <a:ln>
+            <a:noFill/>
+          </a:ln>
+          <a:effectLst/>
+        </p:spPr>
+        <p:style>
+          <a:lnRef idx="1">
+            <a:schemeClr val="accent1"/>
+          </a:lnRef>
+          <a:fillRef idx="3">
+            <a:schemeClr val="accent1"/>
+          </a:fillRef>
+          <a:effectRef idx="2">
+            <a:schemeClr val="accent1"/>
+          </a:effectRef>
+          <a:fontRef idx="minor">
+            <a:schemeClr val="lt1"/>
+          </a:fontRef>
+        </p:style>
+        <p:txBody>
+          <a:bodyPr rtlCol="0" anchor="ctr"/>
+          <a:lstStyle/>
+          <a:p>
+            <a:pPr algn="ctr"/>
+          </a:p>
+        </p:txBody>
+      </p:sp>
+      <p:sp>
+        <p:nvSpPr>
+          <p:cNvPr id="16" name="TextBox 15"/>
+          <p:cNvSpPr txBox="1"/>
+          <p:nvPr/>
+        </p:nvSpPr>
+        <p:spPr>
+          <a:xfrm>
+            <a:off x="1554480" y="4626864"/>
+            <a:ext cx="9509760" cy="502920"/>
+          </a:xfrm>
+          <a:prstGeom prst="rect">
+            <a:avLst/>
+          </a:prstGeom>
+          <a:noFill/>
+        </p:spPr>
+        <p:txBody>
+          <a:bodyPr wrap="square" anchor="t">
+            <a:spAutoFit/>
+          </a:bodyPr>
+          <a:lstStyle/>
+          <a:p>
+            <a:pPr algn="l"/>
+            <a:r>
+              <a:rPr sz="2100" b="0">
                 <a:solidFill>
                   <a:srgbClr val="1B1B1B"/>
                 </a:solidFill>
@@ -8344,14 +10557,14 @@
       </p:sp>
       <p:sp>
         <p:nvSpPr>
-          <p:cNvPr id="13" name="TextBox 12"/>
+          <p:cNvPr id="17" name="TextBox 16"/>
           <p:cNvSpPr txBox="1"/>
           <p:nvPr/>
         </p:nvSpPr>
         <p:spPr>
           <a:xfrm>
-            <a:off x="914400" y="5404104"/>
-            <a:ext cx="9875520" cy="365760"/>
+            <a:off x="1554480" y="5193792"/>
+            <a:ext cx="9509760" cy="365760"/>
           </a:xfrm>
           <a:prstGeom prst="rect">
             <a:avLst/>
@@ -8366,9 +10579,9 @@
           <a:p>
             <a:pPr algn="l"/>
             <a:r>
-              <a:rPr sz="1400" b="0">
-                <a:solidFill>
-                  <a:srgbClr val="6B6B6B"/>
+              <a:rPr sz="1350" b="0">
+                <a:solidFill>
+                  <a:srgbClr val="5F6B76"/>
                 </a:solidFill>
                 <a:latin typeface="微软雅黑"/>
                 <a:ea typeface="微软雅黑"/>
@@ -8380,14 +10593,58 @@
       </p:sp>
       <p:sp>
         <p:nvSpPr>
-          <p:cNvPr id="14" name="TextBox 13"/>
+          <p:cNvPr id="18" name="Rectangle 17"/>
+          <p:cNvSpPr/>
+          <p:nvPr/>
+        </p:nvSpPr>
+        <p:spPr>
+          <a:xfrm>
+            <a:off x="914400" y="6327648"/>
+            <a:ext cx="10360152" cy="7315"/>
+          </a:xfrm>
+          <a:prstGeom prst="rect">
+            <a:avLst/>
+          </a:prstGeom>
+          <a:solidFill>
+            <a:srgbClr val="DDE3E8"/>
+          </a:solidFill>
+          <a:ln>
+            <a:noFill/>
+          </a:ln>
+          <a:effectLst/>
+        </p:spPr>
+        <p:style>
+          <a:lnRef idx="1">
+            <a:schemeClr val="accent1"/>
+          </a:lnRef>
+          <a:fillRef idx="3">
+            <a:schemeClr val="accent1"/>
+          </a:fillRef>
+          <a:effectRef idx="2">
+            <a:schemeClr val="accent1"/>
+          </a:effectRef>
+          <a:fontRef idx="minor">
+            <a:schemeClr val="lt1"/>
+          </a:fontRef>
+        </p:style>
+        <p:txBody>
+          <a:bodyPr rtlCol="0" anchor="ctr"/>
+          <a:lstStyle/>
+          <a:p>
+            <a:pPr algn="ctr"/>
+          </a:p>
+        </p:txBody>
+      </p:sp>
+      <p:sp>
+        <p:nvSpPr>
+          <p:cNvPr id="19" name="TextBox 18"/>
           <p:cNvSpPr txBox="1"/>
           <p:nvPr/>
         </p:nvSpPr>
         <p:spPr>
           <a:xfrm>
-            <a:off x="10424160" y="6327648"/>
-            <a:ext cx="850392" cy="320040"/>
+            <a:off x="914400" y="6400800"/>
+            <a:ext cx="4572000" cy="320040"/>
           </a:xfrm>
           <a:prstGeom prst="rect">
             <a:avLst/>
@@ -8400,11 +10657,47 @@
           </a:bodyPr>
           <a:lstStyle/>
           <a:p>
+            <a:pPr algn="l"/>
+            <a:r>
+              <a:rPr sz="950" b="0">
+                <a:solidFill>
+                  <a:srgbClr val="98A2AB"/>
+                </a:solidFill>
+                <a:latin typeface="微软雅黑"/>
+                <a:ea typeface="微软雅黑"/>
+              </a:rPr>
+              <a:t>创造有意义的人生</a:t>
+            </a:r>
+          </a:p>
+        </p:txBody>
+      </p:sp>
+      <p:sp>
+        <p:nvSpPr>
+          <p:cNvPr id="20" name="TextBox 19"/>
+          <p:cNvSpPr txBox="1"/>
+          <p:nvPr/>
+        </p:nvSpPr>
+        <p:spPr>
+          <a:xfrm>
+            <a:off x="10360152" y="6400800"/>
+            <a:ext cx="914400" cy="320040"/>
+          </a:xfrm>
+          <a:prstGeom prst="rect">
+            <a:avLst/>
+          </a:prstGeom>
+          <a:noFill/>
+        </p:spPr>
+        <p:txBody>
+          <a:bodyPr wrap="square" anchor="t">
+            <a:spAutoFit/>
+          </a:bodyPr>
+          <a:lstStyle/>
+          <a:p>
             <a:pPr algn="r"/>
             <a:r>
-              <a:rPr sz="1050" b="0">
-                <a:solidFill>
-                  <a:srgbClr val="9A9A9A"/>
+              <a:rPr sz="1000" b="0">
+                <a:solidFill>
+                  <a:srgbClr val="98A2AB"/>
                 </a:solidFill>
                 <a:latin typeface="微软雅黑"/>
                 <a:ea typeface="微软雅黑"/>
@@ -8740,324 +11033,4 @@
   </a:objectDefaults>
   <a:extraClrSchemeLst/>
 </a:theme>
-</file>
-
-<file path=ppt/theme/theme2.xml><?xml version="1.0" encoding="utf-8"?>
-<a:theme xmlns:a="http://schemas.openxmlformats.org/drawingml/2006/main" name="Office Theme">
-  <a:themeElements>
-    <a:clrScheme name="Office">
-      <a:dk1>
-        <a:sysClr val="windowText" lastClr="000000"/>
-      </a:dk1>
-      <a:lt1>
-        <a:sysClr val="window" lastClr="FFFFFF"/>
-      </a:lt1>
-      <a:dk2>
-        <a:srgbClr val="1F497D"/>
-      </a:dk2>
-      <a:lt2>
-        <a:srgbClr val="EEECE1"/>
-      </a:lt2>
-      <a:accent1>
-        <a:srgbClr val="4F81BD"/>
-      </a:accent1>
-      <a:accent2>
-        <a:srgbClr val="C0504D"/>
-      </a:accent2>
-      <a:accent3>
-        <a:srgbClr val="9BBB59"/>
-      </a:accent3>
-      <a:accent4>
-        <a:srgbClr val="8064A2"/>
-      </a:accent4>
-      <a:accent5>
-        <a:srgbClr val="4BACC6"/>
-      </a:accent5>
-      <a:accent6>
-        <a:srgbClr val="F79646"/>
-      </a:accent6>
-      <a:hlink>
-        <a:srgbClr val="0000FF"/>
-      </a:hlink>
-      <a:folHlink>
-        <a:srgbClr val="800080"/>
-      </a:folHlink>
-    </a:clrScheme>
-    <a:fontScheme name="Office">
-      <a:majorFont>
-        <a:latin typeface="Calibri"/>
-        <a:ea typeface=""/>
-        <a:cs typeface=""/>
-        <a:font script="Jpan" typeface="ＭＳ Ｐゴシック"/>
-        <a:font script="Hang" typeface="맑은 고딕"/>
-        <a:font script="Hans" typeface="宋体"/>
-        <a:font script="Hant" typeface="新細明體"/>
-        <a:font script="Arab" typeface="Times New Roman"/>
-        <a:font script="Hebr" typeface="Times New Roman"/>
-        <a:font script="Thai" typeface="Angsana New"/>
-        <a:font script="Ethi" typeface="Nyala"/>
-        <a:font script="Beng" typeface="Vrinda"/>
-        <a:font script="Gujr" typeface="Shruti"/>
-        <a:font script="Khmr" typeface="MoolBoran"/>
-        <a:font script="Knda" typeface="Tunga"/>
-        <a:font script="Guru" typeface="Raavi"/>
-        <a:font script="Cans" typeface="Euphemia"/>
-        <a:font script="Cher" typeface="Plantagenet Cherokee"/>
-        <a:font script="Yiii" typeface="Microsoft Yi Baiti"/>
-        <a:font script="Tibt" typeface="Microsoft Himalaya"/>
-        <a:font script="Thaa" typeface="MV Boli"/>
-        <a:font script="Deva" typeface="Mangal"/>
-        <a:font script="Telu" typeface="Gautami"/>
-        <a:font script="Taml" typeface="Latha"/>
-        <a:font script="Syrc" typeface="Estrangelo Edessa"/>
-        <a:font script="Orya" typeface="Kalinga"/>
-        <a:font script="Mlym" typeface="Kartika"/>
-        <a:font script="Laoo" typeface="DokChampa"/>
-        <a:font script="Sinh" typeface="Iskoola Pota"/>
-        <a:font script="Mong" typeface="Mongolian Baiti"/>
-        <a:font script="Viet" typeface="Times New Roman"/>
-        <a:font script="Uigh" typeface="Microsoft Uighur"/>
-        <a:font script="Geor" typeface="Sylfaen"/>
-      </a:majorFont>
-      <a:minorFont>
-        <a:latin typeface="Calibri"/>
-        <a:ea typeface=""/>
-        <a:cs typeface=""/>
-        <a:font script="Jpan" typeface="ＭＳ Ｐゴシック"/>
-        <a:font script="Hang" typeface="맑은 고딕"/>
-        <a:font script="Hans" typeface="宋体"/>
-        <a:font script="Hant" typeface="新細明體"/>
-        <a:font script="Arab" typeface="Arial"/>
-        <a:font script="Hebr" typeface="Arial"/>
-        <a:font script="Thai" typeface="Cordia New"/>
-        <a:font script="Ethi" typeface="Nyala"/>
-        <a:font script="Beng" typeface="Vrinda"/>
-        <a:font script="Gujr" typeface="Shruti"/>
-        <a:font script="Khmr" typeface="DaunPenh"/>
-        <a:font script="Knda" typeface="Tunga"/>
-        <a:font script="Guru" typeface="Raavi"/>
-        <a:font script="Cans" typeface="Euphemia"/>
-        <a:font script="Cher" typeface="Plantagenet Cherokee"/>
-        <a:font script="Yiii" typeface="Microsoft Yi Baiti"/>
-        <a:font script="Tibt" typeface="Microsoft Himalaya"/>
-        <a:font script="Thaa" typeface="MV Boli"/>
-        <a:font script="Deva" typeface="Mangal"/>
-        <a:font script="Telu" typeface="Gautami"/>
-        <a:font script="Taml" typeface="Latha"/>
-        <a:font script="Syrc" typeface="Estrangelo Edessa"/>
-        <a:font script="Orya" typeface="Kalinga"/>
-        <a:font script="Mlym" typeface="Kartika"/>
-        <a:font script="Laoo" typeface="DokChampa"/>
-        <a:font script="Sinh" typeface="Iskoola Pota"/>
-        <a:font script="Mong" typeface="Mongolian Baiti"/>
-        <a:font script="Viet" typeface="Arial"/>
-        <a:font script="Uigh" typeface="Microsoft Uighur"/>
-        <a:font script="Geor" typeface="Sylfaen"/>
-      </a:minorFont>
-    </a:fontScheme>
-    <a:fmtScheme name="Office">
-      <a:fillStyleLst>
-        <a:solidFill>
-          <a:schemeClr val="phClr"/>
-        </a:solidFill>
-        <a:gradFill rotWithShape="1">
-          <a:gsLst>
-            <a:gs pos="0">
-              <a:schemeClr val="phClr">
-                <a:tint val="50000"/>
-                <a:satMod val="300000"/>
-              </a:schemeClr>
-            </a:gs>
-            <a:gs pos="35000">
-              <a:schemeClr val="phClr">
-                <a:tint val="37000"/>
-                <a:satMod val="300000"/>
-              </a:schemeClr>
-            </a:gs>
-            <a:gs pos="100000">
-              <a:schemeClr val="phClr">
-                <a:tint val="15000"/>
-                <a:satMod val="350000"/>
-              </a:schemeClr>
-            </a:gs>
-          </a:gsLst>
-          <a:lin ang="16200000" scaled="1"/>
-        </a:gradFill>
-        <a:gradFill rotWithShape="1">
-          <a:gsLst>
-            <a:gs pos="0">
-              <a:schemeClr val="phClr">
-                <a:tint val="100000"/>
-                <a:shade val="100000"/>
-                <a:satMod val="130000"/>
-              </a:schemeClr>
-            </a:gs>
-            <a:gs pos="100000">
-              <a:schemeClr val="phClr">
-                <a:tint val="50000"/>
-                <a:shade val="100000"/>
-                <a:satMod val="350000"/>
-              </a:schemeClr>
-            </a:gs>
-          </a:gsLst>
-          <a:lin ang="16200000" scaled="0"/>
-        </a:gradFill>
-      </a:fillStyleLst>
-      <a:lnStyleLst>
-        <a:ln w="9525" cap="flat" cmpd="sng" algn="ctr">
-          <a:solidFill>
-            <a:schemeClr val="phClr">
-              <a:shade val="95000"/>
-              <a:satMod val="105000"/>
-            </a:schemeClr>
-          </a:solidFill>
-          <a:prstDash val="solid"/>
-        </a:ln>
-        <a:ln w="25400" cap="flat" cmpd="sng" algn="ctr">
-          <a:solidFill>
-            <a:schemeClr val="phClr"/>
-          </a:solidFill>
-          <a:prstDash val="solid"/>
-        </a:ln>
-        <a:ln w="38100" cap="flat" cmpd="sng" algn="ctr">
-          <a:solidFill>
-            <a:schemeClr val="phClr"/>
-          </a:solidFill>
-          <a:prstDash val="solid"/>
-        </a:ln>
-      </a:lnStyleLst>
-      <a:effectStyleLst>
-        <a:effectStyle>
-          <a:effectLst>
-            <a:outerShdw blurRad="40000" dist="20000" dir="5400000" rotWithShape="0">
-              <a:srgbClr val="000000">
-                <a:alpha val="38000"/>
-              </a:srgbClr>
-            </a:outerShdw>
-          </a:effectLst>
-        </a:effectStyle>
-        <a:effectStyle>
-          <a:effectLst>
-            <a:outerShdw blurRad="40000" dist="23000" dir="5400000" rotWithShape="0">
-              <a:srgbClr val="000000">
-                <a:alpha val="35000"/>
-              </a:srgbClr>
-            </a:outerShdw>
-          </a:effectLst>
-        </a:effectStyle>
-        <a:effectStyle>
-          <a:effectLst>
-            <a:outerShdw blurRad="40000" dist="23000" dir="5400000" rotWithShape="0">
-              <a:srgbClr val="000000">
-                <a:alpha val="35000"/>
-              </a:srgbClr>
-            </a:outerShdw>
-          </a:effectLst>
-          <a:scene3d>
-            <a:camera prst="orthographicFront">
-              <a:rot lat="0" lon="0" rev="0"/>
-            </a:camera>
-            <a:lightRig rig="threePt" dir="t">
-              <a:rot lat="0" lon="0" rev="1200000"/>
-            </a:lightRig>
-          </a:scene3d>
-          <a:sp3d>
-            <a:bevelT w="63500" h="25400"/>
-          </a:sp3d>
-        </a:effectStyle>
-      </a:effectStyleLst>
-      <a:bgFillStyleLst>
-        <a:solidFill>
-          <a:schemeClr val="phClr"/>
-        </a:solidFill>
-        <a:gradFill rotWithShape="1">
-          <a:gsLst>
-            <a:gs pos="0">
-              <a:schemeClr val="phClr">
-                <a:tint val="40000"/>
-                <a:satMod val="350000"/>
-              </a:schemeClr>
-            </a:gs>
-            <a:gs pos="40000">
-              <a:schemeClr val="phClr">
-                <a:tint val="45000"/>
-                <a:shade val="99000"/>
-                <a:satMod val="350000"/>
-              </a:schemeClr>
-            </a:gs>
-            <a:gs pos="100000">
-              <a:schemeClr val="phClr">
-                <a:shade val="20000"/>
-                <a:satMod val="255000"/>
-              </a:schemeClr>
-            </a:gs>
-          </a:gsLst>
-          <a:path path="circle">
-            <a:fillToRect l="50000" t="-80000" r="50000" b="180000"/>
-          </a:path>
-        </a:gradFill>
-        <a:gradFill rotWithShape="1">
-          <a:gsLst>
-            <a:gs pos="0">
-              <a:schemeClr val="phClr">
-                <a:tint val="80000"/>
-                <a:satMod val="300000"/>
-              </a:schemeClr>
-            </a:gs>
-            <a:gs pos="100000">
-              <a:schemeClr val="phClr">
-                <a:shade val="30000"/>
-                <a:satMod val="200000"/>
-              </a:schemeClr>
-            </a:gs>
-          </a:gsLst>
-          <a:path path="circle">
-            <a:fillToRect l="50000" t="50000" r="50000" b="50000"/>
-          </a:path>
-        </a:gradFill>
-      </a:bgFillStyleLst>
-    </a:fmtScheme>
-  </a:themeElements>
-  <a:objectDefaults>
-    <a:spDef>
-      <a:spPr/>
-      <a:bodyPr/>
-      <a:lstStyle/>
-      <a:style>
-        <a:lnRef idx="1">
-          <a:schemeClr val="accent1"/>
-        </a:lnRef>
-        <a:fillRef idx="3">
-          <a:schemeClr val="accent1"/>
-        </a:fillRef>
-        <a:effectRef idx="2">
-          <a:schemeClr val="accent1"/>
-        </a:effectRef>
-        <a:fontRef idx="minor">
-          <a:schemeClr val="lt1"/>
-        </a:fontRef>
-      </a:style>
-    </a:spDef>
-    <a:lnDef>
-      <a:spPr/>
-      <a:bodyPr/>
-      <a:lstStyle/>
-      <a:style>
-        <a:lnRef idx="2">
-          <a:schemeClr val="accent1"/>
-        </a:lnRef>
-        <a:fillRef idx="0">
-          <a:schemeClr val="accent1"/>
-        </a:fillRef>
-        <a:effectRef idx="1">
-          <a:schemeClr val="accent1"/>
-        </a:effectRef>
-        <a:fontRef idx="minor">
-          <a:schemeClr val="tx1"/>
-        </a:fontRef>
-      </a:style>
-    </a:lnDef>
-  </a:objectDefaults>
-  <a:extraClrSchemeLst/>
-</a:theme>
 </file>
--- a/files/creating-a-meaningful-life.pptx
+++ b/files/creating-a-meaningful-life.pptx
@@ -3159,7 +3159,7 @@
             </a:avLst>
           </a:prstGeom>
           <a:solidFill>
-            <a:srgbClr val="2F4858"/>
+            <a:srgbClr val="EEF2F5"/>
           </a:solidFill>
           <a:ln>
             <a:noFill/>
@@ -3190,128 +3190,20 @@
       </p:sp>
       <p:sp>
         <p:nvSpPr>
-          <p:cNvPr id="4" name="TextBox 3"/>
-          <p:cNvSpPr txBox="1"/>
-          <p:nvPr/>
-        </p:nvSpPr>
-        <p:spPr>
-          <a:xfrm>
-            <a:off x="7818120" y="1783080"/>
-            <a:ext cx="3200400" cy="3291840"/>
-          </a:xfrm>
-          <a:prstGeom prst="rect">
-            <a:avLst/>
-          </a:prstGeom>
-          <a:noFill/>
-        </p:spPr>
-        <p:txBody>
-          <a:bodyPr wrap="square" anchor="t">
-            <a:spAutoFit/>
-          </a:bodyPr>
-          <a:lstStyle/>
-          <a:p>
-            <a:pPr algn="l">
-              <a:lnSpc>
-                <a:spcPct val="150000"/>
-              </a:lnSpc>
-            </a:pPr>
-            <a:r>
-              <a:rPr sz="1550" b="0">
-                <a:solidFill>
-                  <a:srgbClr val="FFFFFF"/>
-                </a:solidFill>
-                <a:latin typeface="Noto Serif SC"/>
-                <a:ea typeface="Noto Serif SC"/>
-              </a:rPr>
-              <a:t>人生的意义，</a:t>
-            </a:r>
-          </a:p>
-          <a:p>
-            <a:pPr algn="l">
-              <a:lnSpc>
-                <a:spcPct val="150000"/>
-              </a:lnSpc>
-            </a:pPr>
-            <a:r>
-              <a:rPr sz="1550" b="0">
-                <a:solidFill>
-                  <a:srgbClr val="FFFFFF"/>
-                </a:solidFill>
-                <a:latin typeface="Noto Serif SC"/>
-                <a:ea typeface="Noto Serif SC"/>
-              </a:rPr>
-              <a:t>不是一次算清的答案，</a:t>
-            </a:r>
-          </a:p>
-          <a:p>
-            <a:pPr algn="l">
-              <a:lnSpc>
-                <a:spcPct val="150000"/>
-              </a:lnSpc>
-            </a:pPr>
-            <a:r>
-              <a:rPr sz="1550" b="0">
-                <a:solidFill>
-                  <a:srgbClr val="FFFFFF"/>
-                </a:solidFill>
-                <a:latin typeface="Noto Serif SC"/>
-                <a:ea typeface="Noto Serif SC"/>
-              </a:rPr>
-              <a:t>而是在矛盾中，</a:t>
-            </a:r>
-          </a:p>
-          <a:p>
-            <a:pPr algn="l">
-              <a:lnSpc>
-                <a:spcPct val="150000"/>
-              </a:lnSpc>
-            </a:pPr>
-            <a:r>
-              <a:rPr sz="1550" b="0">
-                <a:solidFill>
-                  <a:srgbClr val="FFFFFF"/>
-                </a:solidFill>
-                <a:latin typeface="Noto Serif SC"/>
-                <a:ea typeface="Noto Serif SC"/>
-              </a:rPr>
-              <a:t>不断被重新书写的</a:t>
-            </a:r>
-          </a:p>
-          <a:p>
-            <a:pPr algn="l">
-              <a:lnSpc>
-                <a:spcPct val="150000"/>
-              </a:lnSpc>
-            </a:pPr>
-            <a:r>
-              <a:rPr sz="1550" b="0">
-                <a:solidFill>
-                  <a:srgbClr val="FFFFFF"/>
-                </a:solidFill>
-                <a:latin typeface="Noto Serif SC"/>
-                <a:ea typeface="Noto Serif SC"/>
-              </a:rPr>
-              <a:t>动态过程。</a:t>
-            </a:r>
-          </a:p>
-        </p:txBody>
-      </p:sp>
-      <p:sp>
-        <p:nvSpPr>
-          <p:cNvPr id="5" name="Rectangle 4"/>
+          <p:cNvPr id="4" name="Rectangle 3"/>
           <p:cNvSpPr/>
           <p:nvPr/>
         </p:nvSpPr>
         <p:spPr>
           <a:xfrm>
-            <a:off x="7818120" y="4846320"/>
-            <a:ext cx="1371600" cy="18288"/>
-          </a:xfrm>
-          <a:prstGeom prst="rect">
-            <a:avLst/>
-          </a:prstGeom>
-          <a:solidFill>
-            <a:srgbClr val="8FA6B4"/>
+            <a:off x="7452360" y="1188720"/>
+            <a:ext cx="64008" cy="4526280"/>
+          </a:xfrm>
+          <a:prstGeom prst="rect">
+            <a:avLst/>
+          </a:prstGeom>
+          <a:solidFill>
+            <a:srgbClr val="52798A"/>
           </a:solidFill>
           <a:ln>
             <a:noFill/>
@@ -3342,122 +3234,14 @@
       </p:sp>
       <p:sp>
         <p:nvSpPr>
-          <p:cNvPr id="6" name="TextBox 5"/>
-          <p:cNvSpPr txBox="1"/>
-          <p:nvPr/>
-        </p:nvSpPr>
-        <p:spPr>
-          <a:xfrm>
-            <a:off x="7818120" y="4983480"/>
-            <a:ext cx="3108960" cy="365760"/>
-          </a:xfrm>
-          <a:prstGeom prst="rect">
-            <a:avLst/>
-          </a:prstGeom>
-          <a:noFill/>
-        </p:spPr>
-        <p:txBody>
-          <a:bodyPr wrap="square" anchor="t">
-            <a:spAutoFit/>
-          </a:bodyPr>
-          <a:lstStyle/>
-          <a:p>
-            <a:pPr algn="l"/>
-            <a:r>
-              <a:rPr sz="1100" b="0">
-                <a:solidFill>
-                  <a:srgbClr val="8FA6B4"/>
-                </a:solidFill>
-                <a:latin typeface="微软雅黑"/>
-                <a:ea typeface="微软雅黑"/>
-              </a:rPr>
-              <a:t>第一章 · 第三节</a:t>
-            </a:r>
-          </a:p>
-        </p:txBody>
-      </p:sp>
-      <p:sp>
-        <p:nvSpPr>
-          <p:cNvPr id="7" name="TextBox 6"/>
-          <p:cNvSpPr txBox="1"/>
-          <p:nvPr/>
-        </p:nvSpPr>
-        <p:spPr>
-          <a:xfrm>
-            <a:off x="960120" y="960120"/>
-            <a:ext cx="6035040" cy="320040"/>
-          </a:xfrm>
-          <a:prstGeom prst="rect">
-            <a:avLst/>
-          </a:prstGeom>
-          <a:noFill/>
-        </p:spPr>
-        <p:txBody>
-          <a:bodyPr wrap="square" anchor="t">
-            <a:spAutoFit/>
-          </a:bodyPr>
-          <a:lstStyle/>
-          <a:p>
-            <a:pPr algn="l"/>
-            <a:r>
-              <a:rPr sz="1250" b="0">
-                <a:solidFill>
-                  <a:srgbClr val="5F6B76"/>
-                </a:solidFill>
-                <a:latin typeface="微软雅黑"/>
-                <a:ea typeface="微软雅黑"/>
-              </a:rPr>
-              <a:t>思想道德与法治 · 课前分享</a:t>
-            </a:r>
-          </a:p>
-        </p:txBody>
-      </p:sp>
-      <p:sp>
-        <p:nvSpPr>
-          <p:cNvPr id="8" name="TextBox 7"/>
-          <p:cNvSpPr txBox="1"/>
-          <p:nvPr/>
-        </p:nvSpPr>
-        <p:spPr>
-          <a:xfrm>
-            <a:off x="960120" y="2240280"/>
-            <a:ext cx="6217920" cy="914400"/>
-          </a:xfrm>
-          <a:prstGeom prst="rect">
-            <a:avLst/>
-          </a:prstGeom>
-          <a:noFill/>
-        </p:spPr>
-        <p:txBody>
-          <a:bodyPr wrap="square" anchor="t">
-            <a:spAutoFit/>
-          </a:bodyPr>
-          <a:lstStyle/>
-          <a:p>
-            <a:pPr algn="l"/>
-            <a:r>
-              <a:rPr sz="4000" b="0">
-                <a:solidFill>
-                  <a:srgbClr val="1B1B1B"/>
-                </a:solidFill>
-                <a:latin typeface="微软雅黑 Light"/>
-                <a:ea typeface="微软雅黑 Light"/>
-              </a:rPr>
-              <a:t>创造有意义的人生</a:t>
-            </a:r>
-          </a:p>
-        </p:txBody>
-      </p:sp>
-      <p:sp>
-        <p:nvSpPr>
-          <p:cNvPr id="9" name="Rectangle 8"/>
+          <p:cNvPr id="5" name="Rectangle 4"/>
           <p:cNvSpPr/>
           <p:nvPr/>
         </p:nvSpPr>
         <p:spPr>
           <a:xfrm>
-            <a:off x="960120" y="3310128"/>
-            <a:ext cx="1737360" cy="45720"/>
+            <a:off x="7818120" y="1536192"/>
+            <a:ext cx="118872" cy="118872"/>
           </a:xfrm>
           <a:prstGeom prst="rect">
             <a:avLst/>
@@ -3494,7 +3278,521 @@
       </p:sp>
       <p:sp>
         <p:nvSpPr>
-          <p:cNvPr id="10" name="TextBox 9"/>
+          <p:cNvPr id="6" name="TextBox 5"/>
+          <p:cNvSpPr txBox="1"/>
+          <p:nvPr/>
+        </p:nvSpPr>
+        <p:spPr>
+          <a:xfrm>
+            <a:off x="8037575" y="1481328"/>
+            <a:ext cx="3017520" cy="320040"/>
+          </a:xfrm>
+          <a:prstGeom prst="rect">
+            <a:avLst/>
+          </a:prstGeom>
+          <a:noFill/>
+        </p:spPr>
+        <p:txBody>
+          <a:bodyPr wrap="square" anchor="t">
+            <a:spAutoFit/>
+          </a:bodyPr>
+          <a:lstStyle/>
+          <a:p>
+            <a:pPr algn="l"/>
+            <a:r>
+              <a:rPr sz="1200" b="0">
+                <a:solidFill>
+                  <a:srgbClr val="2F4858"/>
+                </a:solidFill>
+                <a:latin typeface="微软雅黑"/>
+                <a:ea typeface="微软雅黑"/>
+              </a:rPr>
+              <a:t>本次分享</a:t>
+            </a:r>
+          </a:p>
+        </p:txBody>
+      </p:sp>
+      <p:sp>
+        <p:nvSpPr>
+          <p:cNvPr id="7" name="Rectangle 6"/>
+          <p:cNvSpPr/>
+          <p:nvPr/>
+        </p:nvSpPr>
+        <p:spPr>
+          <a:xfrm>
+            <a:off x="7818120" y="1993392"/>
+            <a:ext cx="3108960" cy="12801"/>
+          </a:xfrm>
+          <a:prstGeom prst="rect">
+            <a:avLst/>
+          </a:prstGeom>
+          <a:solidFill>
+            <a:srgbClr val="8FA6B4"/>
+          </a:solidFill>
+          <a:ln>
+            <a:noFill/>
+          </a:ln>
+          <a:effectLst/>
+        </p:spPr>
+        <p:style>
+          <a:lnRef idx="1">
+            <a:schemeClr val="accent1"/>
+          </a:lnRef>
+          <a:fillRef idx="3">
+            <a:schemeClr val="accent1"/>
+          </a:fillRef>
+          <a:effectRef idx="2">
+            <a:schemeClr val="accent1"/>
+          </a:effectRef>
+          <a:fontRef idx="minor">
+            <a:schemeClr val="lt1"/>
+          </a:fontRef>
+        </p:style>
+        <p:txBody>
+          <a:bodyPr rtlCol="0" anchor="ctr"/>
+          <a:lstStyle/>
+          <a:p>
+            <a:pPr algn="ctr"/>
+          </a:p>
+        </p:txBody>
+      </p:sp>
+      <p:sp>
+        <p:nvSpPr>
+          <p:cNvPr id="8" name="Rounded Rectangle 7"/>
+          <p:cNvSpPr/>
+          <p:nvPr/>
+        </p:nvSpPr>
+        <p:spPr>
+          <a:xfrm>
+            <a:off x="7818120" y="2286000"/>
+            <a:ext cx="3108960" cy="658368"/>
+          </a:xfrm>
+          <a:prstGeom prst="roundRect">
+            <a:avLst>
+              <a:gd name="adj" fmla="val 14000"/>
+            </a:avLst>
+          </a:prstGeom>
+          <a:solidFill>
+            <a:srgbClr val="E2EAEF"/>
+          </a:solidFill>
+          <a:ln>
+            <a:noFill/>
+          </a:ln>
+          <a:effectLst/>
+        </p:spPr>
+        <p:style>
+          <a:lnRef idx="1">
+            <a:schemeClr val="accent1"/>
+          </a:lnRef>
+          <a:fillRef idx="3">
+            <a:schemeClr val="accent1"/>
+          </a:fillRef>
+          <a:effectRef idx="2">
+            <a:schemeClr val="accent1"/>
+          </a:effectRef>
+          <a:fontRef idx="minor">
+            <a:schemeClr val="lt1"/>
+          </a:fontRef>
+        </p:style>
+        <p:txBody>
+          <a:bodyPr rtlCol="0" anchor="ctr"/>
+          <a:lstStyle/>
+          <a:p>
+            <a:pPr algn="ctr"/>
+          </a:p>
+        </p:txBody>
+      </p:sp>
+      <p:sp>
+        <p:nvSpPr>
+          <p:cNvPr id="9" name="TextBox 8"/>
+          <p:cNvSpPr txBox="1"/>
+          <p:nvPr/>
+        </p:nvSpPr>
+        <p:spPr>
+          <a:xfrm>
+            <a:off x="7818120" y="2286000"/>
+            <a:ext cx="3108960" cy="658368"/>
+          </a:xfrm>
+          <a:prstGeom prst="rect">
+            <a:avLst/>
+          </a:prstGeom>
+          <a:noFill/>
+        </p:spPr>
+        <p:txBody>
+          <a:bodyPr wrap="square" anchor="ctr">
+            <a:spAutoFit/>
+          </a:bodyPr>
+          <a:lstStyle/>
+          <a:p>
+            <a:pPr algn="ctr"/>
+            <a:r>
+              <a:rPr sz="1700" b="0">
+                <a:solidFill>
+                  <a:srgbClr val="2F4858"/>
+                </a:solidFill>
+                <a:latin typeface="微软雅黑"/>
+                <a:ea typeface="微软雅黑"/>
+              </a:rPr>
+              <a:t>动画</a:t>
+            </a:r>
+          </a:p>
+        </p:txBody>
+      </p:sp>
+      <p:sp>
+        <p:nvSpPr>
+          <p:cNvPr id="10" name="Rounded Rectangle 9"/>
+          <p:cNvSpPr/>
+          <p:nvPr/>
+        </p:nvSpPr>
+        <p:spPr>
+          <a:xfrm>
+            <a:off x="7818120" y="3090672"/>
+            <a:ext cx="3108960" cy="658368"/>
+          </a:xfrm>
+          <a:prstGeom prst="roundRect">
+            <a:avLst>
+              <a:gd name="adj" fmla="val 14000"/>
+            </a:avLst>
+          </a:prstGeom>
+          <a:solidFill>
+            <a:srgbClr val="E2EAEF"/>
+          </a:solidFill>
+          <a:ln>
+            <a:noFill/>
+          </a:ln>
+          <a:effectLst/>
+        </p:spPr>
+        <p:style>
+          <a:lnRef idx="1">
+            <a:schemeClr val="accent1"/>
+          </a:lnRef>
+          <a:fillRef idx="3">
+            <a:schemeClr val="accent1"/>
+          </a:fillRef>
+          <a:effectRef idx="2">
+            <a:schemeClr val="accent1"/>
+          </a:effectRef>
+          <a:fontRef idx="minor">
+            <a:schemeClr val="lt1"/>
+          </a:fontRef>
+        </p:style>
+        <p:txBody>
+          <a:bodyPr rtlCol="0" anchor="ctr"/>
+          <a:lstStyle/>
+          <a:p>
+            <a:pPr algn="ctr"/>
+          </a:p>
+        </p:txBody>
+      </p:sp>
+      <p:sp>
+        <p:nvSpPr>
+          <p:cNvPr id="11" name="TextBox 10"/>
+          <p:cNvSpPr txBox="1"/>
+          <p:nvPr/>
+        </p:nvSpPr>
+        <p:spPr>
+          <a:xfrm>
+            <a:off x="7818120" y="3090672"/>
+            <a:ext cx="3108960" cy="658368"/>
+          </a:xfrm>
+          <a:prstGeom prst="rect">
+            <a:avLst/>
+          </a:prstGeom>
+          <a:noFill/>
+        </p:spPr>
+        <p:txBody>
+          <a:bodyPr wrap="square" anchor="ctr">
+            <a:spAutoFit/>
+          </a:bodyPr>
+          <a:lstStyle/>
+          <a:p>
+            <a:pPr algn="ctr"/>
+            <a:r>
+              <a:rPr sz="1700" b="0">
+                <a:solidFill>
+                  <a:srgbClr val="2F4858"/>
+                </a:solidFill>
+                <a:latin typeface="微软雅黑"/>
+                <a:ea typeface="微软雅黑"/>
+              </a:rPr>
+              <a:t>哲学</a:t>
+            </a:r>
+          </a:p>
+        </p:txBody>
+      </p:sp>
+      <p:sp>
+        <p:nvSpPr>
+          <p:cNvPr id="12" name="Rounded Rectangle 11"/>
+          <p:cNvSpPr/>
+          <p:nvPr/>
+        </p:nvSpPr>
+        <p:spPr>
+          <a:xfrm>
+            <a:off x="7818120" y="3895344"/>
+            <a:ext cx="3108960" cy="658368"/>
+          </a:xfrm>
+          <a:prstGeom prst="roundRect">
+            <a:avLst>
+              <a:gd name="adj" fmla="val 14000"/>
+            </a:avLst>
+          </a:prstGeom>
+          <a:solidFill>
+            <a:srgbClr val="E2EAEF"/>
+          </a:solidFill>
+          <a:ln>
+            <a:noFill/>
+          </a:ln>
+          <a:effectLst/>
+        </p:spPr>
+        <p:style>
+          <a:lnRef idx="1">
+            <a:schemeClr val="accent1"/>
+          </a:lnRef>
+          <a:fillRef idx="3">
+            <a:schemeClr val="accent1"/>
+          </a:fillRef>
+          <a:effectRef idx="2">
+            <a:schemeClr val="accent1"/>
+          </a:effectRef>
+          <a:fontRef idx="minor">
+            <a:schemeClr val="lt1"/>
+          </a:fontRef>
+        </p:style>
+        <p:txBody>
+          <a:bodyPr rtlCol="0" anchor="ctr"/>
+          <a:lstStyle/>
+          <a:p>
+            <a:pPr algn="ctr"/>
+          </a:p>
+        </p:txBody>
+      </p:sp>
+      <p:sp>
+        <p:nvSpPr>
+          <p:cNvPr id="13" name="TextBox 12"/>
+          <p:cNvSpPr txBox="1"/>
+          <p:nvPr/>
+        </p:nvSpPr>
+        <p:spPr>
+          <a:xfrm>
+            <a:off x="7818120" y="3895344"/>
+            <a:ext cx="3108960" cy="658368"/>
+          </a:xfrm>
+          <a:prstGeom prst="rect">
+            <a:avLst/>
+          </a:prstGeom>
+          <a:noFill/>
+        </p:spPr>
+        <p:txBody>
+          <a:bodyPr wrap="square" anchor="ctr">
+            <a:spAutoFit/>
+          </a:bodyPr>
+          <a:lstStyle/>
+          <a:p>
+            <a:pPr algn="ctr"/>
+            <a:r>
+              <a:rPr sz="1700" b="0">
+                <a:solidFill>
+                  <a:srgbClr val="2F4858"/>
+                </a:solidFill>
+                <a:latin typeface="微软雅黑"/>
+                <a:ea typeface="微软雅黑"/>
+              </a:rPr>
+              <a:t>编程</a:t>
+            </a:r>
+          </a:p>
+        </p:txBody>
+      </p:sp>
+      <p:sp>
+        <p:nvSpPr>
+          <p:cNvPr id="14" name="TextBox 13"/>
+          <p:cNvSpPr txBox="1"/>
+          <p:nvPr/>
+        </p:nvSpPr>
+        <p:spPr>
+          <a:xfrm>
+            <a:off x="7818120" y="4828032"/>
+            <a:ext cx="3108960" cy="365760"/>
+          </a:xfrm>
+          <a:prstGeom prst="rect">
+            <a:avLst/>
+          </a:prstGeom>
+          <a:noFill/>
+        </p:spPr>
+        <p:txBody>
+          <a:bodyPr wrap="square" anchor="t">
+            <a:spAutoFit/>
+          </a:bodyPr>
+          <a:lstStyle/>
+          <a:p>
+            <a:pPr algn="l"/>
+            <a:r>
+              <a:rPr sz="1150" b="0">
+                <a:solidFill>
+                  <a:srgbClr val="5F6B76"/>
+                </a:solidFill>
+                <a:latin typeface="微软雅黑"/>
+                <a:ea typeface="微软雅黑"/>
+              </a:rPr>
+              <a:t>一次关于「意义」的自言自语</a:t>
+            </a:r>
+          </a:p>
+        </p:txBody>
+      </p:sp>
+      <p:sp>
+        <p:nvSpPr>
+          <p:cNvPr id="15" name="TextBox 14"/>
+          <p:cNvSpPr txBox="1"/>
+          <p:nvPr/>
+        </p:nvSpPr>
+        <p:spPr>
+          <a:xfrm>
+            <a:off x="7818120" y="5321808"/>
+            <a:ext cx="3108960" cy="320040"/>
+          </a:xfrm>
+          <a:prstGeom prst="rect">
+            <a:avLst/>
+          </a:prstGeom>
+          <a:noFill/>
+        </p:spPr>
+        <p:txBody>
+          <a:bodyPr wrap="square" anchor="t">
+            <a:spAutoFit/>
+          </a:bodyPr>
+          <a:lstStyle/>
+          <a:p>
+            <a:pPr algn="l"/>
+            <a:r>
+              <a:rPr sz="1050" b="0">
+                <a:solidFill>
+                  <a:srgbClr val="98A2AB"/>
+                </a:solidFill>
+                <a:latin typeface="微软雅黑"/>
+                <a:ea typeface="微软雅黑"/>
+              </a:rPr>
+              <a:t>第一章 · 第三节</a:t>
+            </a:r>
+          </a:p>
+        </p:txBody>
+      </p:sp>
+      <p:sp>
+        <p:nvSpPr>
+          <p:cNvPr id="16" name="TextBox 15"/>
+          <p:cNvSpPr txBox="1"/>
+          <p:nvPr/>
+        </p:nvSpPr>
+        <p:spPr>
+          <a:xfrm>
+            <a:off x="960120" y="960120"/>
+            <a:ext cx="6035040" cy="320040"/>
+          </a:xfrm>
+          <a:prstGeom prst="rect">
+            <a:avLst/>
+          </a:prstGeom>
+          <a:noFill/>
+        </p:spPr>
+        <p:txBody>
+          <a:bodyPr wrap="square" anchor="t">
+            <a:spAutoFit/>
+          </a:bodyPr>
+          <a:lstStyle/>
+          <a:p>
+            <a:pPr algn="l"/>
+            <a:r>
+              <a:rPr sz="1250" b="0">
+                <a:solidFill>
+                  <a:srgbClr val="5F6B76"/>
+                </a:solidFill>
+                <a:latin typeface="微软雅黑"/>
+                <a:ea typeface="微软雅黑"/>
+              </a:rPr>
+              <a:t>思想道德与法治 · 课前分享</a:t>
+            </a:r>
+          </a:p>
+        </p:txBody>
+      </p:sp>
+      <p:sp>
+        <p:nvSpPr>
+          <p:cNvPr id="17" name="TextBox 16"/>
+          <p:cNvSpPr txBox="1"/>
+          <p:nvPr/>
+        </p:nvSpPr>
+        <p:spPr>
+          <a:xfrm>
+            <a:off x="960120" y="2240280"/>
+            <a:ext cx="6217920" cy="914400"/>
+          </a:xfrm>
+          <a:prstGeom prst="rect">
+            <a:avLst/>
+          </a:prstGeom>
+          <a:noFill/>
+        </p:spPr>
+        <p:txBody>
+          <a:bodyPr wrap="square" anchor="t">
+            <a:spAutoFit/>
+          </a:bodyPr>
+          <a:lstStyle/>
+          <a:p>
+            <a:pPr algn="l"/>
+            <a:r>
+              <a:rPr sz="4000" b="0">
+                <a:solidFill>
+                  <a:srgbClr val="1B1B1B"/>
+                </a:solidFill>
+                <a:latin typeface="微软雅黑 Light"/>
+                <a:ea typeface="微软雅黑 Light"/>
+              </a:rPr>
+              <a:t>创造有意义的人生</a:t>
+            </a:r>
+          </a:p>
+        </p:txBody>
+      </p:sp>
+      <p:sp>
+        <p:nvSpPr>
+          <p:cNvPr id="18" name="Rectangle 17"/>
+          <p:cNvSpPr/>
+          <p:nvPr/>
+        </p:nvSpPr>
+        <p:spPr>
+          <a:xfrm>
+            <a:off x="960120" y="3310128"/>
+            <a:ext cx="1737360" cy="45720"/>
+          </a:xfrm>
+          <a:prstGeom prst="rect">
+            <a:avLst/>
+          </a:prstGeom>
+          <a:solidFill>
+            <a:srgbClr val="52798A"/>
+          </a:solidFill>
+          <a:ln>
+            <a:noFill/>
+          </a:ln>
+          <a:effectLst/>
+        </p:spPr>
+        <p:style>
+          <a:lnRef idx="1">
+            <a:schemeClr val="accent1"/>
+          </a:lnRef>
+          <a:fillRef idx="3">
+            <a:schemeClr val="accent1"/>
+          </a:fillRef>
+          <a:effectRef idx="2">
+            <a:schemeClr val="accent1"/>
+          </a:effectRef>
+          <a:fontRef idx="minor">
+            <a:schemeClr val="lt1"/>
+          </a:fontRef>
+        </p:style>
+        <p:txBody>
+          <a:bodyPr rtlCol="0" anchor="ctr"/>
+          <a:lstStyle/>
+          <a:p>
+            <a:pPr algn="ctr"/>
+          </a:p>
+        </p:txBody>
+      </p:sp>
+      <p:sp>
+        <p:nvSpPr>
+          <p:cNvPr id="19" name="TextBox 18"/>
           <p:cNvSpPr txBox="1"/>
           <p:nvPr/>
         </p:nvSpPr>
@@ -3530,7 +3828,7 @@
       </p:sp>
       <p:sp>
         <p:nvSpPr>
-          <p:cNvPr id="11" name="TextBox 10"/>
+          <p:cNvPr id="20" name="TextBox 19"/>
           <p:cNvSpPr txBox="1"/>
           <p:nvPr/>
         </p:nvSpPr>
@@ -3583,7 +3881,7 @@
       </p:sp>
       <p:sp>
         <p:nvSpPr>
-          <p:cNvPr id="12" name="TextBox 11"/>
+          <p:cNvPr id="21" name="TextBox 20"/>
           <p:cNvSpPr txBox="1"/>
           <p:nvPr/>
         </p:nvSpPr>
@@ -3619,7 +3917,7 @@
       </p:sp>
       <p:sp>
         <p:nvSpPr>
-          <p:cNvPr id="13" name="TextBox 12"/>
+          <p:cNvPr id="22" name="TextBox 21"/>
           <p:cNvSpPr txBox="1"/>
           <p:nvPr/>
         </p:nvSpPr>
@@ -5222,7 +5520,7 @@
                 <a:latin typeface="微软雅黑"/>
                 <a:ea typeface="微软雅黑"/>
               </a:rPr>
-              <a:t>本节框架</a:t>
+              <a:t>这次聊什么</a:t>
             </a:r>
           </a:p>
         </p:txBody>
@@ -5258,7 +5556,7 @@
                 <a:latin typeface="微软雅黑 Light"/>
                 <a:ea typeface="微软雅黑 Light"/>
               </a:rPr>
-              <a:t>本节课的三个知识点</a:t>
+              <a:t>书里提到的三点，我想聊聊</a:t>
             </a:r>
           </a:p>
         </p:txBody>
@@ -5324,7 +5622,7 @@
             </a:avLst>
           </a:prstGeom>
           <a:solidFill>
-            <a:srgbClr val="2F4858"/>
+            <a:srgbClr val="E2EAEF"/>
           </a:solidFill>
           <a:ln>
             <a:noFill/>
@@ -5379,7 +5677,7 @@
             <a:r>
               <a:rPr sz="1500" b="0">
                 <a:solidFill>
-                  <a:srgbClr val="FFFFFF"/>
+                  <a:srgbClr val="2F4858"/>
                 </a:solidFill>
                 <a:latin typeface="微软雅黑"/>
                 <a:ea typeface="微软雅黑"/>
@@ -5486,7 +5784,7 @@
             </a:avLst>
           </a:prstGeom>
           <a:solidFill>
-            <a:srgbClr val="2F4858"/>
+            <a:srgbClr val="E2EAEF"/>
           </a:solidFill>
           <a:ln>
             <a:noFill/>
@@ -5541,7 +5839,7 @@
             <a:r>
               <a:rPr sz="1500" b="0">
                 <a:solidFill>
-                  <a:srgbClr val="FFFFFF"/>
+                  <a:srgbClr val="2F4858"/>
                 </a:solidFill>
                 <a:latin typeface="微软雅黑"/>
                 <a:ea typeface="微软雅黑"/>
@@ -5648,7 +5946,7 @@
             </a:avLst>
           </a:prstGeom>
           <a:solidFill>
-            <a:srgbClr val="2F4858"/>
+            <a:srgbClr val="E2EAEF"/>
           </a:solidFill>
           <a:ln>
             <a:noFill/>
@@ -5703,7 +6001,7 @@
             <a:r>
               <a:rPr sz="1500" b="0">
                 <a:solidFill>
-                  <a:srgbClr val="FFFFFF"/>
+                  <a:srgbClr val="2F4858"/>
                 </a:solidFill>
                 <a:latin typeface="微软雅黑"/>
                 <a:ea typeface="微软雅黑"/>
@@ -5870,7 +6168,7 @@
                 <a:latin typeface="微软雅黑"/>
                 <a:ea typeface="微软雅黑"/>
               </a:rPr>
-              <a:t>我不想念课本——我想用一段自己的经历，和它们一一对上。</a:t>
+              <a:t>不是上课——就是借这三句话，讲讲我自己的故事。</a:t>
             </a:r>
           </a:p>
         </p:txBody>

--- a/files/creating-a-meaningful-life.pptx
+++ b/files/creating-a-meaningful-life.pptx
@@ -3144,22 +3144,20 @@
       </p:sp>
       <p:sp>
         <p:nvSpPr>
-          <p:cNvPr id="3" name="Rounded Rectangle 2"/>
+          <p:cNvPr id="3" name="Rectangle 2"/>
           <p:cNvSpPr/>
           <p:nvPr/>
         </p:nvSpPr>
         <p:spPr>
           <a:xfrm>
-            <a:off x="7452360" y="1188720"/>
-            <a:ext cx="3867912" cy="4526280"/>
-          </a:xfrm>
-          <a:prstGeom prst="roundRect">
-            <a:avLst>
-              <a:gd name="adj" fmla="val 5000"/>
-            </a:avLst>
-          </a:prstGeom>
-          <a:solidFill>
-            <a:srgbClr val="EEF2F5"/>
+            <a:off x="2743200" y="1097280"/>
+            <a:ext cx="6702552" cy="9144"/>
+          </a:xfrm>
+          <a:prstGeom prst="rect">
+            <a:avLst/>
+          </a:prstGeom>
+          <a:solidFill>
+            <a:srgbClr val="DDE3E8"/>
           </a:solidFill>
           <a:ln>
             <a:noFill/>
@@ -3190,14 +3188,86 @@
       </p:sp>
       <p:sp>
         <p:nvSpPr>
-          <p:cNvPr id="4" name="Rectangle 3"/>
+          <p:cNvPr id="4" name="TextBox 3"/>
+          <p:cNvSpPr txBox="1"/>
+          <p:nvPr/>
+        </p:nvSpPr>
+        <p:spPr>
+          <a:xfrm>
+            <a:off x="822960" y="1243584"/>
+            <a:ext cx="10543032" cy="365760"/>
+          </a:xfrm>
+          <a:prstGeom prst="rect">
+            <a:avLst/>
+          </a:prstGeom>
+          <a:noFill/>
+        </p:spPr>
+        <p:txBody>
+          <a:bodyPr wrap="square" anchor="t">
+            <a:spAutoFit/>
+          </a:bodyPr>
+          <a:lstStyle/>
+          <a:p>
+            <a:pPr algn="ctr"/>
+            <a:r>
+              <a:rPr sz="1250" b="0">
+                <a:solidFill>
+                  <a:srgbClr val="5F6B76"/>
+                </a:solidFill>
+                <a:latin typeface="微软雅黑"/>
+                <a:ea typeface="微软雅黑"/>
+              </a:rPr>
+              <a:t>思想道德与法治 · 课前分享</a:t>
+            </a:r>
+          </a:p>
+        </p:txBody>
+      </p:sp>
+      <p:sp>
+        <p:nvSpPr>
+          <p:cNvPr id="5" name="TextBox 4"/>
+          <p:cNvSpPr txBox="1"/>
+          <p:nvPr/>
+        </p:nvSpPr>
+        <p:spPr>
+          <a:xfrm>
+            <a:off x="822960" y="2560320"/>
+            <a:ext cx="10543032" cy="960120"/>
+          </a:xfrm>
+          <a:prstGeom prst="rect">
+            <a:avLst/>
+          </a:prstGeom>
+          <a:noFill/>
+        </p:spPr>
+        <p:txBody>
+          <a:bodyPr wrap="square" anchor="t">
+            <a:spAutoFit/>
+          </a:bodyPr>
+          <a:lstStyle/>
+          <a:p>
+            <a:pPr algn="ctr"/>
+            <a:r>
+              <a:rPr sz="4200" b="0">
+                <a:solidFill>
+                  <a:srgbClr val="1B1B1B"/>
+                </a:solidFill>
+                <a:latin typeface="微软雅黑 Light"/>
+                <a:ea typeface="微软雅黑 Light"/>
+              </a:rPr>
+              <a:t>创造有意义的人生</a:t>
+            </a:r>
+          </a:p>
+        </p:txBody>
+      </p:sp>
+      <p:sp>
+        <p:nvSpPr>
+          <p:cNvPr id="6" name="Rectangle 5"/>
           <p:cNvSpPr/>
           <p:nvPr/>
         </p:nvSpPr>
         <p:spPr>
           <a:xfrm>
-            <a:off x="7452360" y="1188720"/>
-            <a:ext cx="64008" cy="4526280"/>
+            <a:off x="5550408" y="3749039"/>
+            <a:ext cx="1097280" cy="45720"/>
           </a:xfrm>
           <a:prstGeom prst="rect">
             <a:avLst/>
@@ -3234,20 +3304,56 @@
       </p:sp>
       <p:sp>
         <p:nvSpPr>
-          <p:cNvPr id="5" name="Rectangle 4"/>
+          <p:cNvPr id="7" name="TextBox 6"/>
+          <p:cNvSpPr txBox="1"/>
+          <p:nvPr/>
+        </p:nvSpPr>
+        <p:spPr>
+          <a:xfrm>
+            <a:off x="822960" y="3931920"/>
+            <a:ext cx="10543032" cy="548640"/>
+          </a:xfrm>
+          <a:prstGeom prst="rect">
+            <a:avLst/>
+          </a:prstGeom>
+          <a:noFill/>
+        </p:spPr>
+        <p:txBody>
+          <a:bodyPr wrap="square" anchor="t">
+            <a:spAutoFit/>
+          </a:bodyPr>
+          <a:lstStyle/>
+          <a:p>
+            <a:pPr algn="ctr"/>
+            <a:r>
+              <a:rPr sz="2000" b="0">
+                <a:solidFill>
+                  <a:srgbClr val="2F4858"/>
+                </a:solidFill>
+                <a:latin typeface="微软雅黑 Light"/>
+                <a:ea typeface="微软雅黑 Light"/>
+              </a:rPr>
+              <a:t>从一次被否定说起</a:t>
+            </a:r>
+          </a:p>
+        </p:txBody>
+      </p:sp>
+      <p:sp>
+        <p:nvSpPr>
+          <p:cNvPr id="8" name="Rectangle 7"/>
           <p:cNvSpPr/>
           <p:nvPr/>
         </p:nvSpPr>
         <p:spPr>
           <a:xfrm>
-            <a:off x="7818120" y="1536192"/>
-            <a:ext cx="118872" cy="118872"/>
-          </a:xfrm>
-          <a:prstGeom prst="rect">
-            <a:avLst/>
-          </a:prstGeom>
-          <a:solidFill>
-            <a:srgbClr val="52798A"/>
+            <a:off x="2743200" y="4937760"/>
+            <a:ext cx="6702552" cy="9144"/>
+          </a:xfrm>
+          <a:prstGeom prst="rect">
+            <a:avLst/>
+          </a:prstGeom>
+          <a:solidFill>
+            <a:srgbClr val="DDE3E8"/>
           </a:solidFill>
           <a:ln>
             <a:noFill/>
@@ -3278,14 +3384,14 @@
       </p:sp>
       <p:sp>
         <p:nvSpPr>
-          <p:cNvPr id="6" name="TextBox 5"/>
+          <p:cNvPr id="9" name="TextBox 8"/>
           <p:cNvSpPr txBox="1"/>
           <p:nvPr/>
         </p:nvSpPr>
         <p:spPr>
           <a:xfrm>
-            <a:off x="8037575" y="1481328"/>
-            <a:ext cx="3017520" cy="320040"/>
+            <a:off x="822960" y="5074920"/>
+            <a:ext cx="10543032" cy="914400"/>
           </a:xfrm>
           <a:prstGeom prst="rect">
             <a:avLst/>
@@ -3298,557 +3404,7 @@
           </a:bodyPr>
           <a:lstStyle/>
           <a:p>
-            <a:pPr algn="l"/>
-            <a:r>
-              <a:rPr sz="1200" b="0">
-                <a:solidFill>
-                  <a:srgbClr val="2F4858"/>
-                </a:solidFill>
-                <a:latin typeface="微软雅黑"/>
-                <a:ea typeface="微软雅黑"/>
-              </a:rPr>
-              <a:t>本次分享</a:t>
-            </a:r>
-          </a:p>
-        </p:txBody>
-      </p:sp>
-      <p:sp>
-        <p:nvSpPr>
-          <p:cNvPr id="7" name="Rectangle 6"/>
-          <p:cNvSpPr/>
-          <p:nvPr/>
-        </p:nvSpPr>
-        <p:spPr>
-          <a:xfrm>
-            <a:off x="7818120" y="1993392"/>
-            <a:ext cx="3108960" cy="12801"/>
-          </a:xfrm>
-          <a:prstGeom prst="rect">
-            <a:avLst/>
-          </a:prstGeom>
-          <a:solidFill>
-            <a:srgbClr val="8FA6B4"/>
-          </a:solidFill>
-          <a:ln>
-            <a:noFill/>
-          </a:ln>
-          <a:effectLst/>
-        </p:spPr>
-        <p:style>
-          <a:lnRef idx="1">
-            <a:schemeClr val="accent1"/>
-          </a:lnRef>
-          <a:fillRef idx="3">
-            <a:schemeClr val="accent1"/>
-          </a:fillRef>
-          <a:effectRef idx="2">
-            <a:schemeClr val="accent1"/>
-          </a:effectRef>
-          <a:fontRef idx="minor">
-            <a:schemeClr val="lt1"/>
-          </a:fontRef>
-        </p:style>
-        <p:txBody>
-          <a:bodyPr rtlCol="0" anchor="ctr"/>
-          <a:lstStyle/>
-          <a:p>
-            <a:pPr algn="ctr"/>
-          </a:p>
-        </p:txBody>
-      </p:sp>
-      <p:sp>
-        <p:nvSpPr>
-          <p:cNvPr id="8" name="Rounded Rectangle 7"/>
-          <p:cNvSpPr/>
-          <p:nvPr/>
-        </p:nvSpPr>
-        <p:spPr>
-          <a:xfrm>
-            <a:off x="7818120" y="2286000"/>
-            <a:ext cx="3108960" cy="658368"/>
-          </a:xfrm>
-          <a:prstGeom prst="roundRect">
-            <a:avLst>
-              <a:gd name="adj" fmla="val 14000"/>
-            </a:avLst>
-          </a:prstGeom>
-          <a:solidFill>
-            <a:srgbClr val="E2EAEF"/>
-          </a:solidFill>
-          <a:ln>
-            <a:noFill/>
-          </a:ln>
-          <a:effectLst/>
-        </p:spPr>
-        <p:style>
-          <a:lnRef idx="1">
-            <a:schemeClr val="accent1"/>
-          </a:lnRef>
-          <a:fillRef idx="3">
-            <a:schemeClr val="accent1"/>
-          </a:fillRef>
-          <a:effectRef idx="2">
-            <a:schemeClr val="accent1"/>
-          </a:effectRef>
-          <a:fontRef idx="minor">
-            <a:schemeClr val="lt1"/>
-          </a:fontRef>
-        </p:style>
-        <p:txBody>
-          <a:bodyPr rtlCol="0" anchor="ctr"/>
-          <a:lstStyle/>
-          <a:p>
-            <a:pPr algn="ctr"/>
-          </a:p>
-        </p:txBody>
-      </p:sp>
-      <p:sp>
-        <p:nvSpPr>
-          <p:cNvPr id="9" name="TextBox 8"/>
-          <p:cNvSpPr txBox="1"/>
-          <p:nvPr/>
-        </p:nvSpPr>
-        <p:spPr>
-          <a:xfrm>
-            <a:off x="7818120" y="2286000"/>
-            <a:ext cx="3108960" cy="658368"/>
-          </a:xfrm>
-          <a:prstGeom prst="rect">
-            <a:avLst/>
-          </a:prstGeom>
-          <a:noFill/>
-        </p:spPr>
-        <p:txBody>
-          <a:bodyPr wrap="square" anchor="ctr">
-            <a:spAutoFit/>
-          </a:bodyPr>
-          <a:lstStyle/>
-          <a:p>
-            <a:pPr algn="ctr"/>
-            <a:r>
-              <a:rPr sz="1700" b="0">
-                <a:solidFill>
-                  <a:srgbClr val="2F4858"/>
-                </a:solidFill>
-                <a:latin typeface="微软雅黑"/>
-                <a:ea typeface="微软雅黑"/>
-              </a:rPr>
-              <a:t>动画</a:t>
-            </a:r>
-          </a:p>
-        </p:txBody>
-      </p:sp>
-      <p:sp>
-        <p:nvSpPr>
-          <p:cNvPr id="10" name="Rounded Rectangle 9"/>
-          <p:cNvSpPr/>
-          <p:nvPr/>
-        </p:nvSpPr>
-        <p:spPr>
-          <a:xfrm>
-            <a:off x="7818120" y="3090672"/>
-            <a:ext cx="3108960" cy="658368"/>
-          </a:xfrm>
-          <a:prstGeom prst="roundRect">
-            <a:avLst>
-              <a:gd name="adj" fmla="val 14000"/>
-            </a:avLst>
-          </a:prstGeom>
-          <a:solidFill>
-            <a:srgbClr val="E2EAEF"/>
-          </a:solidFill>
-          <a:ln>
-            <a:noFill/>
-          </a:ln>
-          <a:effectLst/>
-        </p:spPr>
-        <p:style>
-          <a:lnRef idx="1">
-            <a:schemeClr val="accent1"/>
-          </a:lnRef>
-          <a:fillRef idx="3">
-            <a:schemeClr val="accent1"/>
-          </a:fillRef>
-          <a:effectRef idx="2">
-            <a:schemeClr val="accent1"/>
-          </a:effectRef>
-          <a:fontRef idx="minor">
-            <a:schemeClr val="lt1"/>
-          </a:fontRef>
-        </p:style>
-        <p:txBody>
-          <a:bodyPr rtlCol="0" anchor="ctr"/>
-          <a:lstStyle/>
-          <a:p>
-            <a:pPr algn="ctr"/>
-          </a:p>
-        </p:txBody>
-      </p:sp>
-      <p:sp>
-        <p:nvSpPr>
-          <p:cNvPr id="11" name="TextBox 10"/>
-          <p:cNvSpPr txBox="1"/>
-          <p:nvPr/>
-        </p:nvSpPr>
-        <p:spPr>
-          <a:xfrm>
-            <a:off x="7818120" y="3090672"/>
-            <a:ext cx="3108960" cy="658368"/>
-          </a:xfrm>
-          <a:prstGeom prst="rect">
-            <a:avLst/>
-          </a:prstGeom>
-          <a:noFill/>
-        </p:spPr>
-        <p:txBody>
-          <a:bodyPr wrap="square" anchor="ctr">
-            <a:spAutoFit/>
-          </a:bodyPr>
-          <a:lstStyle/>
-          <a:p>
-            <a:pPr algn="ctr"/>
-            <a:r>
-              <a:rPr sz="1700" b="0">
-                <a:solidFill>
-                  <a:srgbClr val="2F4858"/>
-                </a:solidFill>
-                <a:latin typeface="微软雅黑"/>
-                <a:ea typeface="微软雅黑"/>
-              </a:rPr>
-              <a:t>哲学</a:t>
-            </a:r>
-          </a:p>
-        </p:txBody>
-      </p:sp>
-      <p:sp>
-        <p:nvSpPr>
-          <p:cNvPr id="12" name="Rounded Rectangle 11"/>
-          <p:cNvSpPr/>
-          <p:nvPr/>
-        </p:nvSpPr>
-        <p:spPr>
-          <a:xfrm>
-            <a:off x="7818120" y="3895344"/>
-            <a:ext cx="3108960" cy="658368"/>
-          </a:xfrm>
-          <a:prstGeom prst="roundRect">
-            <a:avLst>
-              <a:gd name="adj" fmla="val 14000"/>
-            </a:avLst>
-          </a:prstGeom>
-          <a:solidFill>
-            <a:srgbClr val="E2EAEF"/>
-          </a:solidFill>
-          <a:ln>
-            <a:noFill/>
-          </a:ln>
-          <a:effectLst/>
-        </p:spPr>
-        <p:style>
-          <a:lnRef idx="1">
-            <a:schemeClr val="accent1"/>
-          </a:lnRef>
-          <a:fillRef idx="3">
-            <a:schemeClr val="accent1"/>
-          </a:fillRef>
-          <a:effectRef idx="2">
-            <a:schemeClr val="accent1"/>
-          </a:effectRef>
-          <a:fontRef idx="minor">
-            <a:schemeClr val="lt1"/>
-          </a:fontRef>
-        </p:style>
-        <p:txBody>
-          <a:bodyPr rtlCol="0" anchor="ctr"/>
-          <a:lstStyle/>
-          <a:p>
-            <a:pPr algn="ctr"/>
-          </a:p>
-        </p:txBody>
-      </p:sp>
-      <p:sp>
-        <p:nvSpPr>
-          <p:cNvPr id="13" name="TextBox 12"/>
-          <p:cNvSpPr txBox="1"/>
-          <p:nvPr/>
-        </p:nvSpPr>
-        <p:spPr>
-          <a:xfrm>
-            <a:off x="7818120" y="3895344"/>
-            <a:ext cx="3108960" cy="658368"/>
-          </a:xfrm>
-          <a:prstGeom prst="rect">
-            <a:avLst/>
-          </a:prstGeom>
-          <a:noFill/>
-        </p:spPr>
-        <p:txBody>
-          <a:bodyPr wrap="square" anchor="ctr">
-            <a:spAutoFit/>
-          </a:bodyPr>
-          <a:lstStyle/>
-          <a:p>
-            <a:pPr algn="ctr"/>
-            <a:r>
-              <a:rPr sz="1700" b="0">
-                <a:solidFill>
-                  <a:srgbClr val="2F4858"/>
-                </a:solidFill>
-                <a:latin typeface="微软雅黑"/>
-                <a:ea typeface="微软雅黑"/>
-              </a:rPr>
-              <a:t>编程</a:t>
-            </a:r>
-          </a:p>
-        </p:txBody>
-      </p:sp>
-      <p:sp>
-        <p:nvSpPr>
-          <p:cNvPr id="14" name="TextBox 13"/>
-          <p:cNvSpPr txBox="1"/>
-          <p:nvPr/>
-        </p:nvSpPr>
-        <p:spPr>
-          <a:xfrm>
-            <a:off x="7818120" y="4828032"/>
-            <a:ext cx="3108960" cy="365760"/>
-          </a:xfrm>
-          <a:prstGeom prst="rect">
-            <a:avLst/>
-          </a:prstGeom>
-          <a:noFill/>
-        </p:spPr>
-        <p:txBody>
-          <a:bodyPr wrap="square" anchor="t">
-            <a:spAutoFit/>
-          </a:bodyPr>
-          <a:lstStyle/>
-          <a:p>
-            <a:pPr algn="l"/>
-            <a:r>
-              <a:rPr sz="1150" b="0">
-                <a:solidFill>
-                  <a:srgbClr val="5F6B76"/>
-                </a:solidFill>
-                <a:latin typeface="微软雅黑"/>
-                <a:ea typeface="微软雅黑"/>
-              </a:rPr>
-              <a:t>一次关于「意义」的自言自语</a:t>
-            </a:r>
-          </a:p>
-        </p:txBody>
-      </p:sp>
-      <p:sp>
-        <p:nvSpPr>
-          <p:cNvPr id="15" name="TextBox 14"/>
-          <p:cNvSpPr txBox="1"/>
-          <p:nvPr/>
-        </p:nvSpPr>
-        <p:spPr>
-          <a:xfrm>
-            <a:off x="7818120" y="5321808"/>
-            <a:ext cx="3108960" cy="320040"/>
-          </a:xfrm>
-          <a:prstGeom prst="rect">
-            <a:avLst/>
-          </a:prstGeom>
-          <a:noFill/>
-        </p:spPr>
-        <p:txBody>
-          <a:bodyPr wrap="square" anchor="t">
-            <a:spAutoFit/>
-          </a:bodyPr>
-          <a:lstStyle/>
-          <a:p>
-            <a:pPr algn="l"/>
-            <a:r>
-              <a:rPr sz="1050" b="0">
-                <a:solidFill>
-                  <a:srgbClr val="98A2AB"/>
-                </a:solidFill>
-                <a:latin typeface="微软雅黑"/>
-                <a:ea typeface="微软雅黑"/>
-              </a:rPr>
-              <a:t>第一章 · 第三节</a:t>
-            </a:r>
-          </a:p>
-        </p:txBody>
-      </p:sp>
-      <p:sp>
-        <p:nvSpPr>
-          <p:cNvPr id="16" name="TextBox 15"/>
-          <p:cNvSpPr txBox="1"/>
-          <p:nvPr/>
-        </p:nvSpPr>
-        <p:spPr>
-          <a:xfrm>
-            <a:off x="960120" y="960120"/>
-            <a:ext cx="6035040" cy="320040"/>
-          </a:xfrm>
-          <a:prstGeom prst="rect">
-            <a:avLst/>
-          </a:prstGeom>
-          <a:noFill/>
-        </p:spPr>
-        <p:txBody>
-          <a:bodyPr wrap="square" anchor="t">
-            <a:spAutoFit/>
-          </a:bodyPr>
-          <a:lstStyle/>
-          <a:p>
-            <a:pPr algn="l"/>
-            <a:r>
-              <a:rPr sz="1250" b="0">
-                <a:solidFill>
-                  <a:srgbClr val="5F6B76"/>
-                </a:solidFill>
-                <a:latin typeface="微软雅黑"/>
-                <a:ea typeface="微软雅黑"/>
-              </a:rPr>
-              <a:t>思想道德与法治 · 课前分享</a:t>
-            </a:r>
-          </a:p>
-        </p:txBody>
-      </p:sp>
-      <p:sp>
-        <p:nvSpPr>
-          <p:cNvPr id="17" name="TextBox 16"/>
-          <p:cNvSpPr txBox="1"/>
-          <p:nvPr/>
-        </p:nvSpPr>
-        <p:spPr>
-          <a:xfrm>
-            <a:off x="960120" y="2240280"/>
-            <a:ext cx="6217920" cy="914400"/>
-          </a:xfrm>
-          <a:prstGeom prst="rect">
-            <a:avLst/>
-          </a:prstGeom>
-          <a:noFill/>
-        </p:spPr>
-        <p:txBody>
-          <a:bodyPr wrap="square" anchor="t">
-            <a:spAutoFit/>
-          </a:bodyPr>
-          <a:lstStyle/>
-          <a:p>
-            <a:pPr algn="l"/>
-            <a:r>
-              <a:rPr sz="4000" b="0">
-                <a:solidFill>
-                  <a:srgbClr val="1B1B1B"/>
-                </a:solidFill>
-                <a:latin typeface="微软雅黑 Light"/>
-                <a:ea typeface="微软雅黑 Light"/>
-              </a:rPr>
-              <a:t>创造有意义的人生</a:t>
-            </a:r>
-          </a:p>
-        </p:txBody>
-      </p:sp>
-      <p:sp>
-        <p:nvSpPr>
-          <p:cNvPr id="18" name="Rectangle 17"/>
-          <p:cNvSpPr/>
-          <p:nvPr/>
-        </p:nvSpPr>
-        <p:spPr>
-          <a:xfrm>
-            <a:off x="960120" y="3310128"/>
-            <a:ext cx="1737360" cy="45720"/>
-          </a:xfrm>
-          <a:prstGeom prst="rect">
-            <a:avLst/>
-          </a:prstGeom>
-          <a:solidFill>
-            <a:srgbClr val="52798A"/>
-          </a:solidFill>
-          <a:ln>
-            <a:noFill/>
-          </a:ln>
-          <a:effectLst/>
-        </p:spPr>
-        <p:style>
-          <a:lnRef idx="1">
-            <a:schemeClr val="accent1"/>
-          </a:lnRef>
-          <a:fillRef idx="3">
-            <a:schemeClr val="accent1"/>
-          </a:fillRef>
-          <a:effectRef idx="2">
-            <a:schemeClr val="accent1"/>
-          </a:effectRef>
-          <a:fontRef idx="minor">
-            <a:schemeClr val="lt1"/>
-          </a:fontRef>
-        </p:style>
-        <p:txBody>
-          <a:bodyPr rtlCol="0" anchor="ctr"/>
-          <a:lstStyle/>
-          <a:p>
-            <a:pPr algn="ctr"/>
-          </a:p>
-        </p:txBody>
-      </p:sp>
-      <p:sp>
-        <p:nvSpPr>
-          <p:cNvPr id="19" name="TextBox 18"/>
-          <p:cNvSpPr txBox="1"/>
-          <p:nvPr/>
-        </p:nvSpPr>
-        <p:spPr>
-          <a:xfrm>
-            <a:off x="960120" y="3520440"/>
-            <a:ext cx="6035040" cy="457200"/>
-          </a:xfrm>
-          <a:prstGeom prst="rect">
-            <a:avLst/>
-          </a:prstGeom>
-          <a:noFill/>
-        </p:spPr>
-        <p:txBody>
-          <a:bodyPr wrap="square" anchor="t">
-            <a:spAutoFit/>
-          </a:bodyPr>
-          <a:lstStyle/>
-          <a:p>
-            <a:pPr algn="l"/>
-            <a:r>
-              <a:rPr sz="2000" b="0">
-                <a:solidFill>
-                  <a:srgbClr val="2F4858"/>
-                </a:solidFill>
-                <a:latin typeface="微软雅黑 Light"/>
-                <a:ea typeface="微软雅黑 Light"/>
-              </a:rPr>
-              <a:t>从一次被否定说起</a:t>
-            </a:r>
-          </a:p>
-        </p:txBody>
-      </p:sp>
-      <p:sp>
-        <p:nvSpPr>
-          <p:cNvPr id="20" name="TextBox 19"/>
-          <p:cNvSpPr txBox="1"/>
-          <p:nvPr/>
-        </p:nvSpPr>
-        <p:spPr>
-          <a:xfrm>
-            <a:off x="960120" y="4892040"/>
-            <a:ext cx="6035040" cy="914400"/>
-          </a:xfrm>
-          <a:prstGeom prst="rect">
-            <a:avLst/>
-          </a:prstGeom>
-          <a:noFill/>
-        </p:spPr>
-        <p:txBody>
-          <a:bodyPr wrap="square" anchor="t">
-            <a:spAutoFit/>
-          </a:bodyPr>
-          <a:lstStyle/>
-          <a:p>
-            <a:pPr algn="l">
+            <a:pPr algn="ctr">
               <a:spcAft>
                 <a:spcPts val="600"/>
               </a:spcAft>
@@ -3865,7 +3421,7 @@
             </a:r>
           </a:p>
           <a:p>
-            <a:pPr algn="l"/>
+            <a:pPr algn="ctr"/>
             <a:r>
               <a:rPr sz="1250" b="0">
                 <a:solidFill>
@@ -3881,13 +3437,13 @@
       </p:sp>
       <p:sp>
         <p:nvSpPr>
-          <p:cNvPr id="21" name="TextBox 20"/>
+          <p:cNvPr id="10" name="TextBox 9"/>
           <p:cNvSpPr txBox="1"/>
           <p:nvPr/>
         </p:nvSpPr>
         <p:spPr>
           <a:xfrm>
-            <a:off x="960120" y="6400800"/>
+            <a:off x="914400" y="6400800"/>
             <a:ext cx="4572000" cy="320040"/>
           </a:xfrm>
           <a:prstGeom prst="rect">
@@ -3917,7 +3473,7 @@
       </p:sp>
       <p:sp>
         <p:nvSpPr>
-          <p:cNvPr id="22" name="TextBox 21"/>
+          <p:cNvPr id="11" name="TextBox 10"/>
           <p:cNvSpPr txBox="1"/>
           <p:nvPr/>
         </p:nvSpPr>
